--- a/AI_Resume_Optimizer_Presentation.pptx
+++ b/AI_Resume_Optimizer_Presentation.pptx
@@ -17,6 +17,7 @@
     <p:sldId id="265" r:id="rId16"/>
     <p:sldId id="266" r:id="rId17"/>
     <p:sldId id="267" r:id="rId18"/>
+    <p:sldId id="268" r:id="rId19"/>
   </p:sldIdLst>
   <p:sldSz cx="12191695" cy="6858000" type="screen4x3"/>
   <p:notesSz cx="6858000" cy="9144000"/>
@@ -3116,7 +3117,7 @@
         <p:spPr>
           <a:xfrm>
             <a:off x="914400" y="1371600"/>
-            <a:ext cx="10058400" cy="1097280"/>
+            <a:ext cx="10058400" cy="914400"/>
           </a:xfrm>
           <a:prstGeom prst="rect">
             <a:avLst/>
@@ -3637,7 +3638,7 @@
               </a:defRPr>
             </a:pPr>
             <a:r>
-              <a:t>Avg. Processing</a:t>
+              <a:t>Processing</a:t>
             </a:r>
           </a:p>
         </p:txBody>
@@ -3753,7 +3754,7 @@
               </a:defRPr>
             </a:pPr>
             <a:r>
-              <a:t>Running Cost</a:t>
+              <a:t>Cost</a:t>
             </a:r>
           </a:p>
         </p:txBody>
@@ -3911,7 +3912,7 @@
               </a:defRPr>
             </a:pPr>
             <a:r>
-              <a:t>Future Enhancement Ideas</a:t>
+              <a:t>Deployment Guide</a:t>
             </a:r>
           </a:p>
         </p:txBody>
@@ -3947,7 +3948,7 @@
               </a:defRPr>
             </a:pPr>
             <a:r>
-              <a:t>Whats next for AI Resume Optimizer</a:t>
+              <a:t>Run it anywhere — local, cloud, or managed</a:t>
             </a:r>
           </a:p>
         </p:txBody>
@@ -4003,8 +4004,8 @@
         </p:nvSpPr>
         <p:spPr>
           <a:xfrm>
-            <a:off x="365760" y="1371600"/>
-            <a:ext cx="2651760" cy="1463040"/>
+            <a:off x="457200" y="1371600"/>
+            <a:ext cx="3657600" cy="2286000"/>
           </a:xfrm>
           <a:prstGeom prst="roundRect">
             <a:avLst/>
@@ -4047,22 +4048,22 @@
         </p:nvSpPr>
         <p:spPr>
           <a:xfrm>
-            <a:off x="502920" y="1463040"/>
-            <a:ext cx="2377440" cy="320040"/>
-          </a:xfrm>
-          <a:prstGeom prst="rect">
-            <a:avLst/>
-          </a:prstGeom>
-          <a:noFill/>
-        </p:spPr>
-        <p:txBody>
-          <a:bodyPr wrap="square">
-            <a:spAutoFit/>
-          </a:bodyPr>
-          <a:lstStyle/>
-          <a:p>
-            <a:pPr algn="l">
-              <a:defRPr sz="1400" b="1">
+            <a:off x="640080" y="1463040"/>
+            <a:ext cx="3291840" cy="365760"/>
+          </a:xfrm>
+          <a:prstGeom prst="rect">
+            <a:avLst/>
+          </a:prstGeom>
+          <a:noFill/>
+        </p:spPr>
+        <p:txBody>
+          <a:bodyPr wrap="square">
+            <a:spAutoFit/>
+          </a:bodyPr>
+          <a:lstStyle/>
+          <a:p>
+            <a:pPr algn="l">
+              <a:defRPr sz="1800" b="1">
                 <a:solidFill>
                   <a:srgbClr val="A78BFA"/>
                 </a:solidFill>
@@ -4070,7 +4071,7 @@
               </a:defRPr>
             </a:pPr>
             <a:r>
-              <a:t>Email Delivery</a:t>
+              <a:t>Local Docker</a:t>
             </a:r>
           </a:p>
         </p:txBody>
@@ -4083,8 +4084,8 @@
         </p:nvSpPr>
         <p:spPr>
           <a:xfrm>
-            <a:off x="502920" y="1828800"/>
-            <a:ext cx="2377440" cy="822960"/>
+            <a:off x="640080" y="2011680"/>
+            <a:ext cx="3291840" cy="731520"/>
           </a:xfrm>
           <a:prstGeom prst="rect">
             <a:avLst/>
@@ -4100,27 +4101,63 @@
             <a:pPr algn="l">
               <a:defRPr sz="1200" b="0">
                 <a:solidFill>
-                  <a:srgbClr val="E0E0E0"/>
-                </a:solidFill>
-                <a:latin typeface="Calibri"/>
-              </a:defRPr>
-            </a:pPr>
-            <a:r>
-              <a:t>Gmail node to send PDF + Cover Letter to recruiters</a:t>
-            </a:r>
-          </a:p>
-        </p:txBody>
-      </p:sp>
-      <p:sp>
-        <p:nvSpPr>
-          <p:cNvPr id="10" name="Rounded Rectangle 9"/>
+                  <a:srgbClr val="FBBF24"/>
+                </a:solidFill>
+                <a:latin typeface="Calibri"/>
+              </a:defRPr>
+            </a:pPr>
+            <a:r>
+              <a:t>docker run -it --rm -p 5678:5678 docker.n8n.io/n8nio/n8n</a:t>
+            </a:r>
+          </a:p>
+        </p:txBody>
+      </p:sp>
+      <p:sp>
+        <p:nvSpPr>
+          <p:cNvPr id="10" name="TextBox 9"/>
+          <p:cNvSpPr txBox="1"/>
+          <p:nvPr/>
+        </p:nvSpPr>
+        <p:spPr>
+          <a:xfrm>
+            <a:off x="640080" y="2926080"/>
+            <a:ext cx="3291840" cy="365760"/>
+          </a:xfrm>
+          <a:prstGeom prst="rect">
+            <a:avLst/>
+          </a:prstGeom>
+          <a:noFill/>
+        </p:spPr>
+        <p:txBody>
+          <a:bodyPr wrap="square">
+            <a:spAutoFit/>
+          </a:bodyPr>
+          <a:lstStyle/>
+          <a:p>
+            <a:pPr algn="l">
+              <a:defRPr sz="1200" b="0">
+                <a:solidFill>
+                  <a:srgbClr val="34D399"/>
+                </a:solidFill>
+                <a:latin typeface="Calibri"/>
+              </a:defRPr>
+            </a:pPr>
+            <a:r>
+              <a:t>Self-hosted, full control, free</a:t>
+            </a:r>
+          </a:p>
+        </p:txBody>
+      </p:sp>
+      <p:sp>
+        <p:nvSpPr>
+          <p:cNvPr id="11" name="Rounded Rectangle 10"/>
           <p:cNvSpPr/>
           <p:nvPr/>
         </p:nvSpPr>
         <p:spPr>
           <a:xfrm>
-            <a:off x="3291840" y="1371600"/>
-            <a:ext cx="2651760" cy="1463040"/>
+            <a:off x="4389120" y="1371600"/>
+            <a:ext cx="3657600" cy="2286000"/>
           </a:xfrm>
           <a:prstGeom prst="roundRect">
             <a:avLst/>
@@ -4157,28 +4194,28 @@
       </p:sp>
       <p:sp>
         <p:nvSpPr>
-          <p:cNvPr id="11" name="TextBox 10"/>
-          <p:cNvSpPr txBox="1"/>
-          <p:nvPr/>
-        </p:nvSpPr>
-        <p:spPr>
-          <a:xfrm>
-            <a:off x="3429000" y="1463040"/>
-            <a:ext cx="2377440" cy="320040"/>
-          </a:xfrm>
-          <a:prstGeom prst="rect">
-            <a:avLst/>
-          </a:prstGeom>
-          <a:noFill/>
-        </p:spPr>
-        <p:txBody>
-          <a:bodyPr wrap="square">
-            <a:spAutoFit/>
-          </a:bodyPr>
-          <a:lstStyle/>
-          <a:p>
-            <a:pPr algn="l">
-              <a:defRPr sz="1400" b="1">
+          <p:cNvPr id="12" name="TextBox 11"/>
+          <p:cNvSpPr txBox="1"/>
+          <p:nvPr/>
+        </p:nvSpPr>
+        <p:spPr>
+          <a:xfrm>
+            <a:off x="4572000" y="1463040"/>
+            <a:ext cx="3291840" cy="365760"/>
+          </a:xfrm>
+          <a:prstGeom prst="rect">
+            <a:avLst/>
+          </a:prstGeom>
+          <a:noFill/>
+        </p:spPr>
+        <p:txBody>
+          <a:bodyPr wrap="square">
+            <a:spAutoFit/>
+          </a:bodyPr>
+          <a:lstStyle/>
+          <a:p>
+            <a:pPr algn="l">
+              <a:defRPr sz="1800" b="1">
                 <a:solidFill>
                   <a:srgbClr val="A78BFA"/>
                 </a:solidFill>
@@ -4186,21 +4223,21 @@
               </a:defRPr>
             </a:pPr>
             <a:r>
-              <a:t>Parallel Processing</a:t>
-            </a:r>
-          </a:p>
-        </p:txBody>
-      </p:sp>
-      <p:sp>
-        <p:nvSpPr>
-          <p:cNvPr id="12" name="TextBox 11"/>
-          <p:cNvSpPr txBox="1"/>
-          <p:nvPr/>
-        </p:nvSpPr>
-        <p:spPr>
-          <a:xfrm>
-            <a:off x="3429000" y="1828800"/>
-            <a:ext cx="2377440" cy="822960"/>
+              <a:t>n8n.cloud</a:t>
+            </a:r>
+          </a:p>
+        </p:txBody>
+      </p:sp>
+      <p:sp>
+        <p:nvSpPr>
+          <p:cNvPr id="13" name="TextBox 12"/>
+          <p:cNvSpPr txBox="1"/>
+          <p:nvPr/>
+        </p:nvSpPr>
+        <p:spPr>
+          <a:xfrm>
+            <a:off x="4572000" y="2011680"/>
+            <a:ext cx="3291840" cy="731520"/>
           </a:xfrm>
           <a:prstGeom prst="rect">
             <a:avLst/>
@@ -4216,27 +4253,63 @@
             <a:pPr algn="l">
               <a:defRPr sz="1200" b="0">
                 <a:solidFill>
-                  <a:srgbClr val="E0E0E0"/>
-                </a:solidFill>
-                <a:latin typeface="Calibri"/>
-              </a:defRPr>
-            </a:pPr>
-            <a:r>
-              <a:t>Run Resume and JD parsers simultaneously - 40% faster</a:t>
-            </a:r>
-          </a:p>
-        </p:txBody>
-      </p:sp>
-      <p:sp>
-        <p:nvSpPr>
-          <p:cNvPr id="13" name="Rounded Rectangle 12"/>
+                  <a:srgbClr val="FBBF24"/>
+                </a:solidFill>
+                <a:latin typeface="Calibri"/>
+              </a:defRPr>
+            </a:pPr>
+            <a:r>
+              <a:t>Managed SaaS at n8n.cloud</a:t>
+            </a:r>
+          </a:p>
+        </p:txBody>
+      </p:sp>
+      <p:sp>
+        <p:nvSpPr>
+          <p:cNvPr id="14" name="TextBox 13"/>
+          <p:cNvSpPr txBox="1"/>
+          <p:nvPr/>
+        </p:nvSpPr>
+        <p:spPr>
+          <a:xfrm>
+            <a:off x="4572000" y="2926080"/>
+            <a:ext cx="3291840" cy="365760"/>
+          </a:xfrm>
+          <a:prstGeom prst="rect">
+            <a:avLst/>
+          </a:prstGeom>
+          <a:noFill/>
+        </p:spPr>
+        <p:txBody>
+          <a:bodyPr wrap="square">
+            <a:spAutoFit/>
+          </a:bodyPr>
+          <a:lstStyle/>
+          <a:p>
+            <a:pPr algn="l">
+              <a:defRPr sz="1200" b="0">
+                <a:solidFill>
+                  <a:srgbClr val="34D399"/>
+                </a:solidFill>
+                <a:latin typeface="Calibri"/>
+              </a:defRPr>
+            </a:pPr>
+            <a:r>
+              <a:t>Zero maintenance, free tier available</a:t>
+            </a:r>
+          </a:p>
+        </p:txBody>
+      </p:sp>
+      <p:sp>
+        <p:nvSpPr>
+          <p:cNvPr id="15" name="Rounded Rectangle 14"/>
           <p:cNvSpPr/>
           <p:nvPr/>
         </p:nvSpPr>
         <p:spPr>
           <a:xfrm>
-            <a:off x="6217920" y="1371600"/>
-            <a:ext cx="2651760" cy="1463040"/>
+            <a:off x="8321040" y="1371600"/>
+            <a:ext cx="3657600" cy="2286000"/>
           </a:xfrm>
           <a:prstGeom prst="roundRect">
             <a:avLst/>
@@ -4273,28 +4346,28 @@
       </p:sp>
       <p:sp>
         <p:nvSpPr>
-          <p:cNvPr id="14" name="TextBox 13"/>
-          <p:cNvSpPr txBox="1"/>
-          <p:nvPr/>
-        </p:nvSpPr>
-        <p:spPr>
-          <a:xfrm>
-            <a:off x="6355080" y="1463040"/>
-            <a:ext cx="2377440" cy="320040"/>
-          </a:xfrm>
-          <a:prstGeom prst="rect">
-            <a:avLst/>
-          </a:prstGeom>
-          <a:noFill/>
-        </p:spPr>
-        <p:txBody>
-          <a:bodyPr wrap="square">
-            <a:spAutoFit/>
-          </a:bodyPr>
-          <a:lstStyle/>
-          <a:p>
-            <a:pPr algn="l">
-              <a:defRPr sz="1400" b="1">
+          <p:cNvPr id="16" name="TextBox 15"/>
+          <p:cNvSpPr txBox="1"/>
+          <p:nvPr/>
+        </p:nvSpPr>
+        <p:spPr>
+          <a:xfrm>
+            <a:off x="8503920" y="1463040"/>
+            <a:ext cx="3291840" cy="365760"/>
+          </a:xfrm>
+          <a:prstGeom prst="rect">
+            <a:avLst/>
+          </a:prstGeom>
+          <a:noFill/>
+        </p:spPr>
+        <p:txBody>
+          <a:bodyPr wrap="square">
+            <a:spAutoFit/>
+          </a:bodyPr>
+          <a:lstStyle/>
+          <a:p>
+            <a:pPr algn="l">
+              <a:defRPr sz="1800" b="1">
                 <a:solidFill>
                   <a:srgbClr val="A78BFA"/>
                 </a:solidFill>
@@ -4302,21 +4375,21 @@
               </a:defRPr>
             </a:pPr>
             <a:r>
-              <a:t>Instant Acknowledgment</a:t>
-            </a:r>
-          </a:p>
-        </p:txBody>
-      </p:sp>
-      <p:sp>
-        <p:nvSpPr>
-          <p:cNvPr id="15" name="TextBox 14"/>
-          <p:cNvSpPr txBox="1"/>
-          <p:nvPr/>
-        </p:nvSpPr>
-        <p:spPr>
-          <a:xfrm>
-            <a:off x="6355080" y="1828800"/>
-            <a:ext cx="2377440" cy="822960"/>
+              <a:t>Railway/Render</a:t>
+            </a:r>
+          </a:p>
+        </p:txBody>
+      </p:sp>
+      <p:sp>
+        <p:nvSpPr>
+          <p:cNvPr id="17" name="TextBox 16"/>
+          <p:cNvSpPr txBox="1"/>
+          <p:nvPr/>
+        </p:nvSpPr>
+        <p:spPr>
+          <a:xfrm>
+            <a:off x="8503920" y="2011680"/>
+            <a:ext cx="3291840" cy="731520"/>
           </a:xfrm>
           <a:prstGeom prst="rect">
             <a:avLst/>
@@ -4332,121 +4405,149 @@
             <a:pPr algn="l">
               <a:defRPr sz="1200" b="0">
                 <a:solidFill>
+                  <a:srgbClr val="FBBF24"/>
+                </a:solidFill>
+                <a:latin typeface="Calibri"/>
+              </a:defRPr>
+            </a:pPr>
+            <a:r>
+              <a:t>One-click deploy from GitHub</a:t>
+            </a:r>
+          </a:p>
+        </p:txBody>
+      </p:sp>
+      <p:sp>
+        <p:nvSpPr>
+          <p:cNvPr id="18" name="TextBox 17"/>
+          <p:cNvSpPr txBox="1"/>
+          <p:nvPr/>
+        </p:nvSpPr>
+        <p:spPr>
+          <a:xfrm>
+            <a:off x="8503920" y="2926080"/>
+            <a:ext cx="3291840" cy="365760"/>
+          </a:xfrm>
+          <a:prstGeom prst="rect">
+            <a:avLst/>
+          </a:prstGeom>
+          <a:noFill/>
+        </p:spPr>
+        <p:txBody>
+          <a:bodyPr wrap="square">
+            <a:spAutoFit/>
+          </a:bodyPr>
+          <a:lstStyle/>
+          <a:p>
+            <a:pPr algn="l">
+              <a:defRPr sz="1200" b="0">
+                <a:solidFill>
+                  <a:srgbClr val="34D399"/>
+                </a:solidFill>
+                <a:latin typeface="Calibri"/>
+              </a:defRPr>
+            </a:pPr>
+            <a:r>
+              <a:t>Auto-scaling, simple setup</a:t>
+            </a:r>
+          </a:p>
+        </p:txBody>
+      </p:sp>
+      <p:sp>
+        <p:nvSpPr>
+          <p:cNvPr id="19" name="TextBox 18"/>
+          <p:cNvSpPr txBox="1"/>
+          <p:nvPr/>
+        </p:nvSpPr>
+        <p:spPr>
+          <a:xfrm>
+            <a:off x="457200" y="3931920"/>
+            <a:ext cx="10972800" cy="365760"/>
+          </a:xfrm>
+          <a:prstGeom prst="rect">
+            <a:avLst/>
+          </a:prstGeom>
+          <a:noFill/>
+        </p:spPr>
+        <p:txBody>
+          <a:bodyPr wrap="square">
+            <a:spAutoFit/>
+          </a:bodyPr>
+          <a:lstStyle/>
+          <a:p>
+            <a:pPr algn="l">
+              <a:defRPr sz="2000" b="1">
+                <a:solidFill>
+                  <a:srgbClr val="FFFFFF"/>
+                </a:solidFill>
+                <a:latin typeface="Calibri"/>
+              </a:defRPr>
+            </a:pPr>
+            <a:r>
+              <a:t>Post-Deployment Checklist</a:t>
+            </a:r>
+          </a:p>
+        </p:txBody>
+      </p:sp>
+      <p:sp>
+        <p:nvSpPr>
+          <p:cNvPr id="20" name="TextBox 19"/>
+          <p:cNvSpPr txBox="1"/>
+          <p:nvPr/>
+        </p:nvSpPr>
+        <p:spPr>
+          <a:xfrm>
+            <a:off x="640080" y="4389120"/>
+            <a:ext cx="10058400" cy="320040"/>
+          </a:xfrm>
+          <a:prstGeom prst="rect">
+            <a:avLst/>
+          </a:prstGeom>
+          <a:noFill/>
+        </p:spPr>
+        <p:txBody>
+          <a:bodyPr wrap="square">
+            <a:spAutoFit/>
+          </a:bodyPr>
+          <a:lstStyle/>
+          <a:p>
+            <a:pPr algn="l">
+              <a:defRPr sz="1300" b="0">
+                <a:solidFill>
                   <a:srgbClr val="E0E0E0"/>
                 </a:solidFill>
                 <a:latin typeface="Calibri"/>
               </a:defRPr>
             </a:pPr>
             <a:r>
-              <a:t>Auto-reply on form submit</a:t>
-            </a:r>
-          </a:p>
-        </p:txBody>
-      </p:sp>
-      <p:sp>
-        <p:nvSpPr>
-          <p:cNvPr id="16" name="Rounded Rectangle 15"/>
-          <p:cNvSpPr/>
-          <p:nvPr/>
-        </p:nvSpPr>
-        <p:spPr>
-          <a:xfrm>
-            <a:off x="9144000" y="1371600"/>
-            <a:ext cx="2651760" cy="1463040"/>
-          </a:xfrm>
-          <a:prstGeom prst="roundRect">
-            <a:avLst/>
-          </a:prstGeom>
-          <a:solidFill>
-            <a:srgbClr val="1A1A4E"/>
-          </a:solidFill>
-          <a:ln>
-            <a:noFill/>
-          </a:ln>
-          <a:effectLst/>
-        </p:spPr>
-        <p:style>
-          <a:lnRef idx="1">
-            <a:schemeClr val="accent1"/>
-          </a:lnRef>
-          <a:fillRef idx="3">
-            <a:schemeClr val="accent1"/>
-          </a:fillRef>
-          <a:effectRef idx="2">
-            <a:schemeClr val="accent1"/>
-          </a:effectRef>
-          <a:fontRef idx="minor">
-            <a:schemeClr val="lt1"/>
-          </a:fontRef>
-        </p:style>
-        <p:txBody>
-          <a:bodyPr rtlCol="0" anchor="ctr"/>
-          <a:lstStyle/>
-          <a:p>
-            <a:pPr algn="ctr"/>
-          </a:p>
-        </p:txBody>
-      </p:sp>
-      <p:sp>
-        <p:nvSpPr>
-          <p:cNvPr id="17" name="TextBox 16"/>
-          <p:cNvSpPr txBox="1"/>
-          <p:nvPr/>
-        </p:nvSpPr>
-        <p:spPr>
-          <a:xfrm>
-            <a:off x="9281160" y="1463040"/>
-            <a:ext cx="2377440" cy="320040"/>
-          </a:xfrm>
-          <a:prstGeom prst="rect">
-            <a:avLst/>
-          </a:prstGeom>
-          <a:noFill/>
-        </p:spPr>
-        <p:txBody>
-          <a:bodyPr wrap="square">
-            <a:spAutoFit/>
-          </a:bodyPr>
-          <a:lstStyle/>
-          <a:p>
-            <a:pPr algn="l">
-              <a:defRPr sz="1400" b="1">
-                <a:solidFill>
-                  <a:srgbClr val="A78BFA"/>
-                </a:solidFill>
-                <a:latin typeface="Calibri"/>
-              </a:defRPr>
-            </a:pPr>
-            <a:r>
-              <a:t>Error Alerts</a:t>
-            </a:r>
-          </a:p>
-        </p:txBody>
-      </p:sp>
-      <p:sp>
-        <p:nvSpPr>
-          <p:cNvPr id="18" name="TextBox 17"/>
-          <p:cNvSpPr txBox="1"/>
-          <p:nvPr/>
-        </p:nvSpPr>
-        <p:spPr>
-          <a:xfrm>
-            <a:off x="9281160" y="1828800"/>
-            <a:ext cx="2377440" cy="822960"/>
-          </a:xfrm>
-          <a:prstGeom prst="rect">
-            <a:avLst/>
-          </a:prstGeom>
-          <a:noFill/>
-        </p:spPr>
-        <p:txBody>
-          <a:bodyPr wrap="square">
-            <a:spAutoFit/>
-          </a:bodyPr>
-          <a:lstStyle/>
-          <a:p>
-            <a:pPr algn="l">
-              <a:defRPr sz="1200" b="0">
+              <a:t>Add Google PaLM API credential in n8n Settings &gt; Credentials</a:t>
+            </a:r>
+          </a:p>
+        </p:txBody>
+      </p:sp>
+      <p:sp>
+        <p:nvSpPr>
+          <p:cNvPr id="21" name="TextBox 20"/>
+          <p:cNvSpPr txBox="1"/>
+          <p:nvPr/>
+        </p:nvSpPr>
+        <p:spPr>
+          <a:xfrm>
+            <a:off x="640080" y="4800600"/>
+            <a:ext cx="10058400" cy="320040"/>
+          </a:xfrm>
+          <a:prstGeom prst="rect">
+            <a:avLst/>
+          </a:prstGeom>
+          <a:noFill/>
+        </p:spPr>
+        <p:txBody>
+          <a:bodyPr wrap="square">
+            <a:spAutoFit/>
+          </a:bodyPr>
+          <a:lstStyle/>
+          <a:p>
+            <a:pPr algn="l">
+              <a:defRPr sz="1300" b="0">
                 <a:solidFill>
                   <a:srgbClr val="E0E0E0"/>
                 </a:solidFill>
@@ -4454,115 +4555,35 @@
               </a:defRPr>
             </a:pPr>
             <a:r>
-              <a:t>Error Trigger to Telegram on failure</a:t>
-            </a:r>
-          </a:p>
-        </p:txBody>
-      </p:sp>
-      <p:sp>
-        <p:nvSpPr>
-          <p:cNvPr id="19" name="Rounded Rectangle 18"/>
-          <p:cNvSpPr/>
-          <p:nvPr/>
-        </p:nvSpPr>
-        <p:spPr>
-          <a:xfrm>
-            <a:off x="365760" y="3108960"/>
-            <a:ext cx="2651760" cy="1463040"/>
-          </a:xfrm>
-          <a:prstGeom prst="roundRect">
-            <a:avLst/>
-          </a:prstGeom>
-          <a:solidFill>
-            <a:srgbClr val="1A1A4E"/>
-          </a:solidFill>
-          <a:ln>
-            <a:noFill/>
-          </a:ln>
-          <a:effectLst/>
-        </p:spPr>
-        <p:style>
-          <a:lnRef idx="1">
-            <a:schemeClr val="accent1"/>
-          </a:lnRef>
-          <a:fillRef idx="3">
-            <a:schemeClr val="accent1"/>
-          </a:fillRef>
-          <a:effectRef idx="2">
-            <a:schemeClr val="accent1"/>
-          </a:effectRef>
-          <a:fontRef idx="minor">
-            <a:schemeClr val="lt1"/>
-          </a:fontRef>
-        </p:style>
-        <p:txBody>
-          <a:bodyPr rtlCol="0" anchor="ctr"/>
-          <a:lstStyle/>
-          <a:p>
-            <a:pPr algn="ctr"/>
-          </a:p>
-        </p:txBody>
-      </p:sp>
-      <p:sp>
-        <p:nvSpPr>
-          <p:cNvPr id="20" name="TextBox 19"/>
-          <p:cNvSpPr txBox="1"/>
-          <p:nvPr/>
-        </p:nvSpPr>
-        <p:spPr>
-          <a:xfrm>
-            <a:off x="502920" y="3200400"/>
-            <a:ext cx="2377440" cy="320040"/>
-          </a:xfrm>
-          <a:prstGeom prst="rect">
-            <a:avLst/>
-          </a:prstGeom>
-          <a:noFill/>
-        </p:spPr>
-        <p:txBody>
-          <a:bodyPr wrap="square">
-            <a:spAutoFit/>
-          </a:bodyPr>
-          <a:lstStyle/>
-          <a:p>
-            <a:pPr algn="l">
-              <a:defRPr sz="1400" b="1">
-                <a:solidFill>
-                  <a:srgbClr val="A78BFA"/>
-                </a:solidFill>
-                <a:latin typeface="Calibri"/>
-              </a:defRPr>
-            </a:pPr>
-            <a:r>
-              <a:t>Google Sheets Logging</a:t>
-            </a:r>
-          </a:p>
-        </p:txBody>
-      </p:sp>
-      <p:sp>
-        <p:nvSpPr>
-          <p:cNvPr id="21" name="TextBox 20"/>
-          <p:cNvSpPr txBox="1"/>
-          <p:nvPr/>
-        </p:nvSpPr>
-        <p:spPr>
-          <a:xfrm>
-            <a:off x="502920" y="3566160"/>
-            <a:ext cx="2377440" cy="822960"/>
-          </a:xfrm>
-          <a:prstGeom prst="rect">
-            <a:avLst/>
-          </a:prstGeom>
-          <a:noFill/>
-        </p:spPr>
-        <p:txBody>
-          <a:bodyPr wrap="square">
-            <a:spAutoFit/>
-          </a:bodyPr>
-          <a:lstStyle/>
-          <a:p>
-            <a:pPr algn="l">
-              <a:defRPr sz="1200" b="0">
+              <a:t>Add Telegram Bot credential (token from @BotFather)</a:t>
+            </a:r>
+          </a:p>
+        </p:txBody>
+      </p:sp>
+      <p:sp>
+        <p:nvSpPr>
+          <p:cNvPr id="22" name="TextBox 21"/>
+          <p:cNvSpPr txBox="1"/>
+          <p:nvPr/>
+        </p:nvSpPr>
+        <p:spPr>
+          <a:xfrm>
+            <a:off x="640080" y="5212080"/>
+            <a:ext cx="10058400" cy="320040"/>
+          </a:xfrm>
+          <a:prstGeom prst="rect">
+            <a:avLst/>
+          </a:prstGeom>
+          <a:noFill/>
+        </p:spPr>
+        <p:txBody>
+          <a:bodyPr wrap="square">
+            <a:spAutoFit/>
+          </a:bodyPr>
+          <a:lstStyle/>
+          <a:p>
+            <a:pPr algn="l">
+              <a:defRPr sz="1300" b="0">
                 <a:solidFill>
                   <a:srgbClr val="E0E0E0"/>
                 </a:solidFill>
@@ -4570,52 +4591,8 @@
               </a:defRPr>
             </a:pPr>
             <a:r>
-              <a:t>Log name, domain, score, timestamp</a:t>
-            </a:r>
-          </a:p>
-        </p:txBody>
-      </p:sp>
-      <p:sp>
-        <p:nvSpPr>
-          <p:cNvPr id="22" name="Rounded Rectangle 21"/>
-          <p:cNvSpPr/>
-          <p:nvPr/>
-        </p:nvSpPr>
-        <p:spPr>
-          <a:xfrm>
-            <a:off x="3291840" y="3108960"/>
-            <a:ext cx="2651760" cy="1463040"/>
-          </a:xfrm>
-          <a:prstGeom prst="roundRect">
-            <a:avLst/>
-          </a:prstGeom>
-          <a:solidFill>
-            <a:srgbClr val="1A1A4E"/>
-          </a:solidFill>
-          <a:ln>
-            <a:noFill/>
-          </a:ln>
-          <a:effectLst/>
-        </p:spPr>
-        <p:style>
-          <a:lnRef idx="1">
-            <a:schemeClr val="accent1"/>
-          </a:lnRef>
-          <a:fillRef idx="3">
-            <a:schemeClr val="accent1"/>
-          </a:fillRef>
-          <a:effectRef idx="2">
-            <a:schemeClr val="accent1"/>
-          </a:effectRef>
-          <a:fontRef idx="minor">
-            <a:schemeClr val="lt1"/>
-          </a:fontRef>
-        </p:style>
-        <p:txBody>
-          <a:bodyPr rtlCol="0" anchor="ctr"/>
-          <a:lstStyle/>
-          <a:p>
-            <a:pPr algn="ctr"/>
+              <a:t>Set Chat ID in both Telegram nodes (Send resume + Send Cover Letter)</a:t>
+            </a:r>
           </a:p>
         </p:txBody>
       </p:sp>
@@ -4627,30 +4604,30 @@
         </p:nvSpPr>
         <p:spPr>
           <a:xfrm>
-            <a:off x="3429000" y="3200400"/>
-            <a:ext cx="2377440" cy="320040"/>
-          </a:xfrm>
-          <a:prstGeom prst="rect">
-            <a:avLst/>
-          </a:prstGeom>
-          <a:noFill/>
-        </p:spPr>
-        <p:txBody>
-          <a:bodyPr wrap="square">
-            <a:spAutoFit/>
-          </a:bodyPr>
-          <a:lstStyle/>
-          <a:p>
-            <a:pPr algn="l">
-              <a:defRPr sz="1400" b="1">
-                <a:solidFill>
-                  <a:srgbClr val="A78BFA"/>
-                </a:solidFill>
-                <a:latin typeface="Calibri"/>
-              </a:defRPr>
-            </a:pPr>
-            <a:r>
-              <a:t>Multi-language</a:t>
+            <a:off x="640080" y="5623560"/>
+            <a:ext cx="10058400" cy="320040"/>
+          </a:xfrm>
+          <a:prstGeom prst="rect">
+            <a:avLst/>
+          </a:prstGeom>
+          <a:noFill/>
+        </p:spPr>
+        <p:txBody>
+          <a:bodyPr wrap="square">
+            <a:spAutoFit/>
+          </a:bodyPr>
+          <a:lstStyle/>
+          <a:p>
+            <a:pPr algn="l">
+              <a:defRPr sz="1300" b="0">
+                <a:solidFill>
+                  <a:srgbClr val="E0E0E0"/>
+                </a:solidFill>
+                <a:latin typeface="Calibri"/>
+              </a:defRPr>
+            </a:pPr>
+            <a:r>
+              <a:t>Copy Production URL from Form Trigger node</a:t>
             </a:r>
           </a:p>
         </p:txBody>
@@ -4663,22 +4640,22 @@
         </p:nvSpPr>
         <p:spPr>
           <a:xfrm>
-            <a:off x="3429000" y="3566160"/>
-            <a:ext cx="2377440" cy="822960"/>
-          </a:xfrm>
-          <a:prstGeom prst="rect">
-            <a:avLst/>
-          </a:prstGeom>
-          <a:noFill/>
-        </p:spPr>
-        <p:txBody>
-          <a:bodyPr wrap="square">
-            <a:spAutoFit/>
-          </a:bodyPr>
-          <a:lstStyle/>
-          <a:p>
-            <a:pPr algn="l">
-              <a:defRPr sz="1200" b="0">
+            <a:off x="640080" y="6035040"/>
+            <a:ext cx="10058400" cy="320040"/>
+          </a:xfrm>
+          <a:prstGeom prst="rect">
+            <a:avLst/>
+          </a:prstGeom>
+          <a:noFill/>
+        </p:spPr>
+        <p:txBody>
+          <a:bodyPr wrap="square">
+            <a:spAutoFit/>
+          </a:bodyPr>
+          <a:lstStyle/>
+          <a:p>
+            <a:pPr algn="l">
+              <a:defRPr sz="1300" b="0">
                 <a:solidFill>
                   <a:srgbClr val="E0E0E0"/>
                 </a:solidFill>
@@ -4686,703 +4663,7 @@
               </a:defRPr>
             </a:pPr>
             <a:r>
-              <a:t>Auto-detect and translate resume output</a:t>
-            </a:r>
-          </a:p>
-        </p:txBody>
-      </p:sp>
-      <p:sp>
-        <p:nvSpPr>
-          <p:cNvPr id="25" name="Rounded Rectangle 24"/>
-          <p:cNvSpPr/>
-          <p:nvPr/>
-        </p:nvSpPr>
-        <p:spPr>
-          <a:xfrm>
-            <a:off x="6217920" y="3108960"/>
-            <a:ext cx="2651760" cy="1463040"/>
-          </a:xfrm>
-          <a:prstGeom prst="roundRect">
-            <a:avLst/>
-          </a:prstGeom>
-          <a:solidFill>
-            <a:srgbClr val="1A1A4E"/>
-          </a:solidFill>
-          <a:ln>
-            <a:noFill/>
-          </a:ln>
-          <a:effectLst/>
-        </p:spPr>
-        <p:style>
-          <a:lnRef idx="1">
-            <a:schemeClr val="accent1"/>
-          </a:lnRef>
-          <a:fillRef idx="3">
-            <a:schemeClr val="accent1"/>
-          </a:fillRef>
-          <a:effectRef idx="2">
-            <a:schemeClr val="accent1"/>
-          </a:effectRef>
-          <a:fontRef idx="minor">
-            <a:schemeClr val="lt1"/>
-          </a:fontRef>
-        </p:style>
-        <p:txBody>
-          <a:bodyPr rtlCol="0" anchor="ctr"/>
-          <a:lstStyle/>
-          <a:p>
-            <a:pPr algn="ctr"/>
-          </a:p>
-        </p:txBody>
-      </p:sp>
-      <p:sp>
-        <p:nvSpPr>
-          <p:cNvPr id="26" name="TextBox 25"/>
-          <p:cNvSpPr txBox="1"/>
-          <p:nvPr/>
-        </p:nvSpPr>
-        <p:spPr>
-          <a:xfrm>
-            <a:off x="6355080" y="3200400"/>
-            <a:ext cx="2377440" cy="320040"/>
-          </a:xfrm>
-          <a:prstGeom prst="rect">
-            <a:avLst/>
-          </a:prstGeom>
-          <a:noFill/>
-        </p:spPr>
-        <p:txBody>
-          <a:bodyPr wrap="square">
-            <a:spAutoFit/>
-          </a:bodyPr>
-          <a:lstStyle/>
-          <a:p>
-            <a:pPr algn="l">
-              <a:defRPr sz="1400" b="1">
-                <a:solidFill>
-                  <a:srgbClr val="A78BFA"/>
-                </a:solidFill>
-                <a:latin typeface="Calibri"/>
-              </a:defRPr>
-            </a:pPr>
-            <a:r>
-              <a:t>A/B Testing</a:t>
-            </a:r>
-          </a:p>
-        </p:txBody>
-      </p:sp>
-      <p:sp>
-        <p:nvSpPr>
-          <p:cNvPr id="27" name="TextBox 26"/>
-          <p:cNvSpPr txBox="1"/>
-          <p:nvPr/>
-        </p:nvSpPr>
-        <p:spPr>
-          <a:xfrm>
-            <a:off x="6355080" y="3566160"/>
-            <a:ext cx="2377440" cy="822960"/>
-          </a:xfrm>
-          <a:prstGeom prst="rect">
-            <a:avLst/>
-          </a:prstGeom>
-          <a:noFill/>
-        </p:spPr>
-        <p:txBody>
-          <a:bodyPr wrap="square">
-            <a:spAutoFit/>
-          </a:bodyPr>
-          <a:lstStyle/>
-          <a:p>
-            <a:pPr algn="l">
-              <a:defRPr sz="1200" b="0">
-                <a:solidFill>
-                  <a:srgbClr val="E0E0E0"/>
-                </a:solidFill>
-                <a:latin typeface="Calibri"/>
-              </a:defRPr>
-            </a:pPr>
-            <a:r>
-              <a:t>Two versions with different keyword strategies</a:t>
-            </a:r>
-          </a:p>
-        </p:txBody>
-      </p:sp>
-      <p:sp>
-        <p:nvSpPr>
-          <p:cNvPr id="28" name="Rounded Rectangle 27"/>
-          <p:cNvSpPr/>
-          <p:nvPr/>
-        </p:nvSpPr>
-        <p:spPr>
-          <a:xfrm>
-            <a:off x="9144000" y="3108960"/>
-            <a:ext cx="2651760" cy="1463040"/>
-          </a:xfrm>
-          <a:prstGeom prst="roundRect">
-            <a:avLst/>
-          </a:prstGeom>
-          <a:solidFill>
-            <a:srgbClr val="1A1A4E"/>
-          </a:solidFill>
-          <a:ln>
-            <a:noFill/>
-          </a:ln>
-          <a:effectLst/>
-        </p:spPr>
-        <p:style>
-          <a:lnRef idx="1">
-            <a:schemeClr val="accent1"/>
-          </a:lnRef>
-          <a:fillRef idx="3">
-            <a:schemeClr val="accent1"/>
-          </a:fillRef>
-          <a:effectRef idx="2">
-            <a:schemeClr val="accent1"/>
-          </a:effectRef>
-          <a:fontRef idx="minor">
-            <a:schemeClr val="lt1"/>
-          </a:fontRef>
-        </p:style>
-        <p:txBody>
-          <a:bodyPr rtlCol="0" anchor="ctr"/>
-          <a:lstStyle/>
-          <a:p>
-            <a:pPr algn="ctr"/>
-          </a:p>
-        </p:txBody>
-      </p:sp>
-      <p:sp>
-        <p:nvSpPr>
-          <p:cNvPr id="29" name="TextBox 28"/>
-          <p:cNvSpPr txBox="1"/>
-          <p:nvPr/>
-        </p:nvSpPr>
-        <p:spPr>
-          <a:xfrm>
-            <a:off x="9281160" y="3200400"/>
-            <a:ext cx="2377440" cy="320040"/>
-          </a:xfrm>
-          <a:prstGeom prst="rect">
-            <a:avLst/>
-          </a:prstGeom>
-          <a:noFill/>
-        </p:spPr>
-        <p:txBody>
-          <a:bodyPr wrap="square">
-            <a:spAutoFit/>
-          </a:bodyPr>
-          <a:lstStyle/>
-          <a:p>
-            <a:pPr algn="l">
-              <a:defRPr sz="1400" b="1">
-                <a:solidFill>
-                  <a:srgbClr val="A78BFA"/>
-                </a:solidFill>
-                <a:latin typeface="Calibri"/>
-              </a:defRPr>
-            </a:pPr>
-            <a:r>
-              <a:t>Company Research</a:t>
-            </a:r>
-          </a:p>
-        </p:txBody>
-      </p:sp>
-      <p:sp>
-        <p:nvSpPr>
-          <p:cNvPr id="30" name="TextBox 29"/>
-          <p:cNvSpPr txBox="1"/>
-          <p:nvPr/>
-        </p:nvSpPr>
-        <p:spPr>
-          <a:xfrm>
-            <a:off x="9281160" y="3566160"/>
-            <a:ext cx="2377440" cy="822960"/>
-          </a:xfrm>
-          <a:prstGeom prst="rect">
-            <a:avLst/>
-          </a:prstGeom>
-          <a:noFill/>
-        </p:spPr>
-        <p:txBody>
-          <a:bodyPr wrap="square">
-            <a:spAutoFit/>
-          </a:bodyPr>
-          <a:lstStyle/>
-          <a:p>
-            <a:pPr algn="l">
-              <a:defRPr sz="1200" b="0">
-                <a:solidFill>
-                  <a:srgbClr val="E0E0E0"/>
-                </a:solidFill>
-                <a:latin typeface="Calibri"/>
-              </a:defRPr>
-            </a:pPr>
-            <a:r>
-              <a:t>Web search node researches company</a:t>
-            </a:r>
-          </a:p>
-        </p:txBody>
-      </p:sp>
-      <p:sp>
-        <p:nvSpPr>
-          <p:cNvPr id="31" name="Rounded Rectangle 30"/>
-          <p:cNvSpPr/>
-          <p:nvPr/>
-        </p:nvSpPr>
-        <p:spPr>
-          <a:xfrm>
-            <a:off x="365760" y="4846320"/>
-            <a:ext cx="2651760" cy="1463040"/>
-          </a:xfrm>
-          <a:prstGeom prst="roundRect">
-            <a:avLst/>
-          </a:prstGeom>
-          <a:solidFill>
-            <a:srgbClr val="1A1A4E"/>
-          </a:solidFill>
-          <a:ln>
-            <a:noFill/>
-          </a:ln>
-          <a:effectLst/>
-        </p:spPr>
-        <p:style>
-          <a:lnRef idx="1">
-            <a:schemeClr val="accent1"/>
-          </a:lnRef>
-          <a:fillRef idx="3">
-            <a:schemeClr val="accent1"/>
-          </a:fillRef>
-          <a:effectRef idx="2">
-            <a:schemeClr val="accent1"/>
-          </a:effectRef>
-          <a:fontRef idx="minor">
-            <a:schemeClr val="lt1"/>
-          </a:fontRef>
-        </p:style>
-        <p:txBody>
-          <a:bodyPr rtlCol="0" anchor="ctr"/>
-          <a:lstStyle/>
-          <a:p>
-            <a:pPr algn="ctr"/>
-          </a:p>
-        </p:txBody>
-      </p:sp>
-      <p:sp>
-        <p:nvSpPr>
-          <p:cNvPr id="32" name="TextBox 31"/>
-          <p:cNvSpPr txBox="1"/>
-          <p:nvPr/>
-        </p:nvSpPr>
-        <p:spPr>
-          <a:xfrm>
-            <a:off x="502920" y="4937760"/>
-            <a:ext cx="2377440" cy="320040"/>
-          </a:xfrm>
-          <a:prstGeom prst="rect">
-            <a:avLst/>
-          </a:prstGeom>
-          <a:noFill/>
-        </p:spPr>
-        <p:txBody>
-          <a:bodyPr wrap="square">
-            <a:spAutoFit/>
-          </a:bodyPr>
-          <a:lstStyle/>
-          <a:p>
-            <a:pPr algn="l">
-              <a:defRPr sz="1400" b="1">
-                <a:solidFill>
-                  <a:srgbClr val="A78BFA"/>
-                </a:solidFill>
-                <a:latin typeface="Calibri"/>
-              </a:defRPr>
-            </a:pPr>
-            <a:r>
-              <a:t>Version History</a:t>
-            </a:r>
-          </a:p>
-        </p:txBody>
-      </p:sp>
-      <p:sp>
-        <p:nvSpPr>
-          <p:cNvPr id="33" name="TextBox 32"/>
-          <p:cNvSpPr txBox="1"/>
-          <p:nvPr/>
-        </p:nvSpPr>
-        <p:spPr>
-          <a:xfrm>
-            <a:off x="502920" y="5303520"/>
-            <a:ext cx="2377440" cy="822960"/>
-          </a:xfrm>
-          <a:prstGeom prst="rect">
-            <a:avLst/>
-          </a:prstGeom>
-          <a:noFill/>
-        </p:spPr>
-        <p:txBody>
-          <a:bodyPr wrap="square">
-            <a:spAutoFit/>
-          </a:bodyPr>
-          <a:lstStyle/>
-          <a:p>
-            <a:pPr algn="l">
-              <a:defRPr sz="1200" b="0">
-                <a:solidFill>
-                  <a:srgbClr val="E0E0E0"/>
-                </a:solidFill>
-                <a:latin typeface="Calibri"/>
-              </a:defRPr>
-            </a:pPr>
-            <a:r>
-              <a:t>Store all resumes with diff and revert</a:t>
-            </a:r>
-          </a:p>
-        </p:txBody>
-      </p:sp>
-      <p:sp>
-        <p:nvSpPr>
-          <p:cNvPr id="34" name="Rounded Rectangle 33"/>
-          <p:cNvSpPr/>
-          <p:nvPr/>
-        </p:nvSpPr>
-        <p:spPr>
-          <a:xfrm>
-            <a:off x="3291840" y="4846320"/>
-            <a:ext cx="2651760" cy="1463040"/>
-          </a:xfrm>
-          <a:prstGeom prst="roundRect">
-            <a:avLst/>
-          </a:prstGeom>
-          <a:solidFill>
-            <a:srgbClr val="1A1A4E"/>
-          </a:solidFill>
-          <a:ln>
-            <a:noFill/>
-          </a:ln>
-          <a:effectLst/>
-        </p:spPr>
-        <p:style>
-          <a:lnRef idx="1">
-            <a:schemeClr val="accent1"/>
-          </a:lnRef>
-          <a:fillRef idx="3">
-            <a:schemeClr val="accent1"/>
-          </a:fillRef>
-          <a:effectRef idx="2">
-            <a:schemeClr val="accent1"/>
-          </a:effectRef>
-          <a:fontRef idx="minor">
-            <a:schemeClr val="lt1"/>
-          </a:fontRef>
-        </p:style>
-        <p:txBody>
-          <a:bodyPr rtlCol="0" anchor="ctr"/>
-          <a:lstStyle/>
-          <a:p>
-            <a:pPr algn="ctr"/>
-          </a:p>
-        </p:txBody>
-      </p:sp>
-      <p:sp>
-        <p:nvSpPr>
-          <p:cNvPr id="35" name="TextBox 34"/>
-          <p:cNvSpPr txBox="1"/>
-          <p:nvPr/>
-        </p:nvSpPr>
-        <p:spPr>
-          <a:xfrm>
-            <a:off x="3429000" y="4937760"/>
-            <a:ext cx="2377440" cy="320040"/>
-          </a:xfrm>
-          <a:prstGeom prst="rect">
-            <a:avLst/>
-          </a:prstGeom>
-          <a:noFill/>
-        </p:spPr>
-        <p:txBody>
-          <a:bodyPr wrap="square">
-            <a:spAutoFit/>
-          </a:bodyPr>
-          <a:lstStyle/>
-          <a:p>
-            <a:pPr algn="l">
-              <a:defRPr sz="1400" b="1">
-                <a:solidFill>
-                  <a:srgbClr val="A78BFA"/>
-                </a:solidFill>
-                <a:latin typeface="Calibri"/>
-              </a:defRPr>
-            </a:pPr>
-            <a:r>
-              <a:t>WhatsApp Delivery</a:t>
-            </a:r>
-          </a:p>
-        </p:txBody>
-      </p:sp>
-      <p:sp>
-        <p:nvSpPr>
-          <p:cNvPr id="36" name="TextBox 35"/>
-          <p:cNvSpPr txBox="1"/>
-          <p:nvPr/>
-        </p:nvSpPr>
-        <p:spPr>
-          <a:xfrm>
-            <a:off x="3429000" y="5303520"/>
-            <a:ext cx="2377440" cy="822960"/>
-          </a:xfrm>
-          <a:prstGeom prst="rect">
-            <a:avLst/>
-          </a:prstGeom>
-          <a:noFill/>
-        </p:spPr>
-        <p:txBody>
-          <a:bodyPr wrap="square">
-            <a:spAutoFit/>
-          </a:bodyPr>
-          <a:lstStyle/>
-          <a:p>
-            <a:pPr algn="l">
-              <a:defRPr sz="1200" b="0">
-                <a:solidFill>
-                  <a:srgbClr val="E0E0E0"/>
-                </a:solidFill>
-                <a:latin typeface="Calibri"/>
-              </a:defRPr>
-            </a:pPr>
-            <a:r>
-              <a:t>WhatsApp Business API as alternate channel</a:t>
-            </a:r>
-          </a:p>
-        </p:txBody>
-      </p:sp>
-      <p:sp>
-        <p:nvSpPr>
-          <p:cNvPr id="37" name="Rounded Rectangle 36"/>
-          <p:cNvSpPr/>
-          <p:nvPr/>
-        </p:nvSpPr>
-        <p:spPr>
-          <a:xfrm>
-            <a:off x="6217920" y="4846320"/>
-            <a:ext cx="2651760" cy="1463040"/>
-          </a:xfrm>
-          <a:prstGeom prst="roundRect">
-            <a:avLst/>
-          </a:prstGeom>
-          <a:solidFill>
-            <a:srgbClr val="1A1A4E"/>
-          </a:solidFill>
-          <a:ln>
-            <a:noFill/>
-          </a:ln>
-          <a:effectLst/>
-        </p:spPr>
-        <p:style>
-          <a:lnRef idx="1">
-            <a:schemeClr val="accent1"/>
-          </a:lnRef>
-          <a:fillRef idx="3">
-            <a:schemeClr val="accent1"/>
-          </a:fillRef>
-          <a:effectRef idx="2">
-            <a:schemeClr val="accent1"/>
-          </a:effectRef>
-          <a:fontRef idx="minor">
-            <a:schemeClr val="lt1"/>
-          </a:fontRef>
-        </p:style>
-        <p:txBody>
-          <a:bodyPr rtlCol="0" anchor="ctr"/>
-          <a:lstStyle/>
-          <a:p>
-            <a:pPr algn="ctr"/>
-          </a:p>
-        </p:txBody>
-      </p:sp>
-      <p:sp>
-        <p:nvSpPr>
-          <p:cNvPr id="38" name="TextBox 37"/>
-          <p:cNvSpPr txBox="1"/>
-          <p:nvPr/>
-        </p:nvSpPr>
-        <p:spPr>
-          <a:xfrm>
-            <a:off x="6355080" y="4937760"/>
-            <a:ext cx="2377440" cy="320040"/>
-          </a:xfrm>
-          <a:prstGeom prst="rect">
-            <a:avLst/>
-          </a:prstGeom>
-          <a:noFill/>
-        </p:spPr>
-        <p:txBody>
-          <a:bodyPr wrap="square">
-            <a:spAutoFit/>
-          </a:bodyPr>
-          <a:lstStyle/>
-          <a:p>
-            <a:pPr algn="l">
-              <a:defRPr sz="1400" b="1">
-                <a:solidFill>
-                  <a:srgbClr val="A78BFA"/>
-                </a:solidFill>
-                <a:latin typeface="Calibri"/>
-              </a:defRPr>
-            </a:pPr>
-            <a:r>
-              <a:t>Direct Apply</a:t>
-            </a:r>
-          </a:p>
-        </p:txBody>
-      </p:sp>
-      <p:sp>
-        <p:nvSpPr>
-          <p:cNvPr id="39" name="TextBox 38"/>
-          <p:cNvSpPr txBox="1"/>
-          <p:nvPr/>
-        </p:nvSpPr>
-        <p:spPr>
-          <a:xfrm>
-            <a:off x="6355080" y="5303520"/>
-            <a:ext cx="2377440" cy="822960"/>
-          </a:xfrm>
-          <a:prstGeom prst="rect">
-            <a:avLst/>
-          </a:prstGeom>
-          <a:noFill/>
-        </p:spPr>
-        <p:txBody>
-          <a:bodyPr wrap="square">
-            <a:spAutoFit/>
-          </a:bodyPr>
-          <a:lstStyle/>
-          <a:p>
-            <a:pPr algn="l">
-              <a:defRPr sz="1200" b="0">
-                <a:solidFill>
-                  <a:srgbClr val="E0E0E0"/>
-                </a:solidFill>
-                <a:latin typeface="Calibri"/>
-              </a:defRPr>
-            </a:pPr>
-            <a:r>
-              <a:t>Connect to LinkedIn and Indeed</a:t>
-            </a:r>
-          </a:p>
-        </p:txBody>
-      </p:sp>
-      <p:sp>
-        <p:nvSpPr>
-          <p:cNvPr id="40" name="Rounded Rectangle 39"/>
-          <p:cNvSpPr/>
-          <p:nvPr/>
-        </p:nvSpPr>
-        <p:spPr>
-          <a:xfrm>
-            <a:off x="9144000" y="4846320"/>
-            <a:ext cx="2651760" cy="1463040"/>
-          </a:xfrm>
-          <a:prstGeom prst="roundRect">
-            <a:avLst/>
-          </a:prstGeom>
-          <a:solidFill>
-            <a:srgbClr val="1A1A4E"/>
-          </a:solidFill>
-          <a:ln>
-            <a:noFill/>
-          </a:ln>
-          <a:effectLst/>
-        </p:spPr>
-        <p:style>
-          <a:lnRef idx="1">
-            <a:schemeClr val="accent1"/>
-          </a:lnRef>
-          <a:fillRef idx="3">
-            <a:schemeClr val="accent1"/>
-          </a:fillRef>
-          <a:effectRef idx="2">
-            <a:schemeClr val="accent1"/>
-          </a:effectRef>
-          <a:fontRef idx="minor">
-            <a:schemeClr val="lt1"/>
-          </a:fontRef>
-        </p:style>
-        <p:txBody>
-          <a:bodyPr rtlCol="0" anchor="ctr"/>
-          <a:lstStyle/>
-          <a:p>
-            <a:pPr algn="ctr"/>
-          </a:p>
-        </p:txBody>
-      </p:sp>
-      <p:sp>
-        <p:nvSpPr>
-          <p:cNvPr id="41" name="TextBox 40"/>
-          <p:cNvSpPr txBox="1"/>
-          <p:nvPr/>
-        </p:nvSpPr>
-        <p:spPr>
-          <a:xfrm>
-            <a:off x="9281160" y="4937760"/>
-            <a:ext cx="2377440" cy="320040"/>
-          </a:xfrm>
-          <a:prstGeom prst="rect">
-            <a:avLst/>
-          </a:prstGeom>
-          <a:noFill/>
-        </p:spPr>
-        <p:txBody>
-          <a:bodyPr wrap="square">
-            <a:spAutoFit/>
-          </a:bodyPr>
-          <a:lstStyle/>
-          <a:p>
-            <a:pPr algn="l">
-              <a:defRPr sz="1400" b="1">
-                <a:solidFill>
-                  <a:srgbClr val="A78BFA"/>
-                </a:solidFill>
-                <a:latin typeface="Calibri"/>
-              </a:defRPr>
-            </a:pPr>
-            <a:r>
-              <a:t>Plugin System</a:t>
-            </a:r>
-          </a:p>
-        </p:txBody>
-      </p:sp>
-      <p:sp>
-        <p:nvSpPr>
-          <p:cNvPr id="42" name="TextBox 41"/>
-          <p:cNvSpPr txBox="1"/>
-          <p:nvPr/>
-        </p:nvSpPr>
-        <p:spPr>
-          <a:xfrm>
-            <a:off x="9281160" y="5303520"/>
-            <a:ext cx="2377440" cy="822960"/>
-          </a:xfrm>
-          <a:prstGeom prst="rect">
-            <a:avLst/>
-          </a:prstGeom>
-          <a:noFill/>
-        </p:spPr>
-        <p:txBody>
-          <a:bodyPr wrap="square">
-            <a:spAutoFit/>
-          </a:bodyPr>
-          <a:lstStyle/>
-          <a:p>
-            <a:pPr algn="l">
-              <a:defRPr sz="1200" b="0">
-                <a:solidFill>
-                  <a:srgbClr val="E0E0E0"/>
-                </a:solidFill>
-                <a:latin typeface="Calibri"/>
-              </a:defRPr>
-            </a:pPr>
-            <a:r>
-              <a:t>Community plugins for templates and formats</a:t>
+              <a:t>Toggle workflow from Inactive to Active</a:t>
             </a:r>
           </a:p>
         </p:txBody>
@@ -5540,7 +4821,7 @@
               </a:defRPr>
             </a:pPr>
             <a:r>
-              <a:t>Troubleshooting</a:t>
+              <a:t>Future Enhancements</a:t>
             </a:r>
           </a:p>
         </p:txBody>
@@ -5576,7 +4857,7 @@
               </a:defRPr>
             </a:pPr>
             <a:r>
-              <a:t>Common issues and quick fixes</a:t>
+              <a:t>Whats next</a:t>
             </a:r>
           </a:p>
         </p:txBody>
@@ -5632,8 +4913,8 @@
         </p:nvSpPr>
         <p:spPr>
           <a:xfrm>
-            <a:off x="457200" y="1371600"/>
-            <a:ext cx="3200400" cy="731520"/>
+            <a:off x="365760" y="1371600"/>
+            <a:ext cx="2651760" cy="1463040"/>
           </a:xfrm>
           <a:prstGeom prst="roundRect">
             <a:avLst/>
@@ -5676,44 +4957,80 @@
         </p:nvSpPr>
         <p:spPr>
           <a:xfrm>
-            <a:off x="548640" y="1463040"/>
-            <a:ext cx="3017520" cy="548640"/>
-          </a:xfrm>
-          <a:prstGeom prst="rect">
-            <a:avLst/>
-          </a:prstGeom>
-          <a:noFill/>
-        </p:spPr>
-        <p:txBody>
-          <a:bodyPr wrap="square">
-            <a:spAutoFit/>
-          </a:bodyPr>
-          <a:lstStyle/>
-          <a:p>
-            <a:pPr algn="l">
-              <a:defRPr sz="1300" b="1">
-                <a:solidFill>
-                  <a:srgbClr val="F87274"/>
-                </a:solidFill>
-                <a:latin typeface="Calibri"/>
-              </a:defRPr>
-            </a:pPr>
-            <a:r>
-              <a:t>Missing begin document</a:t>
-            </a:r>
-          </a:p>
-        </p:txBody>
-      </p:sp>
-      <p:sp>
-        <p:nvSpPr>
-          <p:cNvPr id="9" name="Rounded Rectangle 8"/>
+            <a:off x="502920" y="1463040"/>
+            <a:ext cx="2377440" cy="320040"/>
+          </a:xfrm>
+          <a:prstGeom prst="rect">
+            <a:avLst/>
+          </a:prstGeom>
+          <a:noFill/>
+        </p:spPr>
+        <p:txBody>
+          <a:bodyPr wrap="square">
+            <a:spAutoFit/>
+          </a:bodyPr>
+          <a:lstStyle/>
+          <a:p>
+            <a:pPr algn="l">
+              <a:defRPr sz="1400" b="1">
+                <a:solidFill>
+                  <a:srgbClr val="A78BFA"/>
+                </a:solidFill>
+                <a:latin typeface="Calibri"/>
+              </a:defRPr>
+            </a:pPr>
+            <a:r>
+              <a:t>Email Delivery</a:t>
+            </a:r>
+          </a:p>
+        </p:txBody>
+      </p:sp>
+      <p:sp>
+        <p:nvSpPr>
+          <p:cNvPr id="9" name="TextBox 8"/>
+          <p:cNvSpPr txBox="1"/>
+          <p:nvPr/>
+        </p:nvSpPr>
+        <p:spPr>
+          <a:xfrm>
+            <a:off x="502920" y="1828800"/>
+            <a:ext cx="2377440" cy="822960"/>
+          </a:xfrm>
+          <a:prstGeom prst="rect">
+            <a:avLst/>
+          </a:prstGeom>
+          <a:noFill/>
+        </p:spPr>
+        <p:txBody>
+          <a:bodyPr wrap="square">
+            <a:spAutoFit/>
+          </a:bodyPr>
+          <a:lstStyle/>
+          <a:p>
+            <a:pPr algn="l">
+              <a:defRPr sz="1200" b="0">
+                <a:solidFill>
+                  <a:srgbClr val="E0E0E0"/>
+                </a:solidFill>
+                <a:latin typeface="Calibri"/>
+              </a:defRPr>
+            </a:pPr>
+            <a:r>
+              <a:t>Gmail node to send to recruiters</a:t>
+            </a:r>
+          </a:p>
+        </p:txBody>
+      </p:sp>
+      <p:sp>
+        <p:nvSpPr>
+          <p:cNvPr id="10" name="Rounded Rectangle 9"/>
           <p:cNvSpPr/>
           <p:nvPr/>
         </p:nvSpPr>
         <p:spPr>
           <a:xfrm>
-            <a:off x="3840480" y="1371600"/>
-            <a:ext cx="3657600" cy="731520"/>
+            <a:off x="3291840" y="1371600"/>
+            <a:ext cx="2651760" cy="1463040"/>
           </a:xfrm>
           <a:prstGeom prst="roundRect">
             <a:avLst/>
@@ -5750,50 +5067,86 @@
       </p:sp>
       <p:sp>
         <p:nvSpPr>
-          <p:cNvPr id="10" name="TextBox 9"/>
-          <p:cNvSpPr txBox="1"/>
-          <p:nvPr/>
-        </p:nvSpPr>
-        <p:spPr>
-          <a:xfrm>
-            <a:off x="3931920" y="1463040"/>
-            <a:ext cx="3474720" cy="548640"/>
-          </a:xfrm>
-          <a:prstGeom prst="rect">
-            <a:avLst/>
-          </a:prstGeom>
-          <a:noFill/>
-        </p:spPr>
-        <p:txBody>
-          <a:bodyPr wrap="square">
-            <a:spAutoFit/>
-          </a:bodyPr>
-          <a:lstStyle/>
-          <a:p>
-            <a:pPr algn="l">
-              <a:defRPr sz="1300" b="0">
-                <a:solidFill>
-                  <a:srgbClr val="FBBF24"/>
-                </a:solidFill>
-                <a:latin typeface="Calibri"/>
-              </a:defRPr>
-            </a:pPr>
-            <a:r>
-              <a:t>LLM markdown fences</a:t>
-            </a:r>
-          </a:p>
-        </p:txBody>
-      </p:sp>
-      <p:sp>
-        <p:nvSpPr>
-          <p:cNvPr id="11" name="Rounded Rectangle 10"/>
+          <p:cNvPr id="11" name="TextBox 10"/>
+          <p:cNvSpPr txBox="1"/>
+          <p:nvPr/>
+        </p:nvSpPr>
+        <p:spPr>
+          <a:xfrm>
+            <a:off x="3429000" y="1463040"/>
+            <a:ext cx="2377440" cy="320040"/>
+          </a:xfrm>
+          <a:prstGeom prst="rect">
+            <a:avLst/>
+          </a:prstGeom>
+          <a:noFill/>
+        </p:spPr>
+        <p:txBody>
+          <a:bodyPr wrap="square">
+            <a:spAutoFit/>
+          </a:bodyPr>
+          <a:lstStyle/>
+          <a:p>
+            <a:pPr algn="l">
+              <a:defRPr sz="1400" b="1">
+                <a:solidFill>
+                  <a:srgbClr val="A78BFA"/>
+                </a:solidFill>
+                <a:latin typeface="Calibri"/>
+              </a:defRPr>
+            </a:pPr>
+            <a:r>
+              <a:t>Parallel Processing</a:t>
+            </a:r>
+          </a:p>
+        </p:txBody>
+      </p:sp>
+      <p:sp>
+        <p:nvSpPr>
+          <p:cNvPr id="12" name="TextBox 11"/>
+          <p:cNvSpPr txBox="1"/>
+          <p:nvPr/>
+        </p:nvSpPr>
+        <p:spPr>
+          <a:xfrm>
+            <a:off x="3429000" y="1828800"/>
+            <a:ext cx="2377440" cy="822960"/>
+          </a:xfrm>
+          <a:prstGeom prst="rect">
+            <a:avLst/>
+          </a:prstGeom>
+          <a:noFill/>
+        </p:spPr>
+        <p:txBody>
+          <a:bodyPr wrap="square">
+            <a:spAutoFit/>
+          </a:bodyPr>
+          <a:lstStyle/>
+          <a:p>
+            <a:pPr algn="l">
+              <a:defRPr sz="1200" b="0">
+                <a:solidFill>
+                  <a:srgbClr val="E0E0E0"/>
+                </a:solidFill>
+                <a:latin typeface="Calibri"/>
+              </a:defRPr>
+            </a:pPr>
+            <a:r>
+              <a:t>40% faster with parallel parsers</a:t>
+            </a:r>
+          </a:p>
+        </p:txBody>
+      </p:sp>
+      <p:sp>
+        <p:nvSpPr>
+          <p:cNvPr id="13" name="Rounded Rectangle 12"/>
           <p:cNvSpPr/>
           <p:nvPr/>
         </p:nvSpPr>
         <p:spPr>
           <a:xfrm>
-            <a:off x="7680960" y="1371600"/>
-            <a:ext cx="4114800" cy="731520"/>
+            <a:off x="6217920" y="1371600"/>
+            <a:ext cx="2651760" cy="1463040"/>
           </a:xfrm>
           <a:prstGeom prst="roundRect">
             <a:avLst/>
@@ -5830,50 +5183,86 @@
       </p:sp>
       <p:sp>
         <p:nvSpPr>
-          <p:cNvPr id="12" name="TextBox 11"/>
-          <p:cNvSpPr txBox="1"/>
-          <p:nvPr/>
-        </p:nvSpPr>
-        <p:spPr>
-          <a:xfrm>
-            <a:off x="7772400" y="1463040"/>
-            <a:ext cx="3931920" cy="548640"/>
-          </a:xfrm>
-          <a:prstGeom prst="rect">
-            <a:avLst/>
-          </a:prstGeom>
-          <a:noFill/>
-        </p:spPr>
-        <p:txBody>
-          <a:bodyPr wrap="square">
-            <a:spAutoFit/>
-          </a:bodyPr>
-          <a:lstStyle/>
-          <a:p>
-            <a:pPr algn="l">
-              <a:defRPr sz="1300" b="0">
-                <a:solidFill>
-                  <a:srgbClr val="34D399"/>
-                </a:solidFill>
-                <a:latin typeface="Calibri"/>
-              </a:defRPr>
-            </a:pPr>
-            <a:r>
-              <a:t>Auto-fixed by code node</a:t>
-            </a:r>
-          </a:p>
-        </p:txBody>
-      </p:sp>
-      <p:sp>
-        <p:nvSpPr>
-          <p:cNvPr id="13" name="Rounded Rectangle 12"/>
+          <p:cNvPr id="14" name="TextBox 13"/>
+          <p:cNvSpPr txBox="1"/>
+          <p:nvPr/>
+        </p:nvSpPr>
+        <p:spPr>
+          <a:xfrm>
+            <a:off x="6355080" y="1463040"/>
+            <a:ext cx="2377440" cy="320040"/>
+          </a:xfrm>
+          <a:prstGeom prst="rect">
+            <a:avLst/>
+          </a:prstGeom>
+          <a:noFill/>
+        </p:spPr>
+        <p:txBody>
+          <a:bodyPr wrap="square">
+            <a:spAutoFit/>
+          </a:bodyPr>
+          <a:lstStyle/>
+          <a:p>
+            <a:pPr algn="l">
+              <a:defRPr sz="1400" b="1">
+                <a:solidFill>
+                  <a:srgbClr val="A78BFA"/>
+                </a:solidFill>
+                <a:latin typeface="Calibri"/>
+              </a:defRPr>
+            </a:pPr>
+            <a:r>
+              <a:t>Error Alerts</a:t>
+            </a:r>
+          </a:p>
+        </p:txBody>
+      </p:sp>
+      <p:sp>
+        <p:nvSpPr>
+          <p:cNvPr id="15" name="TextBox 14"/>
+          <p:cNvSpPr txBox="1"/>
+          <p:nvPr/>
+        </p:nvSpPr>
+        <p:spPr>
+          <a:xfrm>
+            <a:off x="6355080" y="1828800"/>
+            <a:ext cx="2377440" cy="822960"/>
+          </a:xfrm>
+          <a:prstGeom prst="rect">
+            <a:avLst/>
+          </a:prstGeom>
+          <a:noFill/>
+        </p:spPr>
+        <p:txBody>
+          <a:bodyPr wrap="square">
+            <a:spAutoFit/>
+          </a:bodyPr>
+          <a:lstStyle/>
+          <a:p>
+            <a:pPr algn="l">
+              <a:defRPr sz="1200" b="0">
+                <a:solidFill>
+                  <a:srgbClr val="E0E0E0"/>
+                </a:solidFill>
+                <a:latin typeface="Calibri"/>
+              </a:defRPr>
+            </a:pPr>
+            <a:r>
+              <a:t>Telegram on node failure</a:t>
+            </a:r>
+          </a:p>
+        </p:txBody>
+      </p:sp>
+      <p:sp>
+        <p:nvSpPr>
+          <p:cNvPr id="16" name="Rounded Rectangle 15"/>
           <p:cNvSpPr/>
           <p:nvPr/>
         </p:nvSpPr>
         <p:spPr>
           <a:xfrm>
-            <a:off x="457200" y="2286000"/>
-            <a:ext cx="3200400" cy="731520"/>
+            <a:off x="9144000" y="1371600"/>
+            <a:ext cx="2651760" cy="1463040"/>
           </a:xfrm>
           <a:prstGeom prst="roundRect">
             <a:avLst/>
@@ -5910,50 +5299,86 @@
       </p:sp>
       <p:sp>
         <p:nvSpPr>
-          <p:cNvPr id="14" name="TextBox 13"/>
-          <p:cNvSpPr txBox="1"/>
-          <p:nvPr/>
-        </p:nvSpPr>
-        <p:spPr>
-          <a:xfrm>
-            <a:off x="548640" y="2377440"/>
-            <a:ext cx="3017520" cy="548640"/>
-          </a:xfrm>
-          <a:prstGeom prst="rect">
-            <a:avLst/>
-          </a:prstGeom>
-          <a:noFill/>
-        </p:spPr>
-        <p:txBody>
-          <a:bodyPr wrap="square">
-            <a:spAutoFit/>
-          </a:bodyPr>
-          <a:lstStyle/>
-          <a:p>
-            <a:pPr algn="l">
-              <a:defRPr sz="1300" b="1">
-                <a:solidFill>
-                  <a:srgbClr val="F87274"/>
-                </a:solidFill>
-                <a:latin typeface="Calibri"/>
-              </a:defRPr>
-            </a:pPr>
-            <a:r>
-              <a:t>MISSING COMPILATION SPEC</a:t>
-            </a:r>
-          </a:p>
-        </p:txBody>
-      </p:sp>
-      <p:sp>
-        <p:nvSpPr>
-          <p:cNvPr id="15" name="Rounded Rectangle 14"/>
+          <p:cNvPr id="17" name="TextBox 16"/>
+          <p:cNvSpPr txBox="1"/>
+          <p:nvPr/>
+        </p:nvSpPr>
+        <p:spPr>
+          <a:xfrm>
+            <a:off x="9281160" y="1463040"/>
+            <a:ext cx="2377440" cy="320040"/>
+          </a:xfrm>
+          <a:prstGeom prst="rect">
+            <a:avLst/>
+          </a:prstGeom>
+          <a:noFill/>
+        </p:spPr>
+        <p:txBody>
+          <a:bodyPr wrap="square">
+            <a:spAutoFit/>
+          </a:bodyPr>
+          <a:lstStyle/>
+          <a:p>
+            <a:pPr algn="l">
+              <a:defRPr sz="1400" b="1">
+                <a:solidFill>
+                  <a:srgbClr val="A78BFA"/>
+                </a:solidFill>
+                <a:latin typeface="Calibri"/>
+              </a:defRPr>
+            </a:pPr>
+            <a:r>
+              <a:t>Google Sheets</a:t>
+            </a:r>
+          </a:p>
+        </p:txBody>
+      </p:sp>
+      <p:sp>
+        <p:nvSpPr>
+          <p:cNvPr id="18" name="TextBox 17"/>
+          <p:cNvSpPr txBox="1"/>
+          <p:nvPr/>
+        </p:nvSpPr>
+        <p:spPr>
+          <a:xfrm>
+            <a:off x="9281160" y="1828800"/>
+            <a:ext cx="2377440" cy="822960"/>
+          </a:xfrm>
+          <a:prstGeom prst="rect">
+            <a:avLst/>
+          </a:prstGeom>
+          <a:noFill/>
+        </p:spPr>
+        <p:txBody>
+          <a:bodyPr wrap="square">
+            <a:spAutoFit/>
+          </a:bodyPr>
+          <a:lstStyle/>
+          <a:p>
+            <a:pPr algn="l">
+              <a:defRPr sz="1200" b="0">
+                <a:solidFill>
+                  <a:srgbClr val="E0E0E0"/>
+                </a:solidFill>
+                <a:latin typeface="Calibri"/>
+              </a:defRPr>
+            </a:pPr>
+            <a:r>
+              <a:t>Log submissions &amp; scores</a:t>
+            </a:r>
+          </a:p>
+        </p:txBody>
+      </p:sp>
+      <p:sp>
+        <p:nvSpPr>
+          <p:cNvPr id="19" name="Rounded Rectangle 18"/>
           <p:cNvSpPr/>
           <p:nvPr/>
         </p:nvSpPr>
         <p:spPr>
           <a:xfrm>
-            <a:off x="3840480" y="2286000"/>
-            <a:ext cx="3657600" cy="731520"/>
+            <a:off x="365760" y="3108960"/>
+            <a:ext cx="2651760" cy="1463040"/>
           </a:xfrm>
           <a:prstGeom prst="roundRect">
             <a:avLst/>
@@ -5990,50 +5415,86 @@
       </p:sp>
       <p:sp>
         <p:nvSpPr>
-          <p:cNvPr id="16" name="TextBox 15"/>
-          <p:cNvSpPr txBox="1"/>
-          <p:nvPr/>
-        </p:nvSpPr>
-        <p:spPr>
-          <a:xfrm>
-            <a:off x="3931920" y="2377440"/>
-            <a:ext cx="3474720" cy="548640"/>
-          </a:xfrm>
-          <a:prstGeom prst="rect">
-            <a:avLst/>
-          </a:prstGeom>
-          <a:noFill/>
-        </p:spPr>
-        <p:txBody>
-          <a:bodyPr wrap="square">
-            <a:spAutoFit/>
-          </a:bodyPr>
-          <a:lstStyle/>
-          <a:p>
-            <a:pPr algn="l">
-              <a:defRPr sz="1300" b="0">
-                <a:solidFill>
-                  <a:srgbClr val="FBBF24"/>
-                </a:solidFill>
-                <a:latin typeface="Calibri"/>
-              </a:defRPr>
-            </a:pPr>
-            <a:r>
-              <a:t>Double == in HTTP body</a:t>
-            </a:r>
-          </a:p>
-        </p:txBody>
-      </p:sp>
-      <p:sp>
-        <p:nvSpPr>
-          <p:cNvPr id="17" name="Rounded Rectangle 16"/>
+          <p:cNvPr id="20" name="TextBox 19"/>
+          <p:cNvSpPr txBox="1"/>
+          <p:nvPr/>
+        </p:nvSpPr>
+        <p:spPr>
+          <a:xfrm>
+            <a:off x="502920" y="3200400"/>
+            <a:ext cx="2377440" cy="320040"/>
+          </a:xfrm>
+          <a:prstGeom prst="rect">
+            <a:avLst/>
+          </a:prstGeom>
+          <a:noFill/>
+        </p:spPr>
+        <p:txBody>
+          <a:bodyPr wrap="square">
+            <a:spAutoFit/>
+          </a:bodyPr>
+          <a:lstStyle/>
+          <a:p>
+            <a:pPr algn="l">
+              <a:defRPr sz="1400" b="1">
+                <a:solidFill>
+                  <a:srgbClr val="A78BFA"/>
+                </a:solidFill>
+                <a:latin typeface="Calibri"/>
+              </a:defRPr>
+            </a:pPr>
+            <a:r>
+              <a:t>Multi-language</a:t>
+            </a:r>
+          </a:p>
+        </p:txBody>
+      </p:sp>
+      <p:sp>
+        <p:nvSpPr>
+          <p:cNvPr id="21" name="TextBox 20"/>
+          <p:cNvSpPr txBox="1"/>
+          <p:nvPr/>
+        </p:nvSpPr>
+        <p:spPr>
+          <a:xfrm>
+            <a:off x="502920" y="3566160"/>
+            <a:ext cx="2377440" cy="822960"/>
+          </a:xfrm>
+          <a:prstGeom prst="rect">
+            <a:avLst/>
+          </a:prstGeom>
+          <a:noFill/>
+        </p:spPr>
+        <p:txBody>
+          <a:bodyPr wrap="square">
+            <a:spAutoFit/>
+          </a:bodyPr>
+          <a:lstStyle/>
+          <a:p>
+            <a:pPr algn="l">
+              <a:defRPr sz="1200" b="0">
+                <a:solidFill>
+                  <a:srgbClr val="E0E0E0"/>
+                </a:solidFill>
+                <a:latin typeface="Calibri"/>
+              </a:defRPr>
+            </a:pPr>
+            <a:r>
+              <a:t>Auto-detect &amp; translate</a:t>
+            </a:r>
+          </a:p>
+        </p:txBody>
+      </p:sp>
+      <p:sp>
+        <p:nvSpPr>
+          <p:cNvPr id="22" name="Rounded Rectangle 21"/>
           <p:cNvSpPr/>
           <p:nvPr/>
         </p:nvSpPr>
         <p:spPr>
           <a:xfrm>
-            <a:off x="7680960" y="2286000"/>
-            <a:ext cx="4114800" cy="731520"/>
+            <a:off x="3291840" y="3108960"/>
+            <a:ext cx="2651760" cy="1463040"/>
           </a:xfrm>
           <a:prstGeom prst="roundRect">
             <a:avLst/>
@@ -6070,50 +5531,86 @@
       </p:sp>
       <p:sp>
         <p:nvSpPr>
-          <p:cNvPr id="18" name="TextBox 17"/>
-          <p:cNvSpPr txBox="1"/>
-          <p:nvPr/>
-        </p:nvSpPr>
-        <p:spPr>
-          <a:xfrm>
-            <a:off x="7772400" y="2377440"/>
-            <a:ext cx="3931920" cy="548640"/>
-          </a:xfrm>
-          <a:prstGeom prst="rect">
-            <a:avLst/>
-          </a:prstGeom>
-          <a:noFill/>
-        </p:spPr>
-        <p:txBody>
-          <a:bodyPr wrap="square">
-            <a:spAutoFit/>
-          </a:bodyPr>
-          <a:lstStyle/>
-          <a:p>
-            <a:pPr algn="l">
-              <a:defRPr sz="1300" b="0">
-                <a:solidFill>
-                  <a:srgbClr val="34D399"/>
-                </a:solidFill>
-                <a:latin typeface="Calibri"/>
-              </a:defRPr>
-            </a:pPr>
-            <a:r>
-              <a:t>Use single = expression</a:t>
-            </a:r>
-          </a:p>
-        </p:txBody>
-      </p:sp>
-      <p:sp>
-        <p:nvSpPr>
-          <p:cNvPr id="19" name="Rounded Rectangle 18"/>
+          <p:cNvPr id="23" name="TextBox 22"/>
+          <p:cNvSpPr txBox="1"/>
+          <p:nvPr/>
+        </p:nvSpPr>
+        <p:spPr>
+          <a:xfrm>
+            <a:off x="3429000" y="3200400"/>
+            <a:ext cx="2377440" cy="320040"/>
+          </a:xfrm>
+          <a:prstGeom prst="rect">
+            <a:avLst/>
+          </a:prstGeom>
+          <a:noFill/>
+        </p:spPr>
+        <p:txBody>
+          <a:bodyPr wrap="square">
+            <a:spAutoFit/>
+          </a:bodyPr>
+          <a:lstStyle/>
+          <a:p>
+            <a:pPr algn="l">
+              <a:defRPr sz="1400" b="1">
+                <a:solidFill>
+                  <a:srgbClr val="A78BFA"/>
+                </a:solidFill>
+                <a:latin typeface="Calibri"/>
+              </a:defRPr>
+            </a:pPr>
+            <a:r>
+              <a:t>A/B Testing</a:t>
+            </a:r>
+          </a:p>
+        </p:txBody>
+      </p:sp>
+      <p:sp>
+        <p:nvSpPr>
+          <p:cNvPr id="24" name="TextBox 23"/>
+          <p:cNvSpPr txBox="1"/>
+          <p:nvPr/>
+        </p:nvSpPr>
+        <p:spPr>
+          <a:xfrm>
+            <a:off x="3429000" y="3566160"/>
+            <a:ext cx="2377440" cy="822960"/>
+          </a:xfrm>
+          <a:prstGeom prst="rect">
+            <a:avLst/>
+          </a:prstGeom>
+          <a:noFill/>
+        </p:spPr>
+        <p:txBody>
+          <a:bodyPr wrap="square">
+            <a:spAutoFit/>
+          </a:bodyPr>
+          <a:lstStyle/>
+          <a:p>
+            <a:pPr algn="l">
+              <a:defRPr sz="1200" b="0">
+                <a:solidFill>
+                  <a:srgbClr val="E0E0E0"/>
+                </a:solidFill>
+                <a:latin typeface="Calibri"/>
+              </a:defRPr>
+            </a:pPr>
+            <a:r>
+              <a:t>Compare keyword strategies</a:t>
+            </a:r>
+          </a:p>
+        </p:txBody>
+      </p:sp>
+      <p:sp>
+        <p:nvSpPr>
+          <p:cNvPr id="25" name="Rounded Rectangle 24"/>
           <p:cNvSpPr/>
           <p:nvPr/>
         </p:nvSpPr>
         <p:spPr>
           <a:xfrm>
-            <a:off x="457200" y="3200400"/>
-            <a:ext cx="3200400" cy="731520"/>
+            <a:off x="6217920" y="3108960"/>
+            <a:ext cx="2651760" cy="1463040"/>
           </a:xfrm>
           <a:prstGeom prst="roundRect">
             <a:avLst/>
@@ -6150,50 +5647,86 @@
       </p:sp>
       <p:sp>
         <p:nvSpPr>
-          <p:cNvPr id="20" name="TextBox 19"/>
-          <p:cNvSpPr txBox="1"/>
-          <p:nvPr/>
-        </p:nvSpPr>
-        <p:spPr>
-          <a:xfrm>
-            <a:off x="548640" y="3291840"/>
-            <a:ext cx="3017520" cy="548640"/>
-          </a:xfrm>
-          <a:prstGeom prst="rect">
-            <a:avLst/>
-          </a:prstGeom>
-          <a:noFill/>
-        </p:spPr>
-        <p:txBody>
-          <a:bodyPr wrap="square">
-            <a:spAutoFit/>
-          </a:bodyPr>
-          <a:lstStyle/>
-          <a:p>
-            <a:pPr algn="l">
-              <a:defRPr sz="1300" b="1">
-                <a:solidFill>
-                  <a:srgbClr val="F87274"/>
-                </a:solidFill>
-                <a:latin typeface="Calibri"/>
-              </a:defRPr>
-            </a:pPr>
-            <a:r>
-              <a:t>Empty PDF</a:t>
-            </a:r>
-          </a:p>
-        </p:txBody>
-      </p:sp>
-      <p:sp>
-        <p:nvSpPr>
-          <p:cNvPr id="21" name="Rounded Rectangle 20"/>
+          <p:cNvPr id="26" name="TextBox 25"/>
+          <p:cNvSpPr txBox="1"/>
+          <p:nvPr/>
+        </p:nvSpPr>
+        <p:spPr>
+          <a:xfrm>
+            <a:off x="6355080" y="3200400"/>
+            <a:ext cx="2377440" cy="320040"/>
+          </a:xfrm>
+          <a:prstGeom prst="rect">
+            <a:avLst/>
+          </a:prstGeom>
+          <a:noFill/>
+        </p:spPr>
+        <p:txBody>
+          <a:bodyPr wrap="square">
+            <a:spAutoFit/>
+          </a:bodyPr>
+          <a:lstStyle/>
+          <a:p>
+            <a:pPr algn="l">
+              <a:defRPr sz="1400" b="1">
+                <a:solidFill>
+                  <a:srgbClr val="A78BFA"/>
+                </a:solidFill>
+                <a:latin typeface="Calibri"/>
+              </a:defRPr>
+            </a:pPr>
+            <a:r>
+              <a:t>Company Research</a:t>
+            </a:r>
+          </a:p>
+        </p:txBody>
+      </p:sp>
+      <p:sp>
+        <p:nvSpPr>
+          <p:cNvPr id="27" name="TextBox 26"/>
+          <p:cNvSpPr txBox="1"/>
+          <p:nvPr/>
+        </p:nvSpPr>
+        <p:spPr>
+          <a:xfrm>
+            <a:off x="6355080" y="3566160"/>
+            <a:ext cx="2377440" cy="822960"/>
+          </a:xfrm>
+          <a:prstGeom prst="rect">
+            <a:avLst/>
+          </a:prstGeom>
+          <a:noFill/>
+        </p:spPr>
+        <p:txBody>
+          <a:bodyPr wrap="square">
+            <a:spAutoFit/>
+          </a:bodyPr>
+          <a:lstStyle/>
+          <a:p>
+            <a:pPr algn="l">
+              <a:defRPr sz="1200" b="0">
+                <a:solidFill>
+                  <a:srgbClr val="E0E0E0"/>
+                </a:solidFill>
+                <a:latin typeface="Calibri"/>
+              </a:defRPr>
+            </a:pPr>
+            <a:r>
+              <a:t>Web search before generation</a:t>
+            </a:r>
+          </a:p>
+        </p:txBody>
+      </p:sp>
+      <p:sp>
+        <p:nvSpPr>
+          <p:cNvPr id="28" name="Rounded Rectangle 27"/>
           <p:cNvSpPr/>
           <p:nvPr/>
         </p:nvSpPr>
         <p:spPr>
           <a:xfrm>
-            <a:off x="3840480" y="3200400"/>
-            <a:ext cx="3657600" cy="731520"/>
+            <a:off x="9144000" y="3108960"/>
+            <a:ext cx="2651760" cy="1463040"/>
           </a:xfrm>
           <a:prstGeom prst="roundRect">
             <a:avLst/>
@@ -6230,50 +5763,86 @@
       </p:sp>
       <p:sp>
         <p:nvSpPr>
-          <p:cNvPr id="22" name="TextBox 21"/>
-          <p:cNvSpPr txBox="1"/>
-          <p:nvPr/>
-        </p:nvSpPr>
-        <p:spPr>
-          <a:xfrm>
-            <a:off x="3931920" y="3291840"/>
-            <a:ext cx="3474720" cy="548640"/>
-          </a:xfrm>
-          <a:prstGeom prst="rect">
-            <a:avLst/>
-          </a:prstGeom>
-          <a:noFill/>
-        </p:spPr>
-        <p:txBody>
-          <a:bodyPr wrap="square">
-            <a:spAutoFit/>
-          </a:bodyPr>
-          <a:lstStyle/>
-          <a:p>
-            <a:pPr algn="l">
-              <a:defRPr sz="1300" b="0">
-                <a:solidFill>
-                  <a:srgbClr val="FBBF24"/>
-                </a:solidFill>
-                <a:latin typeface="Calibri"/>
-              </a:defRPr>
-            </a:pPr>
-            <a:r>
-              <a:t>Scanned image PDF</a:t>
-            </a:r>
-          </a:p>
-        </p:txBody>
-      </p:sp>
-      <p:sp>
-        <p:nvSpPr>
-          <p:cNvPr id="23" name="Rounded Rectangle 22"/>
+          <p:cNvPr id="29" name="TextBox 28"/>
+          <p:cNvSpPr txBox="1"/>
+          <p:nvPr/>
+        </p:nvSpPr>
+        <p:spPr>
+          <a:xfrm>
+            <a:off x="9281160" y="3200400"/>
+            <a:ext cx="2377440" cy="320040"/>
+          </a:xfrm>
+          <a:prstGeom prst="rect">
+            <a:avLst/>
+          </a:prstGeom>
+          <a:noFill/>
+        </p:spPr>
+        <p:txBody>
+          <a:bodyPr wrap="square">
+            <a:spAutoFit/>
+          </a:bodyPr>
+          <a:lstStyle/>
+          <a:p>
+            <a:pPr algn="l">
+              <a:defRPr sz="1400" b="1">
+                <a:solidFill>
+                  <a:srgbClr val="A78BFA"/>
+                </a:solidFill>
+                <a:latin typeface="Calibri"/>
+              </a:defRPr>
+            </a:pPr>
+            <a:r>
+              <a:t>Version History</a:t>
+            </a:r>
+          </a:p>
+        </p:txBody>
+      </p:sp>
+      <p:sp>
+        <p:nvSpPr>
+          <p:cNvPr id="30" name="TextBox 29"/>
+          <p:cNvSpPr txBox="1"/>
+          <p:nvPr/>
+        </p:nvSpPr>
+        <p:spPr>
+          <a:xfrm>
+            <a:off x="9281160" y="3566160"/>
+            <a:ext cx="2377440" cy="822960"/>
+          </a:xfrm>
+          <a:prstGeom prst="rect">
+            <a:avLst/>
+          </a:prstGeom>
+          <a:noFill/>
+        </p:spPr>
+        <p:txBody>
+          <a:bodyPr wrap="square">
+            <a:spAutoFit/>
+          </a:bodyPr>
+          <a:lstStyle/>
+          <a:p>
+            <a:pPr algn="l">
+              <a:defRPr sz="1200" b="0">
+                <a:solidFill>
+                  <a:srgbClr val="E0E0E0"/>
+                </a:solidFill>
+                <a:latin typeface="Calibri"/>
+              </a:defRPr>
+            </a:pPr>
+            <a:r>
+              <a:t>Store &amp; diff all resumes</a:t>
+            </a:r>
+          </a:p>
+        </p:txBody>
+      </p:sp>
+      <p:sp>
+        <p:nvSpPr>
+          <p:cNvPr id="31" name="Rounded Rectangle 30"/>
           <p:cNvSpPr/>
           <p:nvPr/>
         </p:nvSpPr>
         <p:spPr>
           <a:xfrm>
-            <a:off x="7680960" y="3200400"/>
-            <a:ext cx="4114800" cy="731520"/>
+            <a:off x="365760" y="4846320"/>
+            <a:ext cx="2651760" cy="1463040"/>
           </a:xfrm>
           <a:prstGeom prst="roundRect">
             <a:avLst/>
@@ -6310,50 +5879,86 @@
       </p:sp>
       <p:sp>
         <p:nvSpPr>
-          <p:cNvPr id="24" name="TextBox 23"/>
-          <p:cNvSpPr txBox="1"/>
-          <p:nvPr/>
-        </p:nvSpPr>
-        <p:spPr>
-          <a:xfrm>
-            <a:off x="7772400" y="3291840"/>
-            <a:ext cx="3931920" cy="548640"/>
-          </a:xfrm>
-          <a:prstGeom prst="rect">
-            <a:avLst/>
-          </a:prstGeom>
-          <a:noFill/>
-        </p:spPr>
-        <p:txBody>
-          <a:bodyPr wrap="square">
-            <a:spAutoFit/>
-          </a:bodyPr>
-          <a:lstStyle/>
-          <a:p>
-            <a:pPr algn="l">
-              <a:defRPr sz="1300" b="0">
-                <a:solidFill>
-                  <a:srgbClr val="34D399"/>
-                </a:solidFill>
-                <a:latin typeface="Calibri"/>
-              </a:defRPr>
-            </a:pPr>
-            <a:r>
-              <a:t>Use text-based PDF or DOCX</a:t>
-            </a:r>
-          </a:p>
-        </p:txBody>
-      </p:sp>
-      <p:sp>
-        <p:nvSpPr>
-          <p:cNvPr id="25" name="Rounded Rectangle 24"/>
+          <p:cNvPr id="32" name="TextBox 31"/>
+          <p:cNvSpPr txBox="1"/>
+          <p:nvPr/>
+        </p:nvSpPr>
+        <p:spPr>
+          <a:xfrm>
+            <a:off x="502920" y="4937760"/>
+            <a:ext cx="2377440" cy="320040"/>
+          </a:xfrm>
+          <a:prstGeom prst="rect">
+            <a:avLst/>
+          </a:prstGeom>
+          <a:noFill/>
+        </p:spPr>
+        <p:txBody>
+          <a:bodyPr wrap="square">
+            <a:spAutoFit/>
+          </a:bodyPr>
+          <a:lstStyle/>
+          <a:p>
+            <a:pPr algn="l">
+              <a:defRPr sz="1400" b="1">
+                <a:solidFill>
+                  <a:srgbClr val="A78BFA"/>
+                </a:solidFill>
+                <a:latin typeface="Calibri"/>
+              </a:defRPr>
+            </a:pPr>
+            <a:r>
+              <a:t>WhatsApp Delivery</a:t>
+            </a:r>
+          </a:p>
+        </p:txBody>
+      </p:sp>
+      <p:sp>
+        <p:nvSpPr>
+          <p:cNvPr id="33" name="TextBox 32"/>
+          <p:cNvSpPr txBox="1"/>
+          <p:nvPr/>
+        </p:nvSpPr>
+        <p:spPr>
+          <a:xfrm>
+            <a:off x="502920" y="5303520"/>
+            <a:ext cx="2377440" cy="822960"/>
+          </a:xfrm>
+          <a:prstGeom prst="rect">
+            <a:avLst/>
+          </a:prstGeom>
+          <a:noFill/>
+        </p:spPr>
+        <p:txBody>
+          <a:bodyPr wrap="square">
+            <a:spAutoFit/>
+          </a:bodyPr>
+          <a:lstStyle/>
+          <a:p>
+            <a:pPr algn="l">
+              <a:defRPr sz="1200" b="0">
+                <a:solidFill>
+                  <a:srgbClr val="E0E0E0"/>
+                </a:solidFill>
+                <a:latin typeface="Calibri"/>
+              </a:defRPr>
+            </a:pPr>
+            <a:r>
+              <a:t>Alternate delivery channel</a:t>
+            </a:r>
+          </a:p>
+        </p:txBody>
+      </p:sp>
+      <p:sp>
+        <p:nvSpPr>
+          <p:cNvPr id="34" name="Rounded Rectangle 33"/>
           <p:cNvSpPr/>
           <p:nvPr/>
         </p:nvSpPr>
         <p:spPr>
           <a:xfrm>
-            <a:off x="457200" y="4114800"/>
-            <a:ext cx="3200400" cy="731520"/>
+            <a:off x="3291840" y="4846320"/>
+            <a:ext cx="2651760" cy="1463040"/>
           </a:xfrm>
           <a:prstGeom prst="roundRect">
             <a:avLst/>
@@ -6390,50 +5995,86 @@
       </p:sp>
       <p:sp>
         <p:nvSpPr>
-          <p:cNvPr id="26" name="TextBox 25"/>
-          <p:cNvSpPr txBox="1"/>
-          <p:nvPr/>
-        </p:nvSpPr>
-        <p:spPr>
-          <a:xfrm>
-            <a:off x="548640" y="4206240"/>
-            <a:ext cx="3017520" cy="548640"/>
-          </a:xfrm>
-          <a:prstGeom prst="rect">
-            <a:avLst/>
-          </a:prstGeom>
-          <a:noFill/>
-        </p:spPr>
-        <p:txBody>
-          <a:bodyPr wrap="square">
-            <a:spAutoFit/>
-          </a:bodyPr>
-          <a:lstStyle/>
-          <a:p>
-            <a:pPr algn="l">
-              <a:defRPr sz="1300" b="1">
-                <a:solidFill>
-                  <a:srgbClr val="F87274"/>
-                </a:solidFill>
-                <a:latin typeface="Calibri"/>
-              </a:defRPr>
-            </a:pPr>
-            <a:r>
-              <a:t>Telegram not sending</a:t>
-            </a:r>
-          </a:p>
-        </p:txBody>
-      </p:sp>
-      <p:sp>
-        <p:nvSpPr>
-          <p:cNvPr id="27" name="Rounded Rectangle 26"/>
+          <p:cNvPr id="35" name="TextBox 34"/>
+          <p:cNvSpPr txBox="1"/>
+          <p:nvPr/>
+        </p:nvSpPr>
+        <p:spPr>
+          <a:xfrm>
+            <a:off x="3429000" y="4937760"/>
+            <a:ext cx="2377440" cy="320040"/>
+          </a:xfrm>
+          <a:prstGeom prst="rect">
+            <a:avLst/>
+          </a:prstGeom>
+          <a:noFill/>
+        </p:spPr>
+        <p:txBody>
+          <a:bodyPr wrap="square">
+            <a:spAutoFit/>
+          </a:bodyPr>
+          <a:lstStyle/>
+          <a:p>
+            <a:pPr algn="l">
+              <a:defRPr sz="1400" b="1">
+                <a:solidFill>
+                  <a:srgbClr val="A78BFA"/>
+                </a:solidFill>
+                <a:latin typeface="Calibri"/>
+              </a:defRPr>
+            </a:pPr>
+            <a:r>
+              <a:t>Direct Apply</a:t>
+            </a:r>
+          </a:p>
+        </p:txBody>
+      </p:sp>
+      <p:sp>
+        <p:nvSpPr>
+          <p:cNvPr id="36" name="TextBox 35"/>
+          <p:cNvSpPr txBox="1"/>
+          <p:nvPr/>
+        </p:nvSpPr>
+        <p:spPr>
+          <a:xfrm>
+            <a:off x="3429000" y="5303520"/>
+            <a:ext cx="2377440" cy="822960"/>
+          </a:xfrm>
+          <a:prstGeom prst="rect">
+            <a:avLst/>
+          </a:prstGeom>
+          <a:noFill/>
+        </p:spPr>
+        <p:txBody>
+          <a:bodyPr wrap="square">
+            <a:spAutoFit/>
+          </a:bodyPr>
+          <a:lstStyle/>
+          <a:p>
+            <a:pPr algn="l">
+              <a:defRPr sz="1200" b="0">
+                <a:solidFill>
+                  <a:srgbClr val="E0E0E0"/>
+                </a:solidFill>
+                <a:latin typeface="Calibri"/>
+              </a:defRPr>
+            </a:pPr>
+            <a:r>
+              <a:t>LinkedIn/Indeed integration</a:t>
+            </a:r>
+          </a:p>
+        </p:txBody>
+      </p:sp>
+      <p:sp>
+        <p:nvSpPr>
+          <p:cNvPr id="37" name="Rounded Rectangle 36"/>
           <p:cNvSpPr/>
           <p:nvPr/>
         </p:nvSpPr>
         <p:spPr>
           <a:xfrm>
-            <a:off x="3840480" y="4114800"/>
-            <a:ext cx="3657600" cy="731520"/>
+            <a:off x="6217920" y="4846320"/>
+            <a:ext cx="2651760" cy="1463040"/>
           </a:xfrm>
           <a:prstGeom prst="roundRect">
             <a:avLst/>
@@ -6470,356 +6111,72 @@
       </p:sp>
       <p:sp>
         <p:nvSpPr>
-          <p:cNvPr id="28" name="TextBox 27"/>
-          <p:cNvSpPr txBox="1"/>
-          <p:nvPr/>
-        </p:nvSpPr>
-        <p:spPr>
-          <a:xfrm>
-            <a:off x="3931920" y="4206240"/>
-            <a:ext cx="3474720" cy="548640"/>
-          </a:xfrm>
-          <a:prstGeom prst="rect">
-            <a:avLst/>
-          </a:prstGeom>
-          <a:noFill/>
-        </p:spPr>
-        <p:txBody>
-          <a:bodyPr wrap="square">
-            <a:spAutoFit/>
-          </a:bodyPr>
-          <a:lstStyle/>
-          <a:p>
-            <a:pPr algn="l">
-              <a:defRPr sz="1300" b="0">
-                <a:solidFill>
-                  <a:srgbClr val="FBBF24"/>
-                </a:solidFill>
-                <a:latin typeface="Calibri"/>
-              </a:defRPr>
-            </a:pPr>
-            <a:r>
-              <a:t>Bot not in group/admin</a:t>
-            </a:r>
-          </a:p>
-        </p:txBody>
-      </p:sp>
-      <p:sp>
-        <p:nvSpPr>
-          <p:cNvPr id="29" name="Rounded Rectangle 28"/>
-          <p:cNvSpPr/>
-          <p:nvPr/>
-        </p:nvSpPr>
-        <p:spPr>
-          <a:xfrm>
-            <a:off x="7680960" y="4114800"/>
-            <a:ext cx="4114800" cy="731520"/>
-          </a:xfrm>
-          <a:prstGeom prst="roundRect">
-            <a:avLst/>
-          </a:prstGeom>
-          <a:solidFill>
-            <a:srgbClr val="1A1A4E"/>
-          </a:solidFill>
-          <a:ln>
-            <a:noFill/>
-          </a:ln>
-          <a:effectLst/>
-        </p:spPr>
-        <p:style>
-          <a:lnRef idx="1">
-            <a:schemeClr val="accent1"/>
-          </a:lnRef>
-          <a:fillRef idx="3">
-            <a:schemeClr val="accent1"/>
-          </a:fillRef>
-          <a:effectRef idx="2">
-            <a:schemeClr val="accent1"/>
-          </a:effectRef>
-          <a:fontRef idx="minor">
-            <a:schemeClr val="lt1"/>
-          </a:fontRef>
-        </p:style>
-        <p:txBody>
-          <a:bodyPr rtlCol="0" anchor="ctr"/>
-          <a:lstStyle/>
-          <a:p>
-            <a:pPr algn="ctr"/>
-          </a:p>
-        </p:txBody>
-      </p:sp>
-      <p:sp>
-        <p:nvSpPr>
-          <p:cNvPr id="30" name="TextBox 29"/>
-          <p:cNvSpPr txBox="1"/>
-          <p:nvPr/>
-        </p:nvSpPr>
-        <p:spPr>
-          <a:xfrm>
-            <a:off x="7772400" y="4206240"/>
-            <a:ext cx="3931920" cy="548640"/>
-          </a:xfrm>
-          <a:prstGeom prst="rect">
-            <a:avLst/>
-          </a:prstGeom>
-          <a:noFill/>
-        </p:spPr>
-        <p:txBody>
-          <a:bodyPr wrap="square">
-            <a:spAutoFit/>
-          </a:bodyPr>
-          <a:lstStyle/>
-          <a:p>
-            <a:pPr algn="l">
-              <a:defRPr sz="1300" b="0">
-                <a:solidFill>
-                  <a:srgbClr val="34D399"/>
-                </a:solidFill>
-                <a:latin typeface="Calibri"/>
-              </a:defRPr>
-            </a:pPr>
-            <a:r>
-              <a:t>Add bot and make admin</a:t>
-            </a:r>
-          </a:p>
-        </p:txBody>
-      </p:sp>
-      <p:sp>
-        <p:nvSpPr>
-          <p:cNvPr id="31" name="Rounded Rectangle 30"/>
-          <p:cNvSpPr/>
-          <p:nvPr/>
-        </p:nvSpPr>
-        <p:spPr>
-          <a:xfrm>
-            <a:off x="457200" y="5029200"/>
-            <a:ext cx="3200400" cy="731520"/>
-          </a:xfrm>
-          <a:prstGeom prst="roundRect">
-            <a:avLst/>
-          </a:prstGeom>
-          <a:solidFill>
-            <a:srgbClr val="1A1A4E"/>
-          </a:solidFill>
-          <a:ln>
-            <a:noFill/>
-          </a:ln>
-          <a:effectLst/>
-        </p:spPr>
-        <p:style>
-          <a:lnRef idx="1">
-            <a:schemeClr val="accent1"/>
-          </a:lnRef>
-          <a:fillRef idx="3">
-            <a:schemeClr val="accent1"/>
-          </a:fillRef>
-          <a:effectRef idx="2">
-            <a:schemeClr val="accent1"/>
-          </a:effectRef>
-          <a:fontRef idx="minor">
-            <a:schemeClr val="lt1"/>
-          </a:fontRef>
-        </p:style>
-        <p:txBody>
-          <a:bodyPr rtlCol="0" anchor="ctr"/>
-          <a:lstStyle/>
-          <a:p>
-            <a:pPr algn="ctr"/>
-          </a:p>
-        </p:txBody>
-      </p:sp>
-      <p:sp>
-        <p:nvSpPr>
-          <p:cNvPr id="32" name="TextBox 31"/>
-          <p:cNvSpPr txBox="1"/>
-          <p:nvPr/>
-        </p:nvSpPr>
-        <p:spPr>
-          <a:xfrm>
-            <a:off x="548640" y="5120640"/>
-            <a:ext cx="3017520" cy="548640"/>
-          </a:xfrm>
-          <a:prstGeom prst="rect">
-            <a:avLst/>
-          </a:prstGeom>
-          <a:noFill/>
-        </p:spPr>
-        <p:txBody>
-          <a:bodyPr wrap="square">
-            <a:spAutoFit/>
-          </a:bodyPr>
-          <a:lstStyle/>
-          <a:p>
-            <a:pPr algn="l">
-              <a:defRPr sz="1300" b="1">
-                <a:solidFill>
-                  <a:srgbClr val="F87274"/>
-                </a:solidFill>
-                <a:latin typeface="Calibri"/>
-              </a:defRPr>
-            </a:pPr>
-            <a:r>
-              <a:t>Gemini API errors</a:t>
-            </a:r>
-          </a:p>
-        </p:txBody>
-      </p:sp>
-      <p:sp>
-        <p:nvSpPr>
-          <p:cNvPr id="33" name="Rounded Rectangle 32"/>
-          <p:cNvSpPr/>
-          <p:nvPr/>
-        </p:nvSpPr>
-        <p:spPr>
-          <a:xfrm>
-            <a:off x="3840480" y="5029200"/>
-            <a:ext cx="3657600" cy="731520"/>
-          </a:xfrm>
-          <a:prstGeom prst="roundRect">
-            <a:avLst/>
-          </a:prstGeom>
-          <a:solidFill>
-            <a:srgbClr val="1A1A4E"/>
-          </a:solidFill>
-          <a:ln>
-            <a:noFill/>
-          </a:ln>
-          <a:effectLst/>
-        </p:spPr>
-        <p:style>
-          <a:lnRef idx="1">
-            <a:schemeClr val="accent1"/>
-          </a:lnRef>
-          <a:fillRef idx="3">
-            <a:schemeClr val="accent1"/>
-          </a:fillRef>
-          <a:effectRef idx="2">
-            <a:schemeClr val="accent1"/>
-          </a:effectRef>
-          <a:fontRef idx="minor">
-            <a:schemeClr val="lt1"/>
-          </a:fontRef>
-        </p:style>
-        <p:txBody>
-          <a:bodyPr rtlCol="0" anchor="ctr"/>
-          <a:lstStyle/>
-          <a:p>
-            <a:pPr algn="ctr"/>
-          </a:p>
-        </p:txBody>
-      </p:sp>
-      <p:sp>
-        <p:nvSpPr>
-          <p:cNvPr id="34" name="TextBox 33"/>
-          <p:cNvSpPr txBox="1"/>
-          <p:nvPr/>
-        </p:nvSpPr>
-        <p:spPr>
-          <a:xfrm>
-            <a:off x="3931920" y="5120640"/>
-            <a:ext cx="3474720" cy="548640"/>
-          </a:xfrm>
-          <a:prstGeom prst="rect">
-            <a:avLst/>
-          </a:prstGeom>
-          <a:noFill/>
-        </p:spPr>
-        <p:txBody>
-          <a:bodyPr wrap="square">
-            <a:spAutoFit/>
-          </a:bodyPr>
-          <a:lstStyle/>
-          <a:p>
-            <a:pPr algn="l">
-              <a:defRPr sz="1300" b="0">
-                <a:solidFill>
-                  <a:srgbClr val="FBBF24"/>
-                </a:solidFill>
-                <a:latin typeface="Calibri"/>
-              </a:defRPr>
-            </a:pPr>
-            <a:r>
-              <a:t>Free tier rate limit</a:t>
-            </a:r>
-          </a:p>
-        </p:txBody>
-      </p:sp>
-      <p:sp>
-        <p:nvSpPr>
-          <p:cNvPr id="35" name="Rounded Rectangle 34"/>
-          <p:cNvSpPr/>
-          <p:nvPr/>
-        </p:nvSpPr>
-        <p:spPr>
-          <a:xfrm>
-            <a:off x="7680960" y="5029200"/>
-            <a:ext cx="4114800" cy="731520"/>
-          </a:xfrm>
-          <a:prstGeom prst="roundRect">
-            <a:avLst/>
-          </a:prstGeom>
-          <a:solidFill>
-            <a:srgbClr val="1A1A4E"/>
-          </a:solidFill>
-          <a:ln>
-            <a:noFill/>
-          </a:ln>
-          <a:effectLst/>
-        </p:spPr>
-        <p:style>
-          <a:lnRef idx="1">
-            <a:schemeClr val="accent1"/>
-          </a:lnRef>
-          <a:fillRef idx="3">
-            <a:schemeClr val="accent1"/>
-          </a:fillRef>
-          <a:effectRef idx="2">
-            <a:schemeClr val="accent1"/>
-          </a:effectRef>
-          <a:fontRef idx="minor">
-            <a:schemeClr val="lt1"/>
-          </a:fontRef>
-        </p:style>
-        <p:txBody>
-          <a:bodyPr rtlCol="0" anchor="ctr"/>
-          <a:lstStyle/>
-          <a:p>
-            <a:pPr algn="ctr"/>
-          </a:p>
-        </p:txBody>
-      </p:sp>
-      <p:sp>
-        <p:nvSpPr>
-          <p:cNvPr id="36" name="TextBox 35"/>
-          <p:cNvSpPr txBox="1"/>
-          <p:nvPr/>
-        </p:nvSpPr>
-        <p:spPr>
-          <a:xfrm>
-            <a:off x="7772400" y="5120640"/>
-            <a:ext cx="3931920" cy="548640"/>
-          </a:xfrm>
-          <a:prstGeom prst="rect">
-            <a:avLst/>
-          </a:prstGeom>
-          <a:noFill/>
-        </p:spPr>
-        <p:txBody>
-          <a:bodyPr wrap="square">
-            <a:spAutoFit/>
-          </a:bodyPr>
-          <a:lstStyle/>
-          <a:p>
-            <a:pPr algn="l">
-              <a:defRPr sz="1300" b="0">
-                <a:solidFill>
-                  <a:srgbClr val="34D399"/>
-                </a:solidFill>
-                <a:latin typeface="Calibri"/>
-              </a:defRPr>
-            </a:pPr>
-            <a:r>
-              <a:t>Add Wait node between calls</a:t>
+          <p:cNvPr id="38" name="TextBox 37"/>
+          <p:cNvSpPr txBox="1"/>
+          <p:nvPr/>
+        </p:nvSpPr>
+        <p:spPr>
+          <a:xfrm>
+            <a:off x="6355080" y="4937760"/>
+            <a:ext cx="2377440" cy="320040"/>
+          </a:xfrm>
+          <a:prstGeom prst="rect">
+            <a:avLst/>
+          </a:prstGeom>
+          <a:noFill/>
+        </p:spPr>
+        <p:txBody>
+          <a:bodyPr wrap="square">
+            <a:spAutoFit/>
+          </a:bodyPr>
+          <a:lstStyle/>
+          <a:p>
+            <a:pPr algn="l">
+              <a:defRPr sz="1400" b="1">
+                <a:solidFill>
+                  <a:srgbClr val="A78BFA"/>
+                </a:solidFill>
+                <a:latin typeface="Calibri"/>
+              </a:defRPr>
+            </a:pPr>
+            <a:r>
+              <a:t>Plugin System</a:t>
+            </a:r>
+          </a:p>
+        </p:txBody>
+      </p:sp>
+      <p:sp>
+        <p:nvSpPr>
+          <p:cNvPr id="39" name="TextBox 38"/>
+          <p:cNvSpPr txBox="1"/>
+          <p:nvPr/>
+        </p:nvSpPr>
+        <p:spPr>
+          <a:xfrm>
+            <a:off x="6355080" y="5303520"/>
+            <a:ext cx="2377440" cy="822960"/>
+          </a:xfrm>
+          <a:prstGeom prst="rect">
+            <a:avLst/>
+          </a:prstGeom>
+          <a:noFill/>
+        </p:spPr>
+        <p:txBody>
+          <a:bodyPr wrap="square">
+            <a:spAutoFit/>
+          </a:bodyPr>
+          <a:lstStyle/>
+          <a:p>
+            <a:pPr algn="l">
+              <a:defRPr sz="1200" b="0">
+                <a:solidFill>
+                  <a:srgbClr val="E0E0E0"/>
+                </a:solidFill>
+                <a:latin typeface="Calibri"/>
+              </a:defRPr>
+            </a:pPr>
+            <a:r>
+              <a:t>Community templates</a:t>
             </a:r>
           </a:p>
         </p:txBody>
@@ -6852,6 +6209,1443 @@
       <p:grpSpPr/>
       <p:sp>
         <p:nvSpPr>
+          <p:cNvPr id="2" name="Rounded Rectangle 1"/>
+          <p:cNvSpPr/>
+          <p:nvPr/>
+        </p:nvSpPr>
+        <p:spPr>
+          <a:xfrm>
+            <a:off x="0" y="0"/>
+            <a:ext cx="12191695" cy="73152"/>
+          </a:xfrm>
+          <a:prstGeom prst="roundRect">
+            <a:avLst/>
+          </a:prstGeom>
+          <a:solidFill>
+            <a:srgbClr val="667EEA"/>
+          </a:solidFill>
+          <a:ln>
+            <a:noFill/>
+          </a:ln>
+          <a:effectLst/>
+        </p:spPr>
+        <p:style>
+          <a:lnRef idx="1">
+            <a:schemeClr val="accent1"/>
+          </a:lnRef>
+          <a:fillRef idx="3">
+            <a:schemeClr val="accent1"/>
+          </a:fillRef>
+          <a:effectRef idx="2">
+            <a:schemeClr val="accent1"/>
+          </a:effectRef>
+          <a:fontRef idx="minor">
+            <a:schemeClr val="lt1"/>
+          </a:fontRef>
+        </p:style>
+        <p:txBody>
+          <a:bodyPr rtlCol="0" anchor="ctr"/>
+          <a:lstStyle/>
+          <a:p>
+            <a:pPr algn="ctr"/>
+          </a:p>
+        </p:txBody>
+      </p:sp>
+      <p:sp>
+        <p:nvSpPr>
+          <p:cNvPr id="3" name="Oval 2"/>
+          <p:cNvSpPr/>
+          <p:nvPr/>
+        </p:nvSpPr>
+        <p:spPr>
+          <a:xfrm>
+            <a:off x="548640" y="365760"/>
+            <a:ext cx="640080" cy="640080"/>
+          </a:xfrm>
+          <a:prstGeom prst="ellipse">
+            <a:avLst/>
+          </a:prstGeom>
+          <a:solidFill>
+            <a:srgbClr val="667EEA"/>
+          </a:solidFill>
+          <a:ln>
+            <a:noFill/>
+          </a:ln>
+        </p:spPr>
+        <p:style>
+          <a:lnRef idx="1">
+            <a:schemeClr val="accent1"/>
+          </a:lnRef>
+          <a:fillRef idx="3">
+            <a:schemeClr val="accent1"/>
+          </a:fillRef>
+          <a:effectRef idx="2">
+            <a:schemeClr val="accent1"/>
+          </a:effectRef>
+          <a:fontRef idx="minor">
+            <a:schemeClr val="lt1"/>
+          </a:fontRef>
+        </p:style>
+        <p:txBody>
+          <a:bodyPr rtlCol="0" anchor="ctr" wrap="none"/>
+          <a:lstStyle/>
+          <a:p>
+            <a:pPr algn="ctr">
+              <a:defRPr sz="2800" b="1">
+                <a:solidFill>
+                  <a:srgbClr val="FFFFFF"/>
+                </a:solidFill>
+              </a:defRPr>
+            </a:pPr>
+            <a:r>
+              <a:t>11</a:t>
+            </a:r>
+          </a:p>
+        </p:txBody>
+      </p:sp>
+      <p:sp>
+        <p:nvSpPr>
+          <p:cNvPr id="4" name="TextBox 3"/>
+          <p:cNvSpPr txBox="1"/>
+          <p:nvPr/>
+        </p:nvSpPr>
+        <p:spPr>
+          <a:xfrm>
+            <a:off x="1371600" y="320040"/>
+            <a:ext cx="9144000" cy="640080"/>
+          </a:xfrm>
+          <a:prstGeom prst="rect">
+            <a:avLst/>
+          </a:prstGeom>
+          <a:noFill/>
+        </p:spPr>
+        <p:txBody>
+          <a:bodyPr wrap="square">
+            <a:spAutoFit/>
+          </a:bodyPr>
+          <a:lstStyle/>
+          <a:p>
+            <a:pPr algn="l">
+              <a:defRPr sz="3200" b="1">
+                <a:solidFill>
+                  <a:srgbClr val="FFFFFF"/>
+                </a:solidFill>
+                <a:latin typeface="Calibri"/>
+              </a:defRPr>
+            </a:pPr>
+            <a:r>
+              <a:t>Troubleshooting</a:t>
+            </a:r>
+          </a:p>
+        </p:txBody>
+      </p:sp>
+      <p:sp>
+        <p:nvSpPr>
+          <p:cNvPr id="5" name="TextBox 4"/>
+          <p:cNvSpPr txBox="1"/>
+          <p:nvPr/>
+        </p:nvSpPr>
+        <p:spPr>
+          <a:xfrm>
+            <a:off x="1371600" y="822960"/>
+            <a:ext cx="9144000" cy="457200"/>
+          </a:xfrm>
+          <a:prstGeom prst="rect">
+            <a:avLst/>
+          </a:prstGeom>
+          <a:noFill/>
+        </p:spPr>
+        <p:txBody>
+          <a:bodyPr wrap="square">
+            <a:spAutoFit/>
+          </a:bodyPr>
+          <a:lstStyle/>
+          <a:p>
+            <a:pPr algn="l">
+              <a:defRPr sz="1600" b="0">
+                <a:solidFill>
+                  <a:srgbClr val="9CA3AF"/>
+                </a:solidFill>
+                <a:latin typeface="Calibri"/>
+              </a:defRPr>
+            </a:pPr>
+            <a:r>
+              <a:t>Common issues &amp; fixes</a:t>
+            </a:r>
+          </a:p>
+        </p:txBody>
+      </p:sp>
+      <p:sp>
+        <p:nvSpPr>
+          <p:cNvPr id="6" name="Rectangle 5"/>
+          <p:cNvSpPr/>
+          <p:nvPr/>
+        </p:nvSpPr>
+        <p:spPr>
+          <a:xfrm>
+            <a:off x="1371600" y="1188720"/>
+            <a:ext cx="9601200" cy="18288"/>
+          </a:xfrm>
+          <a:prstGeom prst="rect">
+            <a:avLst/>
+          </a:prstGeom>
+          <a:solidFill>
+            <a:srgbClr val="2D2D5E"/>
+          </a:solidFill>
+          <a:ln>
+            <a:noFill/>
+          </a:ln>
+        </p:spPr>
+        <p:style>
+          <a:lnRef idx="1">
+            <a:schemeClr val="accent1"/>
+          </a:lnRef>
+          <a:fillRef idx="3">
+            <a:schemeClr val="accent1"/>
+          </a:fillRef>
+          <a:effectRef idx="2">
+            <a:schemeClr val="accent1"/>
+          </a:effectRef>
+          <a:fontRef idx="minor">
+            <a:schemeClr val="lt1"/>
+          </a:fontRef>
+        </p:style>
+        <p:txBody>
+          <a:bodyPr rtlCol="0" anchor="ctr"/>
+          <a:lstStyle/>
+          <a:p>
+            <a:pPr algn="ctr"/>
+          </a:p>
+        </p:txBody>
+      </p:sp>
+      <p:sp>
+        <p:nvSpPr>
+          <p:cNvPr id="7" name="Rounded Rectangle 6"/>
+          <p:cNvSpPr/>
+          <p:nvPr/>
+        </p:nvSpPr>
+        <p:spPr>
+          <a:xfrm>
+            <a:off x="457200" y="1371600"/>
+            <a:ext cx="3200400" cy="731520"/>
+          </a:xfrm>
+          <a:prstGeom prst="roundRect">
+            <a:avLst/>
+          </a:prstGeom>
+          <a:solidFill>
+            <a:srgbClr val="1A1A4E"/>
+          </a:solidFill>
+          <a:ln>
+            <a:noFill/>
+          </a:ln>
+          <a:effectLst/>
+        </p:spPr>
+        <p:style>
+          <a:lnRef idx="1">
+            <a:schemeClr val="accent1"/>
+          </a:lnRef>
+          <a:fillRef idx="3">
+            <a:schemeClr val="accent1"/>
+          </a:fillRef>
+          <a:effectRef idx="2">
+            <a:schemeClr val="accent1"/>
+          </a:effectRef>
+          <a:fontRef idx="minor">
+            <a:schemeClr val="lt1"/>
+          </a:fontRef>
+        </p:style>
+        <p:txBody>
+          <a:bodyPr rtlCol="0" anchor="ctr"/>
+          <a:lstStyle/>
+          <a:p>
+            <a:pPr algn="ctr"/>
+          </a:p>
+        </p:txBody>
+      </p:sp>
+      <p:sp>
+        <p:nvSpPr>
+          <p:cNvPr id="8" name="TextBox 7"/>
+          <p:cNvSpPr txBox="1"/>
+          <p:nvPr/>
+        </p:nvSpPr>
+        <p:spPr>
+          <a:xfrm>
+            <a:off x="548640" y="1463040"/>
+            <a:ext cx="3017520" cy="548640"/>
+          </a:xfrm>
+          <a:prstGeom prst="rect">
+            <a:avLst/>
+          </a:prstGeom>
+          <a:noFill/>
+        </p:spPr>
+        <p:txBody>
+          <a:bodyPr wrap="square">
+            <a:spAutoFit/>
+          </a:bodyPr>
+          <a:lstStyle/>
+          <a:p>
+            <a:pPr algn="l">
+              <a:defRPr sz="1300" b="1">
+                <a:solidFill>
+                  <a:srgbClr val="F87274"/>
+                </a:solidFill>
+                <a:latin typeface="Calibri"/>
+              </a:defRPr>
+            </a:pPr>
+            <a:r>
+              <a:t>Missing begin document</a:t>
+            </a:r>
+          </a:p>
+        </p:txBody>
+      </p:sp>
+      <p:sp>
+        <p:nvSpPr>
+          <p:cNvPr id="9" name="Rounded Rectangle 8"/>
+          <p:cNvSpPr/>
+          <p:nvPr/>
+        </p:nvSpPr>
+        <p:spPr>
+          <a:xfrm>
+            <a:off x="3840480" y="1371600"/>
+            <a:ext cx="3657600" cy="731520"/>
+          </a:xfrm>
+          <a:prstGeom prst="roundRect">
+            <a:avLst/>
+          </a:prstGeom>
+          <a:solidFill>
+            <a:srgbClr val="1A1A4E"/>
+          </a:solidFill>
+          <a:ln>
+            <a:noFill/>
+          </a:ln>
+          <a:effectLst/>
+        </p:spPr>
+        <p:style>
+          <a:lnRef idx="1">
+            <a:schemeClr val="accent1"/>
+          </a:lnRef>
+          <a:fillRef idx="3">
+            <a:schemeClr val="accent1"/>
+          </a:fillRef>
+          <a:effectRef idx="2">
+            <a:schemeClr val="accent1"/>
+          </a:effectRef>
+          <a:fontRef idx="minor">
+            <a:schemeClr val="lt1"/>
+          </a:fontRef>
+        </p:style>
+        <p:txBody>
+          <a:bodyPr rtlCol="0" anchor="ctr"/>
+          <a:lstStyle/>
+          <a:p>
+            <a:pPr algn="ctr"/>
+          </a:p>
+        </p:txBody>
+      </p:sp>
+      <p:sp>
+        <p:nvSpPr>
+          <p:cNvPr id="10" name="TextBox 9"/>
+          <p:cNvSpPr txBox="1"/>
+          <p:nvPr/>
+        </p:nvSpPr>
+        <p:spPr>
+          <a:xfrm>
+            <a:off x="3931920" y="1463040"/>
+            <a:ext cx="3474720" cy="548640"/>
+          </a:xfrm>
+          <a:prstGeom prst="rect">
+            <a:avLst/>
+          </a:prstGeom>
+          <a:noFill/>
+        </p:spPr>
+        <p:txBody>
+          <a:bodyPr wrap="square">
+            <a:spAutoFit/>
+          </a:bodyPr>
+          <a:lstStyle/>
+          <a:p>
+            <a:pPr algn="l">
+              <a:defRPr sz="1300" b="0">
+                <a:solidFill>
+                  <a:srgbClr val="FBBF24"/>
+                </a:solidFill>
+                <a:latin typeface="Calibri"/>
+              </a:defRPr>
+            </a:pPr>
+            <a:r>
+              <a:t>LLM markdown fences</a:t>
+            </a:r>
+          </a:p>
+        </p:txBody>
+      </p:sp>
+      <p:sp>
+        <p:nvSpPr>
+          <p:cNvPr id="11" name="Rounded Rectangle 10"/>
+          <p:cNvSpPr/>
+          <p:nvPr/>
+        </p:nvSpPr>
+        <p:spPr>
+          <a:xfrm>
+            <a:off x="7680960" y="1371600"/>
+            <a:ext cx="4114800" cy="731520"/>
+          </a:xfrm>
+          <a:prstGeom prst="roundRect">
+            <a:avLst/>
+          </a:prstGeom>
+          <a:solidFill>
+            <a:srgbClr val="1A1A4E"/>
+          </a:solidFill>
+          <a:ln>
+            <a:noFill/>
+          </a:ln>
+          <a:effectLst/>
+        </p:spPr>
+        <p:style>
+          <a:lnRef idx="1">
+            <a:schemeClr val="accent1"/>
+          </a:lnRef>
+          <a:fillRef idx="3">
+            <a:schemeClr val="accent1"/>
+          </a:fillRef>
+          <a:effectRef idx="2">
+            <a:schemeClr val="accent1"/>
+          </a:effectRef>
+          <a:fontRef idx="minor">
+            <a:schemeClr val="lt1"/>
+          </a:fontRef>
+        </p:style>
+        <p:txBody>
+          <a:bodyPr rtlCol="0" anchor="ctr"/>
+          <a:lstStyle/>
+          <a:p>
+            <a:pPr algn="ctr"/>
+          </a:p>
+        </p:txBody>
+      </p:sp>
+      <p:sp>
+        <p:nvSpPr>
+          <p:cNvPr id="12" name="TextBox 11"/>
+          <p:cNvSpPr txBox="1"/>
+          <p:nvPr/>
+        </p:nvSpPr>
+        <p:spPr>
+          <a:xfrm>
+            <a:off x="7772400" y="1463040"/>
+            <a:ext cx="3931920" cy="548640"/>
+          </a:xfrm>
+          <a:prstGeom prst="rect">
+            <a:avLst/>
+          </a:prstGeom>
+          <a:noFill/>
+        </p:spPr>
+        <p:txBody>
+          <a:bodyPr wrap="square">
+            <a:spAutoFit/>
+          </a:bodyPr>
+          <a:lstStyle/>
+          <a:p>
+            <a:pPr algn="l">
+              <a:defRPr sz="1300" b="0">
+                <a:solidFill>
+                  <a:srgbClr val="34D399"/>
+                </a:solidFill>
+                <a:latin typeface="Calibri"/>
+              </a:defRPr>
+            </a:pPr>
+            <a:r>
+              <a:t>Auto-fixed by code</a:t>
+            </a:r>
+          </a:p>
+        </p:txBody>
+      </p:sp>
+      <p:sp>
+        <p:nvSpPr>
+          <p:cNvPr id="13" name="Rounded Rectangle 12"/>
+          <p:cNvSpPr/>
+          <p:nvPr/>
+        </p:nvSpPr>
+        <p:spPr>
+          <a:xfrm>
+            <a:off x="457200" y="2286000"/>
+            <a:ext cx="3200400" cy="731520"/>
+          </a:xfrm>
+          <a:prstGeom prst="roundRect">
+            <a:avLst/>
+          </a:prstGeom>
+          <a:solidFill>
+            <a:srgbClr val="1A1A4E"/>
+          </a:solidFill>
+          <a:ln>
+            <a:noFill/>
+          </a:ln>
+          <a:effectLst/>
+        </p:spPr>
+        <p:style>
+          <a:lnRef idx="1">
+            <a:schemeClr val="accent1"/>
+          </a:lnRef>
+          <a:fillRef idx="3">
+            <a:schemeClr val="accent1"/>
+          </a:fillRef>
+          <a:effectRef idx="2">
+            <a:schemeClr val="accent1"/>
+          </a:effectRef>
+          <a:fontRef idx="minor">
+            <a:schemeClr val="lt1"/>
+          </a:fontRef>
+        </p:style>
+        <p:txBody>
+          <a:bodyPr rtlCol="0" anchor="ctr"/>
+          <a:lstStyle/>
+          <a:p>
+            <a:pPr algn="ctr"/>
+          </a:p>
+        </p:txBody>
+      </p:sp>
+      <p:sp>
+        <p:nvSpPr>
+          <p:cNvPr id="14" name="TextBox 13"/>
+          <p:cNvSpPr txBox="1"/>
+          <p:nvPr/>
+        </p:nvSpPr>
+        <p:spPr>
+          <a:xfrm>
+            <a:off x="548640" y="2377440"/>
+            <a:ext cx="3017520" cy="548640"/>
+          </a:xfrm>
+          <a:prstGeom prst="rect">
+            <a:avLst/>
+          </a:prstGeom>
+          <a:noFill/>
+        </p:spPr>
+        <p:txBody>
+          <a:bodyPr wrap="square">
+            <a:spAutoFit/>
+          </a:bodyPr>
+          <a:lstStyle/>
+          <a:p>
+            <a:pPr algn="l">
+              <a:defRPr sz="1300" b="1">
+                <a:solidFill>
+                  <a:srgbClr val="F87274"/>
+                </a:solidFill>
+                <a:latin typeface="Calibri"/>
+              </a:defRPr>
+            </a:pPr>
+            <a:r>
+              <a:t>COMPILATION SPEC</a:t>
+            </a:r>
+          </a:p>
+        </p:txBody>
+      </p:sp>
+      <p:sp>
+        <p:nvSpPr>
+          <p:cNvPr id="15" name="Rounded Rectangle 14"/>
+          <p:cNvSpPr/>
+          <p:nvPr/>
+        </p:nvSpPr>
+        <p:spPr>
+          <a:xfrm>
+            <a:off x="3840480" y="2286000"/>
+            <a:ext cx="3657600" cy="731520"/>
+          </a:xfrm>
+          <a:prstGeom prst="roundRect">
+            <a:avLst/>
+          </a:prstGeom>
+          <a:solidFill>
+            <a:srgbClr val="1A1A4E"/>
+          </a:solidFill>
+          <a:ln>
+            <a:noFill/>
+          </a:ln>
+          <a:effectLst/>
+        </p:spPr>
+        <p:style>
+          <a:lnRef idx="1">
+            <a:schemeClr val="accent1"/>
+          </a:lnRef>
+          <a:fillRef idx="3">
+            <a:schemeClr val="accent1"/>
+          </a:fillRef>
+          <a:effectRef idx="2">
+            <a:schemeClr val="accent1"/>
+          </a:effectRef>
+          <a:fontRef idx="minor">
+            <a:schemeClr val="lt1"/>
+          </a:fontRef>
+        </p:style>
+        <p:txBody>
+          <a:bodyPr rtlCol="0" anchor="ctr"/>
+          <a:lstStyle/>
+          <a:p>
+            <a:pPr algn="ctr"/>
+          </a:p>
+        </p:txBody>
+      </p:sp>
+      <p:sp>
+        <p:nvSpPr>
+          <p:cNvPr id="16" name="TextBox 15"/>
+          <p:cNvSpPr txBox="1"/>
+          <p:nvPr/>
+        </p:nvSpPr>
+        <p:spPr>
+          <a:xfrm>
+            <a:off x="3931920" y="2377440"/>
+            <a:ext cx="3474720" cy="548640"/>
+          </a:xfrm>
+          <a:prstGeom prst="rect">
+            <a:avLst/>
+          </a:prstGeom>
+          <a:noFill/>
+        </p:spPr>
+        <p:txBody>
+          <a:bodyPr wrap="square">
+            <a:spAutoFit/>
+          </a:bodyPr>
+          <a:lstStyle/>
+          <a:p>
+            <a:pPr algn="l">
+              <a:defRPr sz="1300" b="0">
+                <a:solidFill>
+                  <a:srgbClr val="FBBF24"/>
+                </a:solidFill>
+                <a:latin typeface="Calibri"/>
+              </a:defRPr>
+            </a:pPr>
+            <a:r>
+              <a:t>Double ==</a:t>
+            </a:r>
+          </a:p>
+        </p:txBody>
+      </p:sp>
+      <p:sp>
+        <p:nvSpPr>
+          <p:cNvPr id="17" name="Rounded Rectangle 16"/>
+          <p:cNvSpPr/>
+          <p:nvPr/>
+        </p:nvSpPr>
+        <p:spPr>
+          <a:xfrm>
+            <a:off x="7680960" y="2286000"/>
+            <a:ext cx="4114800" cy="731520"/>
+          </a:xfrm>
+          <a:prstGeom prst="roundRect">
+            <a:avLst/>
+          </a:prstGeom>
+          <a:solidFill>
+            <a:srgbClr val="1A1A4E"/>
+          </a:solidFill>
+          <a:ln>
+            <a:noFill/>
+          </a:ln>
+          <a:effectLst/>
+        </p:spPr>
+        <p:style>
+          <a:lnRef idx="1">
+            <a:schemeClr val="accent1"/>
+          </a:lnRef>
+          <a:fillRef idx="3">
+            <a:schemeClr val="accent1"/>
+          </a:fillRef>
+          <a:effectRef idx="2">
+            <a:schemeClr val="accent1"/>
+          </a:effectRef>
+          <a:fontRef idx="minor">
+            <a:schemeClr val="lt1"/>
+          </a:fontRef>
+        </p:style>
+        <p:txBody>
+          <a:bodyPr rtlCol="0" anchor="ctr"/>
+          <a:lstStyle/>
+          <a:p>
+            <a:pPr algn="ctr"/>
+          </a:p>
+        </p:txBody>
+      </p:sp>
+      <p:sp>
+        <p:nvSpPr>
+          <p:cNvPr id="18" name="TextBox 17"/>
+          <p:cNvSpPr txBox="1"/>
+          <p:nvPr/>
+        </p:nvSpPr>
+        <p:spPr>
+          <a:xfrm>
+            <a:off x="7772400" y="2377440"/>
+            <a:ext cx="3931920" cy="548640"/>
+          </a:xfrm>
+          <a:prstGeom prst="rect">
+            <a:avLst/>
+          </a:prstGeom>
+          <a:noFill/>
+        </p:spPr>
+        <p:txBody>
+          <a:bodyPr wrap="square">
+            <a:spAutoFit/>
+          </a:bodyPr>
+          <a:lstStyle/>
+          <a:p>
+            <a:pPr algn="l">
+              <a:defRPr sz="1300" b="0">
+                <a:solidFill>
+                  <a:srgbClr val="34D399"/>
+                </a:solidFill>
+                <a:latin typeface="Calibri"/>
+              </a:defRPr>
+            </a:pPr>
+            <a:r>
+              <a:t>Use single =</a:t>
+            </a:r>
+          </a:p>
+        </p:txBody>
+      </p:sp>
+      <p:sp>
+        <p:nvSpPr>
+          <p:cNvPr id="19" name="Rounded Rectangle 18"/>
+          <p:cNvSpPr/>
+          <p:nvPr/>
+        </p:nvSpPr>
+        <p:spPr>
+          <a:xfrm>
+            <a:off x="457200" y="3200400"/>
+            <a:ext cx="3200400" cy="731520"/>
+          </a:xfrm>
+          <a:prstGeom prst="roundRect">
+            <a:avLst/>
+          </a:prstGeom>
+          <a:solidFill>
+            <a:srgbClr val="1A1A4E"/>
+          </a:solidFill>
+          <a:ln>
+            <a:noFill/>
+          </a:ln>
+          <a:effectLst/>
+        </p:spPr>
+        <p:style>
+          <a:lnRef idx="1">
+            <a:schemeClr val="accent1"/>
+          </a:lnRef>
+          <a:fillRef idx="3">
+            <a:schemeClr val="accent1"/>
+          </a:fillRef>
+          <a:effectRef idx="2">
+            <a:schemeClr val="accent1"/>
+          </a:effectRef>
+          <a:fontRef idx="minor">
+            <a:schemeClr val="lt1"/>
+          </a:fontRef>
+        </p:style>
+        <p:txBody>
+          <a:bodyPr rtlCol="0" anchor="ctr"/>
+          <a:lstStyle/>
+          <a:p>
+            <a:pPr algn="ctr"/>
+          </a:p>
+        </p:txBody>
+      </p:sp>
+      <p:sp>
+        <p:nvSpPr>
+          <p:cNvPr id="20" name="TextBox 19"/>
+          <p:cNvSpPr txBox="1"/>
+          <p:nvPr/>
+        </p:nvSpPr>
+        <p:spPr>
+          <a:xfrm>
+            <a:off x="548640" y="3291840"/>
+            <a:ext cx="3017520" cy="548640"/>
+          </a:xfrm>
+          <a:prstGeom prst="rect">
+            <a:avLst/>
+          </a:prstGeom>
+          <a:noFill/>
+        </p:spPr>
+        <p:txBody>
+          <a:bodyPr wrap="square">
+            <a:spAutoFit/>
+          </a:bodyPr>
+          <a:lstStyle/>
+          <a:p>
+            <a:pPr algn="l">
+              <a:defRPr sz="1300" b="1">
+                <a:solidFill>
+                  <a:srgbClr val="F87274"/>
+                </a:solidFill>
+                <a:latin typeface="Calibri"/>
+              </a:defRPr>
+            </a:pPr>
+            <a:r>
+              <a:t>Empty PDF</a:t>
+            </a:r>
+          </a:p>
+        </p:txBody>
+      </p:sp>
+      <p:sp>
+        <p:nvSpPr>
+          <p:cNvPr id="21" name="Rounded Rectangle 20"/>
+          <p:cNvSpPr/>
+          <p:nvPr/>
+        </p:nvSpPr>
+        <p:spPr>
+          <a:xfrm>
+            <a:off x="3840480" y="3200400"/>
+            <a:ext cx="3657600" cy="731520"/>
+          </a:xfrm>
+          <a:prstGeom prst="roundRect">
+            <a:avLst/>
+          </a:prstGeom>
+          <a:solidFill>
+            <a:srgbClr val="1A1A4E"/>
+          </a:solidFill>
+          <a:ln>
+            <a:noFill/>
+          </a:ln>
+          <a:effectLst/>
+        </p:spPr>
+        <p:style>
+          <a:lnRef idx="1">
+            <a:schemeClr val="accent1"/>
+          </a:lnRef>
+          <a:fillRef idx="3">
+            <a:schemeClr val="accent1"/>
+          </a:fillRef>
+          <a:effectRef idx="2">
+            <a:schemeClr val="accent1"/>
+          </a:effectRef>
+          <a:fontRef idx="minor">
+            <a:schemeClr val="lt1"/>
+          </a:fontRef>
+        </p:style>
+        <p:txBody>
+          <a:bodyPr rtlCol="0" anchor="ctr"/>
+          <a:lstStyle/>
+          <a:p>
+            <a:pPr algn="ctr"/>
+          </a:p>
+        </p:txBody>
+      </p:sp>
+      <p:sp>
+        <p:nvSpPr>
+          <p:cNvPr id="22" name="TextBox 21"/>
+          <p:cNvSpPr txBox="1"/>
+          <p:nvPr/>
+        </p:nvSpPr>
+        <p:spPr>
+          <a:xfrm>
+            <a:off x="3931920" y="3291840"/>
+            <a:ext cx="3474720" cy="548640"/>
+          </a:xfrm>
+          <a:prstGeom prst="rect">
+            <a:avLst/>
+          </a:prstGeom>
+          <a:noFill/>
+        </p:spPr>
+        <p:txBody>
+          <a:bodyPr wrap="square">
+            <a:spAutoFit/>
+          </a:bodyPr>
+          <a:lstStyle/>
+          <a:p>
+            <a:pPr algn="l">
+              <a:defRPr sz="1300" b="0">
+                <a:solidFill>
+                  <a:srgbClr val="FBBF24"/>
+                </a:solidFill>
+                <a:latin typeface="Calibri"/>
+              </a:defRPr>
+            </a:pPr>
+            <a:r>
+              <a:t>Scanned image</a:t>
+            </a:r>
+          </a:p>
+        </p:txBody>
+      </p:sp>
+      <p:sp>
+        <p:nvSpPr>
+          <p:cNvPr id="23" name="Rounded Rectangle 22"/>
+          <p:cNvSpPr/>
+          <p:nvPr/>
+        </p:nvSpPr>
+        <p:spPr>
+          <a:xfrm>
+            <a:off x="7680960" y="3200400"/>
+            <a:ext cx="4114800" cy="731520"/>
+          </a:xfrm>
+          <a:prstGeom prst="roundRect">
+            <a:avLst/>
+          </a:prstGeom>
+          <a:solidFill>
+            <a:srgbClr val="1A1A4E"/>
+          </a:solidFill>
+          <a:ln>
+            <a:noFill/>
+          </a:ln>
+          <a:effectLst/>
+        </p:spPr>
+        <p:style>
+          <a:lnRef idx="1">
+            <a:schemeClr val="accent1"/>
+          </a:lnRef>
+          <a:fillRef idx="3">
+            <a:schemeClr val="accent1"/>
+          </a:fillRef>
+          <a:effectRef idx="2">
+            <a:schemeClr val="accent1"/>
+          </a:effectRef>
+          <a:fontRef idx="minor">
+            <a:schemeClr val="lt1"/>
+          </a:fontRef>
+        </p:style>
+        <p:txBody>
+          <a:bodyPr rtlCol="0" anchor="ctr"/>
+          <a:lstStyle/>
+          <a:p>
+            <a:pPr algn="ctr"/>
+          </a:p>
+        </p:txBody>
+      </p:sp>
+      <p:sp>
+        <p:nvSpPr>
+          <p:cNvPr id="24" name="TextBox 23"/>
+          <p:cNvSpPr txBox="1"/>
+          <p:nvPr/>
+        </p:nvSpPr>
+        <p:spPr>
+          <a:xfrm>
+            <a:off x="7772400" y="3291840"/>
+            <a:ext cx="3931920" cy="548640"/>
+          </a:xfrm>
+          <a:prstGeom prst="rect">
+            <a:avLst/>
+          </a:prstGeom>
+          <a:noFill/>
+        </p:spPr>
+        <p:txBody>
+          <a:bodyPr wrap="square">
+            <a:spAutoFit/>
+          </a:bodyPr>
+          <a:lstStyle/>
+          <a:p>
+            <a:pPr algn="l">
+              <a:defRPr sz="1300" b="0">
+                <a:solidFill>
+                  <a:srgbClr val="34D399"/>
+                </a:solidFill>
+                <a:latin typeface="Calibri"/>
+              </a:defRPr>
+            </a:pPr>
+            <a:r>
+              <a:t>Use text PDF/DOCX</a:t>
+            </a:r>
+          </a:p>
+        </p:txBody>
+      </p:sp>
+      <p:sp>
+        <p:nvSpPr>
+          <p:cNvPr id="25" name="Rounded Rectangle 24"/>
+          <p:cNvSpPr/>
+          <p:nvPr/>
+        </p:nvSpPr>
+        <p:spPr>
+          <a:xfrm>
+            <a:off x="457200" y="4114800"/>
+            <a:ext cx="3200400" cy="731520"/>
+          </a:xfrm>
+          <a:prstGeom prst="roundRect">
+            <a:avLst/>
+          </a:prstGeom>
+          <a:solidFill>
+            <a:srgbClr val="1A1A4E"/>
+          </a:solidFill>
+          <a:ln>
+            <a:noFill/>
+          </a:ln>
+          <a:effectLst/>
+        </p:spPr>
+        <p:style>
+          <a:lnRef idx="1">
+            <a:schemeClr val="accent1"/>
+          </a:lnRef>
+          <a:fillRef idx="3">
+            <a:schemeClr val="accent1"/>
+          </a:fillRef>
+          <a:effectRef idx="2">
+            <a:schemeClr val="accent1"/>
+          </a:effectRef>
+          <a:fontRef idx="minor">
+            <a:schemeClr val="lt1"/>
+          </a:fontRef>
+        </p:style>
+        <p:txBody>
+          <a:bodyPr rtlCol="0" anchor="ctr"/>
+          <a:lstStyle/>
+          <a:p>
+            <a:pPr algn="ctr"/>
+          </a:p>
+        </p:txBody>
+      </p:sp>
+      <p:sp>
+        <p:nvSpPr>
+          <p:cNvPr id="26" name="TextBox 25"/>
+          <p:cNvSpPr txBox="1"/>
+          <p:nvPr/>
+        </p:nvSpPr>
+        <p:spPr>
+          <a:xfrm>
+            <a:off x="548640" y="4206240"/>
+            <a:ext cx="3017520" cy="548640"/>
+          </a:xfrm>
+          <a:prstGeom prst="rect">
+            <a:avLst/>
+          </a:prstGeom>
+          <a:noFill/>
+        </p:spPr>
+        <p:txBody>
+          <a:bodyPr wrap="square">
+            <a:spAutoFit/>
+          </a:bodyPr>
+          <a:lstStyle/>
+          <a:p>
+            <a:pPr algn="l">
+              <a:defRPr sz="1300" b="1">
+                <a:solidFill>
+                  <a:srgbClr val="F87274"/>
+                </a:solidFill>
+                <a:latin typeface="Calibri"/>
+              </a:defRPr>
+            </a:pPr>
+            <a:r>
+              <a:t>Telegram not send</a:t>
+            </a:r>
+          </a:p>
+        </p:txBody>
+      </p:sp>
+      <p:sp>
+        <p:nvSpPr>
+          <p:cNvPr id="27" name="Rounded Rectangle 26"/>
+          <p:cNvSpPr/>
+          <p:nvPr/>
+        </p:nvSpPr>
+        <p:spPr>
+          <a:xfrm>
+            <a:off x="3840480" y="4114800"/>
+            <a:ext cx="3657600" cy="731520"/>
+          </a:xfrm>
+          <a:prstGeom prst="roundRect">
+            <a:avLst/>
+          </a:prstGeom>
+          <a:solidFill>
+            <a:srgbClr val="1A1A4E"/>
+          </a:solidFill>
+          <a:ln>
+            <a:noFill/>
+          </a:ln>
+          <a:effectLst/>
+        </p:spPr>
+        <p:style>
+          <a:lnRef idx="1">
+            <a:schemeClr val="accent1"/>
+          </a:lnRef>
+          <a:fillRef idx="3">
+            <a:schemeClr val="accent1"/>
+          </a:fillRef>
+          <a:effectRef idx="2">
+            <a:schemeClr val="accent1"/>
+          </a:effectRef>
+          <a:fontRef idx="minor">
+            <a:schemeClr val="lt1"/>
+          </a:fontRef>
+        </p:style>
+        <p:txBody>
+          <a:bodyPr rtlCol="0" anchor="ctr"/>
+          <a:lstStyle/>
+          <a:p>
+            <a:pPr algn="ctr"/>
+          </a:p>
+        </p:txBody>
+      </p:sp>
+      <p:sp>
+        <p:nvSpPr>
+          <p:cNvPr id="28" name="TextBox 27"/>
+          <p:cNvSpPr txBox="1"/>
+          <p:nvPr/>
+        </p:nvSpPr>
+        <p:spPr>
+          <a:xfrm>
+            <a:off x="3931920" y="4206240"/>
+            <a:ext cx="3474720" cy="548640"/>
+          </a:xfrm>
+          <a:prstGeom prst="rect">
+            <a:avLst/>
+          </a:prstGeom>
+          <a:noFill/>
+        </p:spPr>
+        <p:txBody>
+          <a:bodyPr wrap="square">
+            <a:spAutoFit/>
+          </a:bodyPr>
+          <a:lstStyle/>
+          <a:p>
+            <a:pPr algn="l">
+              <a:defRPr sz="1300" b="0">
+                <a:solidFill>
+                  <a:srgbClr val="FBBF24"/>
+                </a:solidFill>
+                <a:latin typeface="Calibri"/>
+              </a:defRPr>
+            </a:pPr>
+            <a:r>
+              <a:t>Bot not in group</a:t>
+            </a:r>
+          </a:p>
+        </p:txBody>
+      </p:sp>
+      <p:sp>
+        <p:nvSpPr>
+          <p:cNvPr id="29" name="Rounded Rectangle 28"/>
+          <p:cNvSpPr/>
+          <p:nvPr/>
+        </p:nvSpPr>
+        <p:spPr>
+          <a:xfrm>
+            <a:off x="7680960" y="4114800"/>
+            <a:ext cx="4114800" cy="731520"/>
+          </a:xfrm>
+          <a:prstGeom prst="roundRect">
+            <a:avLst/>
+          </a:prstGeom>
+          <a:solidFill>
+            <a:srgbClr val="1A1A4E"/>
+          </a:solidFill>
+          <a:ln>
+            <a:noFill/>
+          </a:ln>
+          <a:effectLst/>
+        </p:spPr>
+        <p:style>
+          <a:lnRef idx="1">
+            <a:schemeClr val="accent1"/>
+          </a:lnRef>
+          <a:fillRef idx="3">
+            <a:schemeClr val="accent1"/>
+          </a:fillRef>
+          <a:effectRef idx="2">
+            <a:schemeClr val="accent1"/>
+          </a:effectRef>
+          <a:fontRef idx="minor">
+            <a:schemeClr val="lt1"/>
+          </a:fontRef>
+        </p:style>
+        <p:txBody>
+          <a:bodyPr rtlCol="0" anchor="ctr"/>
+          <a:lstStyle/>
+          <a:p>
+            <a:pPr algn="ctr"/>
+          </a:p>
+        </p:txBody>
+      </p:sp>
+      <p:sp>
+        <p:nvSpPr>
+          <p:cNvPr id="30" name="TextBox 29"/>
+          <p:cNvSpPr txBox="1"/>
+          <p:nvPr/>
+        </p:nvSpPr>
+        <p:spPr>
+          <a:xfrm>
+            <a:off x="7772400" y="4206240"/>
+            <a:ext cx="3931920" cy="548640"/>
+          </a:xfrm>
+          <a:prstGeom prst="rect">
+            <a:avLst/>
+          </a:prstGeom>
+          <a:noFill/>
+        </p:spPr>
+        <p:txBody>
+          <a:bodyPr wrap="square">
+            <a:spAutoFit/>
+          </a:bodyPr>
+          <a:lstStyle/>
+          <a:p>
+            <a:pPr algn="l">
+              <a:defRPr sz="1300" b="0">
+                <a:solidFill>
+                  <a:srgbClr val="34D399"/>
+                </a:solidFill>
+                <a:latin typeface="Calibri"/>
+              </a:defRPr>
+            </a:pPr>
+            <a:r>
+              <a:t>Add &amp; make admin</a:t>
+            </a:r>
+          </a:p>
+        </p:txBody>
+      </p:sp>
+      <p:sp>
+        <p:nvSpPr>
+          <p:cNvPr id="31" name="Rounded Rectangle 30"/>
+          <p:cNvSpPr/>
+          <p:nvPr/>
+        </p:nvSpPr>
+        <p:spPr>
+          <a:xfrm>
+            <a:off x="457200" y="5029200"/>
+            <a:ext cx="3200400" cy="731520"/>
+          </a:xfrm>
+          <a:prstGeom prst="roundRect">
+            <a:avLst/>
+          </a:prstGeom>
+          <a:solidFill>
+            <a:srgbClr val="1A1A4E"/>
+          </a:solidFill>
+          <a:ln>
+            <a:noFill/>
+          </a:ln>
+          <a:effectLst/>
+        </p:spPr>
+        <p:style>
+          <a:lnRef idx="1">
+            <a:schemeClr val="accent1"/>
+          </a:lnRef>
+          <a:fillRef idx="3">
+            <a:schemeClr val="accent1"/>
+          </a:fillRef>
+          <a:effectRef idx="2">
+            <a:schemeClr val="accent1"/>
+          </a:effectRef>
+          <a:fontRef idx="minor">
+            <a:schemeClr val="lt1"/>
+          </a:fontRef>
+        </p:style>
+        <p:txBody>
+          <a:bodyPr rtlCol="0" anchor="ctr"/>
+          <a:lstStyle/>
+          <a:p>
+            <a:pPr algn="ctr"/>
+          </a:p>
+        </p:txBody>
+      </p:sp>
+      <p:sp>
+        <p:nvSpPr>
+          <p:cNvPr id="32" name="TextBox 31"/>
+          <p:cNvSpPr txBox="1"/>
+          <p:nvPr/>
+        </p:nvSpPr>
+        <p:spPr>
+          <a:xfrm>
+            <a:off x="548640" y="5120640"/>
+            <a:ext cx="3017520" cy="548640"/>
+          </a:xfrm>
+          <a:prstGeom prst="rect">
+            <a:avLst/>
+          </a:prstGeom>
+          <a:noFill/>
+        </p:spPr>
+        <p:txBody>
+          <a:bodyPr wrap="square">
+            <a:spAutoFit/>
+          </a:bodyPr>
+          <a:lstStyle/>
+          <a:p>
+            <a:pPr algn="l">
+              <a:defRPr sz="1300" b="1">
+                <a:solidFill>
+                  <a:srgbClr val="F87274"/>
+                </a:solidFill>
+                <a:latin typeface="Calibri"/>
+              </a:defRPr>
+            </a:pPr>
+            <a:r>
+              <a:t>Gemini errors</a:t>
+            </a:r>
+          </a:p>
+        </p:txBody>
+      </p:sp>
+      <p:sp>
+        <p:nvSpPr>
+          <p:cNvPr id="33" name="Rounded Rectangle 32"/>
+          <p:cNvSpPr/>
+          <p:nvPr/>
+        </p:nvSpPr>
+        <p:spPr>
+          <a:xfrm>
+            <a:off x="3840480" y="5029200"/>
+            <a:ext cx="3657600" cy="731520"/>
+          </a:xfrm>
+          <a:prstGeom prst="roundRect">
+            <a:avLst/>
+          </a:prstGeom>
+          <a:solidFill>
+            <a:srgbClr val="1A1A4E"/>
+          </a:solidFill>
+          <a:ln>
+            <a:noFill/>
+          </a:ln>
+          <a:effectLst/>
+        </p:spPr>
+        <p:style>
+          <a:lnRef idx="1">
+            <a:schemeClr val="accent1"/>
+          </a:lnRef>
+          <a:fillRef idx="3">
+            <a:schemeClr val="accent1"/>
+          </a:fillRef>
+          <a:effectRef idx="2">
+            <a:schemeClr val="accent1"/>
+          </a:effectRef>
+          <a:fontRef idx="minor">
+            <a:schemeClr val="lt1"/>
+          </a:fontRef>
+        </p:style>
+        <p:txBody>
+          <a:bodyPr rtlCol="0" anchor="ctr"/>
+          <a:lstStyle/>
+          <a:p>
+            <a:pPr algn="ctr"/>
+          </a:p>
+        </p:txBody>
+      </p:sp>
+      <p:sp>
+        <p:nvSpPr>
+          <p:cNvPr id="34" name="TextBox 33"/>
+          <p:cNvSpPr txBox="1"/>
+          <p:nvPr/>
+        </p:nvSpPr>
+        <p:spPr>
+          <a:xfrm>
+            <a:off x="3931920" y="5120640"/>
+            <a:ext cx="3474720" cy="548640"/>
+          </a:xfrm>
+          <a:prstGeom prst="rect">
+            <a:avLst/>
+          </a:prstGeom>
+          <a:noFill/>
+        </p:spPr>
+        <p:txBody>
+          <a:bodyPr wrap="square">
+            <a:spAutoFit/>
+          </a:bodyPr>
+          <a:lstStyle/>
+          <a:p>
+            <a:pPr algn="l">
+              <a:defRPr sz="1300" b="0">
+                <a:solidFill>
+                  <a:srgbClr val="FBBF24"/>
+                </a:solidFill>
+                <a:latin typeface="Calibri"/>
+              </a:defRPr>
+            </a:pPr>
+            <a:r>
+              <a:t>Rate limit</a:t>
+            </a:r>
+          </a:p>
+        </p:txBody>
+      </p:sp>
+      <p:sp>
+        <p:nvSpPr>
+          <p:cNvPr id="35" name="Rounded Rectangle 34"/>
+          <p:cNvSpPr/>
+          <p:nvPr/>
+        </p:nvSpPr>
+        <p:spPr>
+          <a:xfrm>
+            <a:off x="7680960" y="5029200"/>
+            <a:ext cx="4114800" cy="731520"/>
+          </a:xfrm>
+          <a:prstGeom prst="roundRect">
+            <a:avLst/>
+          </a:prstGeom>
+          <a:solidFill>
+            <a:srgbClr val="1A1A4E"/>
+          </a:solidFill>
+          <a:ln>
+            <a:noFill/>
+          </a:ln>
+          <a:effectLst/>
+        </p:spPr>
+        <p:style>
+          <a:lnRef idx="1">
+            <a:schemeClr val="accent1"/>
+          </a:lnRef>
+          <a:fillRef idx="3">
+            <a:schemeClr val="accent1"/>
+          </a:fillRef>
+          <a:effectRef idx="2">
+            <a:schemeClr val="accent1"/>
+          </a:effectRef>
+          <a:fontRef idx="minor">
+            <a:schemeClr val="lt1"/>
+          </a:fontRef>
+        </p:style>
+        <p:txBody>
+          <a:bodyPr rtlCol="0" anchor="ctr"/>
+          <a:lstStyle/>
+          <a:p>
+            <a:pPr algn="ctr"/>
+          </a:p>
+        </p:txBody>
+      </p:sp>
+      <p:sp>
+        <p:nvSpPr>
+          <p:cNvPr id="36" name="TextBox 35"/>
+          <p:cNvSpPr txBox="1"/>
+          <p:nvPr/>
+        </p:nvSpPr>
+        <p:spPr>
+          <a:xfrm>
+            <a:off x="7772400" y="5120640"/>
+            <a:ext cx="3931920" cy="548640"/>
+          </a:xfrm>
+          <a:prstGeom prst="rect">
+            <a:avLst/>
+          </a:prstGeom>
+          <a:noFill/>
+        </p:spPr>
+        <p:txBody>
+          <a:bodyPr wrap="square">
+            <a:spAutoFit/>
+          </a:bodyPr>
+          <a:lstStyle/>
+          <a:p>
+            <a:pPr algn="l">
+              <a:defRPr sz="1300" b="0">
+                <a:solidFill>
+                  <a:srgbClr val="34D399"/>
+                </a:solidFill>
+                <a:latin typeface="Calibri"/>
+              </a:defRPr>
+            </a:pPr>
+            <a:r>
+              <a:t>Add Wait node</a:t>
+            </a:r>
+          </a:p>
+        </p:txBody>
+      </p:sp>
+    </p:spTree>
+  </p:cSld>
+  <p:clrMapOvr>
+    <a:masterClrMapping/>
+  </p:clrMapOvr>
+</p:sld>
+</file>
+
+<file path=ppt/slides/slide13.xml><?xml version="1.0" encoding="utf-8"?>
+<p:sld xmlns:a="http://schemas.openxmlformats.org/drawingml/2006/main" xmlns:p="http://schemas.openxmlformats.org/presentationml/2006/main" xmlns:r="http://schemas.openxmlformats.org/officeDocument/2006/relationships">
+  <p:cSld>
+    <p:bg>
+      <p:bgPr>
+        <a:solidFill>
+          <a:srgbClr val="0F0C29"/>
+        </a:solidFill>
+        <a:effectLst/>
+      </p:bgPr>
+    </p:bg>
+    <p:spTree>
+      <p:nvGrpSpPr>
+        <p:cNvPr id="1" name=""/>
+        <p:cNvGrpSpPr/>
+        <p:nvPr/>
+      </p:nvGrpSpPr>
+      <p:grpSpPr/>
+      <p:sp>
+        <p:nvSpPr>
           <p:cNvPr id="2" name="TextBox 1"/>
           <p:cNvSpPr txBox="1"/>
           <p:nvPr/>
@@ -6917,7 +7711,7 @@
               </a:defRPr>
             </a:pPr>
             <a:r>
-              <a:t>AI Resume Optimizer - because your resume should work as hard as you do.</a:t>
+              <a:t>AI Resume Optimizer — your resume should work as hard as you do.</a:t>
             </a:r>
           </a:p>
         </p:txBody>
@@ -6953,7 +7747,7 @@
               </a:defRPr>
             </a:pPr>
             <a:r>
-              <a:t>License: MIT - Free to use, modify, and share</a:t>
+              <a:t>License: MIT — Free to use, modify, share</a:t>
             </a:r>
           </a:p>
         </p:txBody>
@@ -7097,7 +7891,7 @@
               </a:defRPr>
             </a:pPr>
             <a:r>
-              <a:t>Built with coffee, too many LaTeX error logs, and a firm belief that your resume should work as hard as you do.</a:t>
+              <a:t>Built with coffee, LaTeX error logs, and belief that your resume should work as hard as you do.</a:t>
             </a:r>
           </a:p>
         </p:txBody>
@@ -7291,7 +8085,7 @@
               </a:defRPr>
             </a:pPr>
             <a:r>
-              <a:t>What does it do? Everything -- fully automatically.</a:t>
+              <a:t>What does it do? Everything — fully automatically.</a:t>
             </a:r>
           </a:p>
         </p:txBody>
@@ -7450,7 +8244,7 @@
               </a:defRPr>
             </a:pPr>
             <a:r>
-              <a:t>Parses PDF/DOCX into structured JSON with multi-role consolidation</a:t>
+              <a:t>Parses PDF/DOCX into structured JSON</a:t>
             </a:r>
           </a:p>
         </p:txBody>
@@ -7566,7 +8360,7 @@
               </a:defRPr>
             </a:pPr>
             <a:r>
-              <a:t>Extracts ATS keywords, domain classification, seniority level</a:t>
+              <a:t>Extracts ATS keywords &amp; priority signals</a:t>
             </a:r>
           </a:p>
         </p:txBody>
@@ -7682,7 +8476,7 @@
               </a:defRPr>
             </a:pPr>
             <a:r>
-              <a:t>Rewrites bullets with action verbs, injects JD keywords naturally</a:t>
+              <a:t>Rewrites bullets with action verbs</a:t>
             </a:r>
           </a:p>
         </p:txBody>
@@ -7798,7 +8592,7 @@
               </a:defRPr>
             </a:pPr>
             <a:r>
-              <a:t>Generates clean pdflatex PDF via free API</a:t>
+              <a:t>Clean PDF via free pdflatex API</a:t>
             </a:r>
           </a:p>
         </p:txBody>
@@ -7914,7 +8708,7 @@
               </a:defRPr>
             </a:pPr>
             <a:r>
-              <a:t>0-100 match score with 3 targeted gap bullets</a:t>
+              <a:t>0-100 match score + gap analysis</a:t>
             </a:r>
           </a:p>
         </p:txBody>
@@ -8030,7 +8824,7 @@
               </a:defRPr>
             </a:pPr>
             <a:r>
-              <a:t>Personalized HTML cover letter, Gmail-compatible</a:t>
+              <a:t>Personalized HTML, Gmail-compatible</a:t>
             </a:r>
           </a:p>
         </p:txBody>
@@ -8146,7 +8940,7 @@
               </a:defRPr>
             </a:pPr>
             <a:r>
-              <a:t>PDF + Cover Letter + ATS Score sent directly to your chat</a:t>
+              <a:t>PDF + Cover Letter + Score in one go</a:t>
             </a:r>
           </a:p>
         </p:txBody>
@@ -8397,7 +9191,7 @@
         <p:spPr>
           <a:xfrm>
             <a:off x="731520" y="1371600"/>
-            <a:ext cx="5029200" cy="457200"/>
+            <a:ext cx="5943600" cy="438912"/>
           </a:xfrm>
           <a:prstGeom prst="roundRect">
             <a:avLst/>
@@ -8441,7 +9235,7 @@
         <p:spPr>
           <a:xfrm>
             <a:off x="914400" y="1417320"/>
-            <a:ext cx="4663440" cy="365760"/>
+            <a:ext cx="5577840" cy="347472"/>
           </a:xfrm>
           <a:prstGeom prst="rect">
             <a:avLst/>
@@ -8463,57 +9257,21 @@
               </a:defRPr>
             </a:pPr>
             <a:r>
-              <a:t>User submits Resume + JD via Web Form</a:t>
-            </a:r>
-          </a:p>
-        </p:txBody>
-      </p:sp>
-      <p:sp>
-        <p:nvSpPr>
-          <p:cNvPr id="9" name="TextBox 8"/>
-          <p:cNvSpPr txBox="1"/>
-          <p:nvPr/>
-        </p:nvSpPr>
-        <p:spPr>
-          <a:xfrm>
-            <a:off x="2926080" y="1783080"/>
-            <a:ext cx="457200" cy="274320"/>
-          </a:xfrm>
-          <a:prstGeom prst="rect">
-            <a:avLst/>
-          </a:prstGeom>
-          <a:noFill/>
-        </p:spPr>
-        <p:txBody>
-          <a:bodyPr wrap="square">
-            <a:spAutoFit/>
-          </a:bodyPr>
-          <a:lstStyle/>
-          <a:p>
-            <a:pPr algn="ctr">
-              <a:defRPr sz="1400" b="0">
-                <a:solidFill>
-                  <a:srgbClr val="9CA3AF"/>
-                </a:solidFill>
-                <a:latin typeface="Calibri"/>
-              </a:defRPr>
-            </a:pPr>
-            <a:r>
-              <a:t>|</a:t>
-            </a:r>
-          </a:p>
-        </p:txBody>
-      </p:sp>
-      <p:sp>
-        <p:nvSpPr>
-          <p:cNvPr id="10" name="Rounded Rectangle 9"/>
+              <a:t>User submits Resume + JD</a:t>
+            </a:r>
+          </a:p>
+        </p:txBody>
+      </p:sp>
+      <p:sp>
+        <p:nvSpPr>
+          <p:cNvPr id="9" name="Rounded Rectangle 8"/>
           <p:cNvSpPr/>
           <p:nvPr/>
         </p:nvSpPr>
         <p:spPr>
           <a:xfrm>
-            <a:off x="731520" y="1920240"/>
-            <a:ext cx="5029200" cy="457200"/>
+            <a:off x="731520" y="1874519"/>
+            <a:ext cx="5943600" cy="438912"/>
           </a:xfrm>
           <a:prstGeom prst="roundRect">
             <a:avLst/>
@@ -8550,14 +9308,14 @@
       </p:sp>
       <p:sp>
         <p:nvSpPr>
-          <p:cNvPr id="11" name="TextBox 10"/>
-          <p:cNvSpPr txBox="1"/>
-          <p:nvPr/>
-        </p:nvSpPr>
-        <p:spPr>
-          <a:xfrm>
-            <a:off x="914400" y="1965960"/>
-            <a:ext cx="4663440" cy="365760"/>
+          <p:cNvPr id="10" name="TextBox 9"/>
+          <p:cNvSpPr txBox="1"/>
+          <p:nvPr/>
+        </p:nvSpPr>
+        <p:spPr>
+          <a:xfrm>
+            <a:off x="914400" y="1920239"/>
+            <a:ext cx="5577840" cy="347472"/>
           </a:xfrm>
           <a:prstGeom prst="rect">
             <a:avLst/>
@@ -8579,57 +9337,21 @@
               </a:defRPr>
             </a:pPr>
             <a:r>
-              <a:t>Extract text from Resume (PDF/DOCX)</a:t>
-            </a:r>
-          </a:p>
-        </p:txBody>
-      </p:sp>
-      <p:sp>
-        <p:nvSpPr>
-          <p:cNvPr id="12" name="TextBox 11"/>
-          <p:cNvSpPr txBox="1"/>
-          <p:nvPr/>
-        </p:nvSpPr>
-        <p:spPr>
-          <a:xfrm>
-            <a:off x="2926080" y="2331720"/>
-            <a:ext cx="457200" cy="274320"/>
-          </a:xfrm>
-          <a:prstGeom prst="rect">
-            <a:avLst/>
-          </a:prstGeom>
-          <a:noFill/>
-        </p:spPr>
-        <p:txBody>
-          <a:bodyPr wrap="square">
-            <a:spAutoFit/>
-          </a:bodyPr>
-          <a:lstStyle/>
-          <a:p>
-            <a:pPr algn="ctr">
-              <a:defRPr sz="1400" b="0">
-                <a:solidFill>
-                  <a:srgbClr val="9CA3AF"/>
-                </a:solidFill>
-                <a:latin typeface="Calibri"/>
-              </a:defRPr>
-            </a:pPr>
-            <a:r>
-              <a:t>|</a:t>
-            </a:r>
-          </a:p>
-        </p:txBody>
-      </p:sp>
-      <p:sp>
-        <p:nvSpPr>
-          <p:cNvPr id="13" name="Rounded Rectangle 12"/>
+              <a:t>Extract from File</a:t>
+            </a:r>
+          </a:p>
+        </p:txBody>
+      </p:sp>
+      <p:sp>
+        <p:nvSpPr>
+          <p:cNvPr id="11" name="Rounded Rectangle 10"/>
           <p:cNvSpPr/>
           <p:nvPr/>
         </p:nvSpPr>
         <p:spPr>
           <a:xfrm>
-            <a:off x="731520" y="2468880"/>
-            <a:ext cx="5029200" cy="457200"/>
+            <a:off x="731520" y="2377440"/>
+            <a:ext cx="5943600" cy="438912"/>
           </a:xfrm>
           <a:prstGeom prst="roundRect">
             <a:avLst/>
@@ -8666,14 +9388,14 @@
       </p:sp>
       <p:sp>
         <p:nvSpPr>
-          <p:cNvPr id="14" name="TextBox 13"/>
-          <p:cNvSpPr txBox="1"/>
-          <p:nvPr/>
-        </p:nvSpPr>
-        <p:spPr>
-          <a:xfrm>
-            <a:off x="914400" y="2514600"/>
-            <a:ext cx="4663440" cy="365760"/>
+          <p:cNvPr id="12" name="TextBox 11"/>
+          <p:cNvSpPr txBox="1"/>
+          <p:nvPr/>
+        </p:nvSpPr>
+        <p:spPr>
+          <a:xfrm>
+            <a:off x="914400" y="2423160"/>
+            <a:ext cx="5577840" cy="347472"/>
           </a:xfrm>
           <a:prstGeom prst="rect">
             <a:avLst/>
@@ -8695,57 +9417,21 @@
               </a:defRPr>
             </a:pPr>
             <a:r>
-              <a:t>AI: Parse Resume to Structured JSON</a:t>
-            </a:r>
-          </a:p>
-        </p:txBody>
-      </p:sp>
-      <p:sp>
-        <p:nvSpPr>
-          <p:cNvPr id="15" name="TextBox 14"/>
-          <p:cNvSpPr txBox="1"/>
-          <p:nvPr/>
-        </p:nvSpPr>
-        <p:spPr>
-          <a:xfrm>
-            <a:off x="2926080" y="2880360"/>
-            <a:ext cx="457200" cy="274320"/>
-          </a:xfrm>
-          <a:prstGeom prst="rect">
-            <a:avLst/>
-          </a:prstGeom>
-          <a:noFill/>
-        </p:spPr>
-        <p:txBody>
-          <a:bodyPr wrap="square">
-            <a:spAutoFit/>
-          </a:bodyPr>
-          <a:lstStyle/>
-          <a:p>
-            <a:pPr algn="ctr">
-              <a:defRPr sz="1400" b="0">
-                <a:solidFill>
-                  <a:srgbClr val="9CA3AF"/>
-                </a:solidFill>
-                <a:latin typeface="Calibri"/>
-              </a:defRPr>
-            </a:pPr>
-            <a:r>
-              <a:t>|</a:t>
-            </a:r>
-          </a:p>
-        </p:txBody>
-      </p:sp>
-      <p:sp>
-        <p:nvSpPr>
-          <p:cNvPr id="16" name="Rounded Rectangle 15"/>
+              <a:t>Resume Parser</a:t>
+            </a:r>
+          </a:p>
+        </p:txBody>
+      </p:sp>
+      <p:sp>
+        <p:nvSpPr>
+          <p:cNvPr id="13" name="Rounded Rectangle 12"/>
           <p:cNvSpPr/>
           <p:nvPr/>
         </p:nvSpPr>
         <p:spPr>
           <a:xfrm>
-            <a:off x="731520" y="3017520"/>
-            <a:ext cx="5029200" cy="457200"/>
+            <a:off x="731520" y="2880360"/>
+            <a:ext cx="5943600" cy="438912"/>
           </a:xfrm>
           <a:prstGeom prst="roundRect">
             <a:avLst/>
@@ -8782,14 +9468,14 @@
       </p:sp>
       <p:sp>
         <p:nvSpPr>
-          <p:cNvPr id="17" name="TextBox 16"/>
-          <p:cNvSpPr txBox="1"/>
-          <p:nvPr/>
-        </p:nvSpPr>
-        <p:spPr>
-          <a:xfrm>
-            <a:off x="914400" y="3063240"/>
-            <a:ext cx="4663440" cy="365760"/>
+          <p:cNvPr id="14" name="TextBox 13"/>
+          <p:cNvSpPr txBox="1"/>
+          <p:nvPr/>
+        </p:nvSpPr>
+        <p:spPr>
+          <a:xfrm>
+            <a:off x="914400" y="2926080"/>
+            <a:ext cx="5577840" cy="347472"/>
           </a:xfrm>
           <a:prstGeom prst="rect">
             <a:avLst/>
@@ -8811,57 +9497,21 @@
               </a:defRPr>
             </a:pPr>
             <a:r>
-              <a:t>AI: Parse JD to Structured JSON</a:t>
-            </a:r>
-          </a:p>
-        </p:txBody>
-      </p:sp>
-      <p:sp>
-        <p:nvSpPr>
-          <p:cNvPr id="18" name="TextBox 17"/>
-          <p:cNvSpPr txBox="1"/>
-          <p:nvPr/>
-        </p:nvSpPr>
-        <p:spPr>
-          <a:xfrm>
-            <a:off x="2926080" y="3429000"/>
-            <a:ext cx="457200" cy="274320"/>
-          </a:xfrm>
-          <a:prstGeom prst="rect">
-            <a:avLst/>
-          </a:prstGeom>
-          <a:noFill/>
-        </p:spPr>
-        <p:txBody>
-          <a:bodyPr wrap="square">
-            <a:spAutoFit/>
-          </a:bodyPr>
-          <a:lstStyle/>
-          <a:p>
-            <a:pPr algn="ctr">
-              <a:defRPr sz="1400" b="0">
-                <a:solidFill>
-                  <a:srgbClr val="9CA3AF"/>
-                </a:solidFill>
-                <a:latin typeface="Calibri"/>
-              </a:defRPr>
-            </a:pPr>
-            <a:r>
-              <a:t>|</a:t>
-            </a:r>
-          </a:p>
-        </p:txBody>
-      </p:sp>
-      <p:sp>
-        <p:nvSpPr>
-          <p:cNvPr id="19" name="Rounded Rectangle 18"/>
+              <a:t>JD Parser</a:t>
+            </a:r>
+          </a:p>
+        </p:txBody>
+      </p:sp>
+      <p:sp>
+        <p:nvSpPr>
+          <p:cNvPr id="15" name="Rounded Rectangle 14"/>
           <p:cNvSpPr/>
           <p:nvPr/>
         </p:nvSpPr>
         <p:spPr>
           <a:xfrm>
-            <a:off x="731520" y="3566160"/>
-            <a:ext cx="5029200" cy="457200"/>
+            <a:off x="731520" y="3383280"/>
+            <a:ext cx="5943600" cy="438912"/>
           </a:xfrm>
           <a:prstGeom prst="roundRect">
             <a:avLst/>
@@ -8898,14 +9548,14 @@
       </p:sp>
       <p:sp>
         <p:nvSpPr>
-          <p:cNvPr id="20" name="TextBox 19"/>
-          <p:cNvSpPr txBox="1"/>
-          <p:nvPr/>
-        </p:nvSpPr>
-        <p:spPr>
-          <a:xfrm>
-            <a:off x="914400" y="3611880"/>
-            <a:ext cx="4663440" cy="365760"/>
+          <p:cNvPr id="16" name="TextBox 15"/>
+          <p:cNvSpPr txBox="1"/>
+          <p:nvPr/>
+        </p:nvSpPr>
+        <p:spPr>
+          <a:xfrm>
+            <a:off x="914400" y="3429000"/>
+            <a:ext cx="5577840" cy="347472"/>
           </a:xfrm>
           <a:prstGeom prst="rect">
             <a:avLst/>
@@ -8927,57 +9577,21 @@
               </a:defRPr>
             </a:pPr>
             <a:r>
-              <a:t>AI: Generate ATS-optimized LaTeX Resume</a:t>
-            </a:r>
-          </a:p>
-        </p:txBody>
-      </p:sp>
-      <p:sp>
-        <p:nvSpPr>
-          <p:cNvPr id="21" name="TextBox 20"/>
-          <p:cNvSpPr txBox="1"/>
-          <p:nvPr/>
-        </p:nvSpPr>
-        <p:spPr>
-          <a:xfrm>
-            <a:off x="2926080" y="3977640"/>
-            <a:ext cx="457200" cy="274320"/>
-          </a:xfrm>
-          <a:prstGeom prst="rect">
-            <a:avLst/>
-          </a:prstGeom>
-          <a:noFill/>
-        </p:spPr>
-        <p:txBody>
-          <a:bodyPr wrap="square">
-            <a:spAutoFit/>
-          </a:bodyPr>
-          <a:lstStyle/>
-          <a:p>
-            <a:pPr algn="ctr">
-              <a:defRPr sz="1400" b="0">
-                <a:solidFill>
-                  <a:srgbClr val="9CA3AF"/>
-                </a:solidFill>
-                <a:latin typeface="Calibri"/>
-              </a:defRPr>
-            </a:pPr>
-            <a:r>
-              <a:t>|</a:t>
-            </a:r>
-          </a:p>
-        </p:txBody>
-      </p:sp>
-      <p:sp>
-        <p:nvSpPr>
-          <p:cNvPr id="22" name="Rounded Rectangle 21"/>
+              <a:t>Merge</a:t>
+            </a:r>
+          </a:p>
+        </p:txBody>
+      </p:sp>
+      <p:sp>
+        <p:nvSpPr>
+          <p:cNvPr id="17" name="Rounded Rectangle 16"/>
           <p:cNvSpPr/>
           <p:nvPr/>
         </p:nvSpPr>
         <p:spPr>
           <a:xfrm>
-            <a:off x="731520" y="4114800"/>
-            <a:ext cx="5029200" cy="457200"/>
+            <a:off x="731520" y="3886200"/>
+            <a:ext cx="5943600" cy="438912"/>
           </a:xfrm>
           <a:prstGeom prst="roundRect">
             <a:avLst/>
@@ -9014,14 +9628,14 @@
       </p:sp>
       <p:sp>
         <p:nvSpPr>
-          <p:cNvPr id="23" name="TextBox 22"/>
-          <p:cNvSpPr txBox="1"/>
-          <p:nvPr/>
-        </p:nvSpPr>
-        <p:spPr>
-          <a:xfrm>
-            <a:off x="914400" y="4160520"/>
-            <a:ext cx="4663440" cy="365760"/>
+          <p:cNvPr id="18" name="TextBox 17"/>
+          <p:cNvSpPr txBox="1"/>
+          <p:nvPr/>
+        </p:nvSpPr>
+        <p:spPr>
+          <a:xfrm>
+            <a:off x="914400" y="3931920"/>
+            <a:ext cx="5577840" cy="347472"/>
           </a:xfrm>
           <a:prstGeom prst="rect">
             <a:avLst/>
@@ -9043,57 +9657,21 @@
               </a:defRPr>
             </a:pPr>
             <a:r>
-              <a:t>Code: Clean and prepare LaTeX</a:t>
-            </a:r>
-          </a:p>
-        </p:txBody>
-      </p:sp>
-      <p:sp>
-        <p:nvSpPr>
-          <p:cNvPr id="24" name="TextBox 23"/>
-          <p:cNvSpPr txBox="1"/>
-          <p:nvPr/>
-        </p:nvSpPr>
-        <p:spPr>
-          <a:xfrm>
-            <a:off x="2926080" y="4526280"/>
-            <a:ext cx="457200" cy="274320"/>
-          </a:xfrm>
-          <a:prstGeom prst="rect">
-            <a:avLst/>
-          </a:prstGeom>
-          <a:noFill/>
-        </p:spPr>
-        <p:txBody>
-          <a:bodyPr wrap="square">
-            <a:spAutoFit/>
-          </a:bodyPr>
-          <a:lstStyle/>
-          <a:p>
-            <a:pPr algn="ctr">
-              <a:defRPr sz="1400" b="0">
-                <a:solidFill>
-                  <a:srgbClr val="9CA3AF"/>
-                </a:solidFill>
-                <a:latin typeface="Calibri"/>
-              </a:defRPr>
-            </a:pPr>
-            <a:r>
-              <a:t>|</a:t>
-            </a:r>
-          </a:p>
-        </p:txBody>
-      </p:sp>
-      <p:sp>
-        <p:nvSpPr>
-          <p:cNvPr id="25" name="Rounded Rectangle 24"/>
+              <a:t>LaTeX Generator</a:t>
+            </a:r>
+          </a:p>
+        </p:txBody>
+      </p:sp>
+      <p:sp>
+        <p:nvSpPr>
+          <p:cNvPr id="19" name="Rounded Rectangle 18"/>
           <p:cNvSpPr/>
           <p:nvPr/>
         </p:nvSpPr>
         <p:spPr>
           <a:xfrm>
-            <a:off x="731520" y="4663440"/>
-            <a:ext cx="5029200" cy="457200"/>
+            <a:off x="731520" y="4389120"/>
+            <a:ext cx="5943600" cy="438912"/>
           </a:xfrm>
           <a:prstGeom prst="roundRect">
             <a:avLst/>
@@ -9130,14 +9708,14 @@
       </p:sp>
       <p:sp>
         <p:nvSpPr>
-          <p:cNvPr id="26" name="TextBox 25"/>
-          <p:cNvSpPr txBox="1"/>
-          <p:nvPr/>
-        </p:nvSpPr>
-        <p:spPr>
-          <a:xfrm>
-            <a:off x="914400" y="4709160"/>
-            <a:ext cx="4663440" cy="365760"/>
+          <p:cNvPr id="20" name="TextBox 19"/>
+          <p:cNvSpPr txBox="1"/>
+          <p:nvPr/>
+        </p:nvSpPr>
+        <p:spPr>
+          <a:xfrm>
+            <a:off x="914400" y="4434840"/>
+            <a:ext cx="5577840" cy="347472"/>
           </a:xfrm>
           <a:prstGeom prst="rect">
             <a:avLst/>
@@ -9159,57 +9737,21 @@
               </a:defRPr>
             </a:pPr>
             <a:r>
-              <a:t>ATS Score Agent + Cover Letter Agent</a:t>
-            </a:r>
-          </a:p>
-        </p:txBody>
-      </p:sp>
-      <p:sp>
-        <p:nvSpPr>
-          <p:cNvPr id="27" name="TextBox 26"/>
-          <p:cNvSpPr txBox="1"/>
-          <p:nvPr/>
-        </p:nvSpPr>
-        <p:spPr>
-          <a:xfrm>
-            <a:off x="2926080" y="5074920"/>
-            <a:ext cx="457200" cy="274320"/>
-          </a:xfrm>
-          <a:prstGeom prst="rect">
-            <a:avLst/>
-          </a:prstGeom>
-          <a:noFill/>
-        </p:spPr>
-        <p:txBody>
-          <a:bodyPr wrap="square">
-            <a:spAutoFit/>
-          </a:bodyPr>
-          <a:lstStyle/>
-          <a:p>
-            <a:pPr algn="ctr">
-              <a:defRPr sz="1400" b="0">
-                <a:solidFill>
-                  <a:srgbClr val="9CA3AF"/>
-                </a:solidFill>
-                <a:latin typeface="Calibri"/>
-              </a:defRPr>
-            </a:pPr>
-            <a:r>
-              <a:t>|</a:t>
-            </a:r>
-          </a:p>
-        </p:txBody>
-      </p:sp>
-      <p:sp>
-        <p:nvSpPr>
-          <p:cNvPr id="28" name="Rounded Rectangle 27"/>
+              <a:t>ATS Score + Cover Letter</a:t>
+            </a:r>
+          </a:p>
+        </p:txBody>
+      </p:sp>
+      <p:sp>
+        <p:nvSpPr>
+          <p:cNvPr id="21" name="Rounded Rectangle 20"/>
           <p:cNvSpPr/>
           <p:nvPr/>
         </p:nvSpPr>
         <p:spPr>
           <a:xfrm>
-            <a:off x="731520" y="5212080"/>
-            <a:ext cx="5029200" cy="457200"/>
+            <a:off x="731520" y="4892040"/>
+            <a:ext cx="5943600" cy="438912"/>
           </a:xfrm>
           <a:prstGeom prst="roundRect">
             <a:avLst/>
@@ -9246,14 +9788,14 @@
       </p:sp>
       <p:sp>
         <p:nvSpPr>
-          <p:cNvPr id="29" name="TextBox 28"/>
-          <p:cNvSpPr txBox="1"/>
-          <p:nvPr/>
-        </p:nvSpPr>
-        <p:spPr>
-          <a:xfrm>
-            <a:off x="914400" y="5257800"/>
-            <a:ext cx="4663440" cy="365760"/>
+          <p:cNvPr id="22" name="TextBox 21"/>
+          <p:cNvSpPr txBox="1"/>
+          <p:nvPr/>
+        </p:nvSpPr>
+        <p:spPr>
+          <a:xfrm>
+            <a:off x="914400" y="4937760"/>
+            <a:ext cx="5577840" cy="347472"/>
           </a:xfrm>
           <a:prstGeom prst="rect">
             <a:avLst/>
@@ -9275,57 +9817,21 @@
               </a:defRPr>
             </a:pPr>
             <a:r>
-              <a:t>Compile LaTeX to PDF (latex.ytotech.com)</a:t>
-            </a:r>
-          </a:p>
-        </p:txBody>
-      </p:sp>
-      <p:sp>
-        <p:nvSpPr>
-          <p:cNvPr id="30" name="TextBox 29"/>
-          <p:cNvSpPr txBox="1"/>
-          <p:nvPr/>
-        </p:nvSpPr>
-        <p:spPr>
-          <a:xfrm>
-            <a:off x="2926080" y="5623560"/>
-            <a:ext cx="457200" cy="274320"/>
-          </a:xfrm>
-          <a:prstGeom prst="rect">
-            <a:avLst/>
-          </a:prstGeom>
-          <a:noFill/>
-        </p:spPr>
-        <p:txBody>
-          <a:bodyPr wrap="square">
-            <a:spAutoFit/>
-          </a:bodyPr>
-          <a:lstStyle/>
-          <a:p>
-            <a:pPr algn="ctr">
-              <a:defRPr sz="1400" b="0">
-                <a:solidFill>
-                  <a:srgbClr val="9CA3AF"/>
-                </a:solidFill>
-                <a:latin typeface="Calibri"/>
-              </a:defRPr>
-            </a:pPr>
-            <a:r>
-              <a:t>|</a:t>
-            </a:r>
-          </a:p>
-        </p:txBody>
-      </p:sp>
-      <p:sp>
-        <p:nvSpPr>
-          <p:cNvPr id="31" name="Rounded Rectangle 30"/>
+              <a:t>Compile PDF</a:t>
+            </a:r>
+          </a:p>
+        </p:txBody>
+      </p:sp>
+      <p:sp>
+        <p:nvSpPr>
+          <p:cNvPr id="23" name="Rounded Rectangle 22"/>
           <p:cNvSpPr/>
           <p:nvPr/>
         </p:nvSpPr>
         <p:spPr>
           <a:xfrm>
-            <a:off x="731520" y="5760720"/>
-            <a:ext cx="5029200" cy="457200"/>
+            <a:off x="731520" y="5394960"/>
+            <a:ext cx="5943600" cy="438912"/>
           </a:xfrm>
           <a:prstGeom prst="roundRect">
             <a:avLst/>
@@ -9362,14 +9868,14 @@
       </p:sp>
       <p:sp>
         <p:nvSpPr>
-          <p:cNvPr id="32" name="TextBox 31"/>
-          <p:cNvSpPr txBox="1"/>
-          <p:nvPr/>
-        </p:nvSpPr>
-        <p:spPr>
-          <a:xfrm>
-            <a:off x="914400" y="5806440"/>
-            <a:ext cx="4663440" cy="365760"/>
+          <p:cNvPr id="24" name="TextBox 23"/>
+          <p:cNvSpPr txBox="1"/>
+          <p:nvPr/>
+        </p:nvSpPr>
+        <p:spPr>
+          <a:xfrm>
+            <a:off x="914400" y="5440680"/>
+            <a:ext cx="5577840" cy="347472"/>
           </a:xfrm>
           <a:prstGeom prst="rect">
             <a:avLst/>
@@ -9391,21 +9897,21 @@
               </a:defRPr>
             </a:pPr>
             <a:r>
-              <a:t>Telegram: Send PDF + Cover Letter + Score</a:t>
-            </a:r>
-          </a:p>
-        </p:txBody>
-      </p:sp>
-      <p:sp>
-        <p:nvSpPr>
-          <p:cNvPr id="33" name="Rounded Rectangle 32"/>
+              <a:t>Telegram Delivery</a:t>
+            </a:r>
+          </a:p>
+        </p:txBody>
+      </p:sp>
+      <p:sp>
+        <p:nvSpPr>
+          <p:cNvPr id="25" name="Rounded Rectangle 24"/>
           <p:cNvSpPr/>
           <p:nvPr/>
         </p:nvSpPr>
         <p:spPr>
           <a:xfrm>
-            <a:off x="6217920" y="1371600"/>
-            <a:ext cx="5486400" cy="5029200"/>
+            <a:off x="7315200" y="1371600"/>
+            <a:ext cx="4572000" cy="5029200"/>
           </a:xfrm>
           <a:prstGeom prst="roundRect">
             <a:avLst/>
@@ -9442,36 +9948,324 @@
       </p:sp>
       <p:sp>
         <p:nvSpPr>
+          <p:cNvPr id="26" name="TextBox 25"/>
+          <p:cNvSpPr txBox="1"/>
+          <p:nvPr/>
+        </p:nvSpPr>
+        <p:spPr>
+          <a:xfrm>
+            <a:off x="7498079" y="1463040"/>
+            <a:ext cx="4114800" cy="365760"/>
+          </a:xfrm>
+          <a:prstGeom prst="rect">
+            <a:avLst/>
+          </a:prstGeom>
+          <a:noFill/>
+        </p:spPr>
+        <p:txBody>
+          <a:bodyPr wrap="square">
+            <a:spAutoFit/>
+          </a:bodyPr>
+          <a:lstStyle/>
+          <a:p>
+            <a:pPr algn="l">
+              <a:defRPr sz="2000" b="1">
+                <a:solidFill>
+                  <a:srgbClr val="FFFFFF"/>
+                </a:solidFill>
+                <a:latin typeface="Calibri"/>
+              </a:defRPr>
+            </a:pPr>
+            <a:r>
+              <a:t>Key Metrics</a:t>
+            </a:r>
+          </a:p>
+        </p:txBody>
+      </p:sp>
+      <p:sp>
+        <p:nvSpPr>
+          <p:cNvPr id="27" name="TextBox 26"/>
+          <p:cNvSpPr txBox="1"/>
+          <p:nvPr/>
+        </p:nvSpPr>
+        <p:spPr>
+          <a:xfrm>
+            <a:off x="7589520" y="2103120"/>
+            <a:ext cx="1828800" cy="274320"/>
+          </a:xfrm>
+          <a:prstGeom prst="rect">
+            <a:avLst/>
+          </a:prstGeom>
+          <a:noFill/>
+        </p:spPr>
+        <p:txBody>
+          <a:bodyPr wrap="square">
+            <a:spAutoFit/>
+          </a:bodyPr>
+          <a:lstStyle/>
+          <a:p>
+            <a:pPr algn="l">
+              <a:defRPr sz="1400" b="1">
+                <a:solidFill>
+                  <a:srgbClr val="A78BFA"/>
+                </a:solidFill>
+                <a:latin typeface="Calibri"/>
+              </a:defRPr>
+            </a:pPr>
+            <a:r>
+              <a:t>Total Nodes</a:t>
+            </a:r>
+          </a:p>
+        </p:txBody>
+      </p:sp>
+      <p:sp>
+        <p:nvSpPr>
+          <p:cNvPr id="28" name="TextBox 27"/>
+          <p:cNvSpPr txBox="1"/>
+          <p:nvPr/>
+        </p:nvSpPr>
+        <p:spPr>
+          <a:xfrm>
+            <a:off x="9601200" y="2103120"/>
+            <a:ext cx="1828800" cy="274320"/>
+          </a:xfrm>
+          <a:prstGeom prst="rect">
+            <a:avLst/>
+          </a:prstGeom>
+          <a:noFill/>
+        </p:spPr>
+        <p:txBody>
+          <a:bodyPr wrap="square">
+            <a:spAutoFit/>
+          </a:bodyPr>
+          <a:lstStyle/>
+          <a:p>
+            <a:pPr algn="l">
+              <a:defRPr sz="1400" b="0">
+                <a:solidFill>
+                  <a:srgbClr val="E0E0E0"/>
+                </a:solidFill>
+                <a:latin typeface="Calibri"/>
+              </a:defRPr>
+            </a:pPr>
+            <a:r>
+              <a:t>13</a:t>
+            </a:r>
+          </a:p>
+        </p:txBody>
+      </p:sp>
+      <p:sp>
+        <p:nvSpPr>
+          <p:cNvPr id="29" name="TextBox 28"/>
+          <p:cNvSpPr txBox="1"/>
+          <p:nvPr/>
+        </p:nvSpPr>
+        <p:spPr>
+          <a:xfrm>
+            <a:off x="7589520" y="2880360"/>
+            <a:ext cx="1828800" cy="274320"/>
+          </a:xfrm>
+          <a:prstGeom prst="rect">
+            <a:avLst/>
+          </a:prstGeom>
+          <a:noFill/>
+        </p:spPr>
+        <p:txBody>
+          <a:bodyPr wrap="square">
+            <a:spAutoFit/>
+          </a:bodyPr>
+          <a:lstStyle/>
+          <a:p>
+            <a:pPr algn="l">
+              <a:defRPr sz="1400" b="1">
+                <a:solidFill>
+                  <a:srgbClr val="A78BFA"/>
+                </a:solidFill>
+                <a:latin typeface="Calibri"/>
+              </a:defRPr>
+            </a:pPr>
+            <a:r>
+              <a:t>AI Agents</a:t>
+            </a:r>
+          </a:p>
+        </p:txBody>
+      </p:sp>
+      <p:sp>
+        <p:nvSpPr>
+          <p:cNvPr id="30" name="TextBox 29"/>
+          <p:cNvSpPr txBox="1"/>
+          <p:nvPr/>
+        </p:nvSpPr>
+        <p:spPr>
+          <a:xfrm>
+            <a:off x="9601200" y="2880360"/>
+            <a:ext cx="1828800" cy="274320"/>
+          </a:xfrm>
+          <a:prstGeom prst="rect">
+            <a:avLst/>
+          </a:prstGeom>
+          <a:noFill/>
+        </p:spPr>
+        <p:txBody>
+          <a:bodyPr wrap="square">
+            <a:spAutoFit/>
+          </a:bodyPr>
+          <a:lstStyle/>
+          <a:p>
+            <a:pPr algn="l">
+              <a:defRPr sz="1400" b="0">
+                <a:solidFill>
+                  <a:srgbClr val="E0E0E0"/>
+                </a:solidFill>
+                <a:latin typeface="Calibri"/>
+              </a:defRPr>
+            </a:pPr>
+            <a:r>
+              <a:t>5</a:t>
+            </a:r>
+          </a:p>
+        </p:txBody>
+      </p:sp>
+      <p:sp>
+        <p:nvSpPr>
+          <p:cNvPr id="31" name="TextBox 30"/>
+          <p:cNvSpPr txBox="1"/>
+          <p:nvPr/>
+        </p:nvSpPr>
+        <p:spPr>
+          <a:xfrm>
+            <a:off x="7589520" y="3657600"/>
+            <a:ext cx="1828800" cy="274320"/>
+          </a:xfrm>
+          <a:prstGeom prst="rect">
+            <a:avLst/>
+          </a:prstGeom>
+          <a:noFill/>
+        </p:spPr>
+        <p:txBody>
+          <a:bodyPr wrap="square">
+            <a:spAutoFit/>
+          </a:bodyPr>
+          <a:lstStyle/>
+          <a:p>
+            <a:pPr algn="l">
+              <a:defRPr sz="1400" b="1">
+                <a:solidFill>
+                  <a:srgbClr val="A78BFA"/>
+                </a:solidFill>
+                <a:latin typeface="Calibri"/>
+              </a:defRPr>
+            </a:pPr>
+            <a:r>
+              <a:t>Code Nodes</a:t>
+            </a:r>
+          </a:p>
+        </p:txBody>
+      </p:sp>
+      <p:sp>
+        <p:nvSpPr>
+          <p:cNvPr id="32" name="TextBox 31"/>
+          <p:cNvSpPr txBox="1"/>
+          <p:nvPr/>
+        </p:nvSpPr>
+        <p:spPr>
+          <a:xfrm>
+            <a:off x="9601200" y="3657600"/>
+            <a:ext cx="1828800" cy="274320"/>
+          </a:xfrm>
+          <a:prstGeom prst="rect">
+            <a:avLst/>
+          </a:prstGeom>
+          <a:noFill/>
+        </p:spPr>
+        <p:txBody>
+          <a:bodyPr wrap="square">
+            <a:spAutoFit/>
+          </a:bodyPr>
+          <a:lstStyle/>
+          <a:p>
+            <a:pPr algn="l">
+              <a:defRPr sz="1400" b="0">
+                <a:solidFill>
+                  <a:srgbClr val="E0E0E0"/>
+                </a:solidFill>
+                <a:latin typeface="Calibri"/>
+              </a:defRPr>
+            </a:pPr>
+            <a:r>
+              <a:t>3</a:t>
+            </a:r>
+          </a:p>
+        </p:txBody>
+      </p:sp>
+      <p:sp>
+        <p:nvSpPr>
+          <p:cNvPr id="33" name="TextBox 32"/>
+          <p:cNvSpPr txBox="1"/>
+          <p:nvPr/>
+        </p:nvSpPr>
+        <p:spPr>
+          <a:xfrm>
+            <a:off x="7589520" y="4434840"/>
+            <a:ext cx="1828800" cy="274320"/>
+          </a:xfrm>
+          <a:prstGeom prst="rect">
+            <a:avLst/>
+          </a:prstGeom>
+          <a:noFill/>
+        </p:spPr>
+        <p:txBody>
+          <a:bodyPr wrap="square">
+            <a:spAutoFit/>
+          </a:bodyPr>
+          <a:lstStyle/>
+          <a:p>
+            <a:pPr algn="l">
+              <a:defRPr sz="1400" b="1">
+                <a:solidFill>
+                  <a:srgbClr val="A78BFA"/>
+                </a:solidFill>
+                <a:latin typeface="Calibri"/>
+              </a:defRPr>
+            </a:pPr>
+            <a:r>
+              <a:t>API Calls</a:t>
+            </a:r>
+          </a:p>
+        </p:txBody>
+      </p:sp>
+      <p:sp>
+        <p:nvSpPr>
           <p:cNvPr id="34" name="TextBox 33"/>
           <p:cNvSpPr txBox="1"/>
           <p:nvPr/>
         </p:nvSpPr>
         <p:spPr>
           <a:xfrm>
-            <a:off x="6400800" y="1463040"/>
-            <a:ext cx="5029200" cy="365760"/>
-          </a:xfrm>
-          <a:prstGeom prst="rect">
-            <a:avLst/>
-          </a:prstGeom>
-          <a:noFill/>
-        </p:spPr>
-        <p:txBody>
-          <a:bodyPr wrap="square">
-            <a:spAutoFit/>
-          </a:bodyPr>
-          <a:lstStyle/>
-          <a:p>
-            <a:pPr algn="l">
-              <a:defRPr sz="2000" b="1">
-                <a:solidFill>
-                  <a:srgbClr val="FFFFFF"/>
-                </a:solidFill>
-                <a:latin typeface="Calibri"/>
-              </a:defRPr>
-            </a:pPr>
-            <a:r>
-              <a:t>Architecture Flow</a:t>
+            <a:off x="9601200" y="4434840"/>
+            <a:ext cx="1828800" cy="274320"/>
+          </a:xfrm>
+          <a:prstGeom prst="rect">
+            <a:avLst/>
+          </a:prstGeom>
+          <a:noFill/>
+        </p:spPr>
+        <p:txBody>
+          <a:bodyPr wrap="square">
+            <a:spAutoFit/>
+          </a:bodyPr>
+          <a:lstStyle/>
+          <a:p>
+            <a:pPr algn="l">
+              <a:defRPr sz="1400" b="0">
+                <a:solidFill>
+                  <a:srgbClr val="E0E0E0"/>
+                </a:solidFill>
+                <a:latin typeface="Calibri"/>
+              </a:defRPr>
+            </a:pPr>
+            <a:r>
+              <a:t>2</a:t>
             </a:r>
           </a:p>
         </p:txBody>
@@ -9484,8 +10278,44 @@
         </p:nvSpPr>
         <p:spPr>
           <a:xfrm>
-            <a:off x="6400800" y="1920240"/>
-            <a:ext cx="5029200" cy="274320"/>
+            <a:off x="7589520" y="5212079"/>
+            <a:ext cx="1828800" cy="274320"/>
+          </a:xfrm>
+          <a:prstGeom prst="rect">
+            <a:avLst/>
+          </a:prstGeom>
+          <a:noFill/>
+        </p:spPr>
+        <p:txBody>
+          <a:bodyPr wrap="square">
+            <a:spAutoFit/>
+          </a:bodyPr>
+          <a:lstStyle/>
+          <a:p>
+            <a:pPr algn="l">
+              <a:defRPr sz="1400" b="1">
+                <a:solidFill>
+                  <a:srgbClr val="A78BFA"/>
+                </a:solidFill>
+                <a:latin typeface="Calibri"/>
+              </a:defRPr>
+            </a:pPr>
+            <a:r>
+              <a:t>Delivery</a:t>
+            </a:r>
+          </a:p>
+        </p:txBody>
+      </p:sp>
+      <p:sp>
+        <p:nvSpPr>
+          <p:cNvPr id="36" name="TextBox 35"/>
+          <p:cNvSpPr txBox="1"/>
+          <p:nvPr/>
+        </p:nvSpPr>
+        <p:spPr>
+          <a:xfrm>
+            <a:off x="9601200" y="5212079"/>
+            <a:ext cx="1828800" cy="274320"/>
           </a:xfrm>
           <a:prstGeom prst="rect">
             <a:avLst/>
@@ -9501,49 +10331,13 @@
             <a:pPr algn="l">
               <a:defRPr sz="1400" b="0">
                 <a:solidFill>
-                  <a:srgbClr val="9CA3AF"/>
-                </a:solidFill>
-                <a:latin typeface="Calibri"/>
-              </a:defRPr>
-            </a:pPr>
-            <a:r>
-              <a:t>How data flows through the workflow:</a:t>
-            </a:r>
-          </a:p>
-        </p:txBody>
-      </p:sp>
-      <p:sp>
-        <p:nvSpPr>
-          <p:cNvPr id="36" name="TextBox 35"/>
-          <p:cNvSpPr txBox="1"/>
-          <p:nvPr/>
-        </p:nvSpPr>
-        <p:spPr>
-          <a:xfrm>
-            <a:off x="6583680" y="2286000"/>
-            <a:ext cx="2286000" cy="274320"/>
-          </a:xfrm>
-          <a:prstGeom prst="rect">
-            <a:avLst/>
-          </a:prstGeom>
-          <a:noFill/>
-        </p:spPr>
-        <p:txBody>
-          <a:bodyPr wrap="square">
-            <a:spAutoFit/>
-          </a:bodyPr>
-          <a:lstStyle/>
-          <a:p>
-            <a:pPr algn="l">
-              <a:defRPr sz="1200" b="1">
-                <a:solidFill>
-                  <a:srgbClr val="667EEA"/>
-                </a:solidFill>
-                <a:latin typeface="Calibri"/>
-              </a:defRPr>
-            </a:pPr>
-            <a:r>
-              <a:t>1. Form Trigger</a:t>
+                  <a:srgbClr val="E0E0E0"/>
+                </a:solidFill>
+                <a:latin typeface="Calibri"/>
+              </a:defRPr>
+            </a:pPr>
+            <a:r>
+              <a:t>Telegram</a:t>
             </a:r>
           </a:p>
         </p:txBody>
@@ -9556,22 +10350,58 @@
         </p:nvSpPr>
         <p:spPr>
           <a:xfrm>
-            <a:off x="8961120" y="2286000"/>
-            <a:ext cx="2468880" cy="274320"/>
-          </a:xfrm>
-          <a:prstGeom prst="rect">
-            <a:avLst/>
-          </a:prstGeom>
-          <a:noFill/>
-        </p:spPr>
-        <p:txBody>
-          <a:bodyPr wrap="square">
-            <a:spAutoFit/>
-          </a:bodyPr>
-          <a:lstStyle/>
-          <a:p>
-            <a:pPr algn="l">
-              <a:defRPr sz="1200" b="0">
+            <a:off x="7589520" y="5989320"/>
+            <a:ext cx="1828800" cy="274320"/>
+          </a:xfrm>
+          <a:prstGeom prst="rect">
+            <a:avLst/>
+          </a:prstGeom>
+          <a:noFill/>
+        </p:spPr>
+        <p:txBody>
+          <a:bodyPr wrap="square">
+            <a:spAutoFit/>
+          </a:bodyPr>
+          <a:lstStyle/>
+          <a:p>
+            <a:pPr algn="l">
+              <a:defRPr sz="1400" b="1">
+                <a:solidFill>
+                  <a:srgbClr val="A78BFA"/>
+                </a:solidFill>
+                <a:latin typeface="Calibri"/>
+              </a:defRPr>
+            </a:pPr>
+            <a:r>
+              <a:t>Avg Time</a:t>
+            </a:r>
+          </a:p>
+        </p:txBody>
+      </p:sp>
+      <p:sp>
+        <p:nvSpPr>
+          <p:cNvPr id="38" name="TextBox 37"/>
+          <p:cNvSpPr txBox="1"/>
+          <p:nvPr/>
+        </p:nvSpPr>
+        <p:spPr>
+          <a:xfrm>
+            <a:off x="9601200" y="5989320"/>
+            <a:ext cx="1828800" cy="274320"/>
+          </a:xfrm>
+          <a:prstGeom prst="rect">
+            <a:avLst/>
+          </a:prstGeom>
+          <a:noFill/>
+        </p:spPr>
+        <p:txBody>
+          <a:bodyPr wrap="square">
+            <a:spAutoFit/>
+          </a:bodyPr>
+          <a:lstStyle/>
+          <a:p>
+            <a:pPr algn="l">
+              <a:defRPr sz="1400" b="0">
                 <a:solidFill>
                   <a:srgbClr val="E0E0E0"/>
                 </a:solidFill>
@@ -9579,439 +10409,7 @@
               </a:defRPr>
             </a:pPr>
             <a:r>
-              <a:t>Collects Resume + JD from user</a:t>
-            </a:r>
-          </a:p>
-        </p:txBody>
-      </p:sp>
-      <p:sp>
-        <p:nvSpPr>
-          <p:cNvPr id="38" name="TextBox 37"/>
-          <p:cNvSpPr txBox="1"/>
-          <p:nvPr/>
-        </p:nvSpPr>
-        <p:spPr>
-          <a:xfrm>
-            <a:off x="6583680" y="2788920"/>
-            <a:ext cx="2286000" cy="274320"/>
-          </a:xfrm>
-          <a:prstGeom prst="rect">
-            <a:avLst/>
-          </a:prstGeom>
-          <a:noFill/>
-        </p:spPr>
-        <p:txBody>
-          <a:bodyPr wrap="square">
-            <a:spAutoFit/>
-          </a:bodyPr>
-          <a:lstStyle/>
-          <a:p>
-            <a:pPr algn="l">
-              <a:defRPr sz="1200" b="1">
-                <a:solidFill>
-                  <a:srgbClr val="667EEA"/>
-                </a:solidFill>
-                <a:latin typeface="Calibri"/>
-              </a:defRPr>
-            </a:pPr>
-            <a:r>
-              <a:t>2. Extract from File</a:t>
-            </a:r>
-          </a:p>
-        </p:txBody>
-      </p:sp>
-      <p:sp>
-        <p:nvSpPr>
-          <p:cNvPr id="39" name="TextBox 38"/>
-          <p:cNvSpPr txBox="1"/>
-          <p:nvPr/>
-        </p:nvSpPr>
-        <p:spPr>
-          <a:xfrm>
-            <a:off x="8961120" y="2788920"/>
-            <a:ext cx="2468880" cy="274320"/>
-          </a:xfrm>
-          <a:prstGeom prst="rect">
-            <a:avLst/>
-          </a:prstGeom>
-          <a:noFill/>
-        </p:spPr>
-        <p:txBody>
-          <a:bodyPr wrap="square">
-            <a:spAutoFit/>
-          </a:bodyPr>
-          <a:lstStyle/>
-          <a:p>
-            <a:pPr algn="l">
-              <a:defRPr sz="1200" b="0">
-                <a:solidFill>
-                  <a:srgbClr val="E0E0E0"/>
-                </a:solidFill>
-                <a:latin typeface="Calibri"/>
-              </a:defRPr>
-            </a:pPr>
-            <a:r>
-              <a:t>PDF/DOCX to Plain Text</a:t>
-            </a:r>
-          </a:p>
-        </p:txBody>
-      </p:sp>
-      <p:sp>
-        <p:nvSpPr>
-          <p:cNvPr id="40" name="TextBox 39"/>
-          <p:cNvSpPr txBox="1"/>
-          <p:nvPr/>
-        </p:nvSpPr>
-        <p:spPr>
-          <a:xfrm>
-            <a:off x="6583680" y="3291840"/>
-            <a:ext cx="2286000" cy="274320"/>
-          </a:xfrm>
-          <a:prstGeom prst="rect">
-            <a:avLst/>
-          </a:prstGeom>
-          <a:noFill/>
-        </p:spPr>
-        <p:txBody>
-          <a:bodyPr wrap="square">
-            <a:spAutoFit/>
-          </a:bodyPr>
-          <a:lstStyle/>
-          <a:p>
-            <a:pPr algn="l">
-              <a:defRPr sz="1200" b="1">
-                <a:solidFill>
-                  <a:srgbClr val="667EEA"/>
-                </a:solidFill>
-                <a:latin typeface="Calibri"/>
-              </a:defRPr>
-            </a:pPr>
-            <a:r>
-              <a:t>3. Resume Extractor</a:t>
-            </a:r>
-          </a:p>
-        </p:txBody>
-      </p:sp>
-      <p:sp>
-        <p:nvSpPr>
-          <p:cNvPr id="41" name="TextBox 40"/>
-          <p:cNvSpPr txBox="1"/>
-          <p:nvPr/>
-        </p:nvSpPr>
-        <p:spPr>
-          <a:xfrm>
-            <a:off x="8961120" y="3291840"/>
-            <a:ext cx="2468880" cy="274320"/>
-          </a:xfrm>
-          <a:prstGeom prst="rect">
-            <a:avLst/>
-          </a:prstGeom>
-          <a:noFill/>
-        </p:spPr>
-        <p:txBody>
-          <a:bodyPr wrap="square">
-            <a:spAutoFit/>
-          </a:bodyPr>
-          <a:lstStyle/>
-          <a:p>
-            <a:pPr algn="l">
-              <a:defRPr sz="1200" b="0">
-                <a:solidFill>
-                  <a:srgbClr val="E0E0E0"/>
-                </a:solidFill>
-                <a:latin typeface="Calibri"/>
-              </a:defRPr>
-            </a:pPr>
-            <a:r>
-              <a:t>Text to Structured JSON</a:t>
-            </a:r>
-          </a:p>
-        </p:txBody>
-      </p:sp>
-      <p:sp>
-        <p:nvSpPr>
-          <p:cNvPr id="42" name="TextBox 41"/>
-          <p:cNvSpPr txBox="1"/>
-          <p:nvPr/>
-        </p:nvSpPr>
-        <p:spPr>
-          <a:xfrm>
-            <a:off x="6583680" y="3794760"/>
-            <a:ext cx="2286000" cy="274320"/>
-          </a:xfrm>
-          <a:prstGeom prst="rect">
-            <a:avLst/>
-          </a:prstGeom>
-          <a:noFill/>
-        </p:spPr>
-        <p:txBody>
-          <a:bodyPr wrap="square">
-            <a:spAutoFit/>
-          </a:bodyPr>
-          <a:lstStyle/>
-          <a:p>
-            <a:pPr algn="l">
-              <a:defRPr sz="1200" b="1">
-                <a:solidFill>
-                  <a:srgbClr val="667EEA"/>
-                </a:solidFill>
-                <a:latin typeface="Calibri"/>
-              </a:defRPr>
-            </a:pPr>
-            <a:r>
-              <a:t>4. JD Extractor</a:t>
-            </a:r>
-          </a:p>
-        </p:txBody>
-      </p:sp>
-      <p:sp>
-        <p:nvSpPr>
-          <p:cNvPr id="43" name="TextBox 42"/>
-          <p:cNvSpPr txBox="1"/>
-          <p:nvPr/>
-        </p:nvSpPr>
-        <p:spPr>
-          <a:xfrm>
-            <a:off x="8961120" y="3794760"/>
-            <a:ext cx="2468880" cy="274320"/>
-          </a:xfrm>
-          <a:prstGeom prst="rect">
-            <a:avLst/>
-          </a:prstGeom>
-          <a:noFill/>
-        </p:spPr>
-        <p:txBody>
-          <a:bodyPr wrap="square">
-            <a:spAutoFit/>
-          </a:bodyPr>
-          <a:lstStyle/>
-          <a:p>
-            <a:pPr algn="l">
-              <a:defRPr sz="1200" b="0">
-                <a:solidFill>
-                  <a:srgbClr val="E0E0E0"/>
-                </a:solidFill>
-                <a:latin typeface="Calibri"/>
-              </a:defRPr>
-            </a:pPr>
-            <a:r>
-              <a:t>JD to Keywords + Priority</a:t>
-            </a:r>
-          </a:p>
-        </p:txBody>
-      </p:sp>
-      <p:sp>
-        <p:nvSpPr>
-          <p:cNvPr id="44" name="TextBox 43"/>
-          <p:cNvSpPr txBox="1"/>
-          <p:nvPr/>
-        </p:nvSpPr>
-        <p:spPr>
-          <a:xfrm>
-            <a:off x="6583680" y="4297680"/>
-            <a:ext cx="2286000" cy="274320"/>
-          </a:xfrm>
-          <a:prstGeom prst="rect">
-            <a:avLst/>
-          </a:prstGeom>
-          <a:noFill/>
-        </p:spPr>
-        <p:txBody>
-          <a:bodyPr wrap="square">
-            <a:spAutoFit/>
-          </a:bodyPr>
-          <a:lstStyle/>
-          <a:p>
-            <a:pPr algn="l">
-              <a:defRPr sz="1200" b="1">
-                <a:solidFill>
-                  <a:srgbClr val="667EEA"/>
-                </a:solidFill>
-                <a:latin typeface="Calibri"/>
-              </a:defRPr>
-            </a:pPr>
-            <a:r>
-              <a:t>5. Merge + LaTeX Gen</a:t>
-            </a:r>
-          </a:p>
-        </p:txBody>
-      </p:sp>
-      <p:sp>
-        <p:nvSpPr>
-          <p:cNvPr id="45" name="TextBox 44"/>
-          <p:cNvSpPr txBox="1"/>
-          <p:nvPr/>
-        </p:nvSpPr>
-        <p:spPr>
-          <a:xfrm>
-            <a:off x="8961120" y="4297680"/>
-            <a:ext cx="2468880" cy="274320"/>
-          </a:xfrm>
-          <a:prstGeom prst="rect">
-            <a:avLst/>
-          </a:prstGeom>
-          <a:noFill/>
-        </p:spPr>
-        <p:txBody>
-          <a:bodyPr wrap="square">
-            <a:spAutoFit/>
-          </a:bodyPr>
-          <a:lstStyle/>
-          <a:p>
-            <a:pPr algn="l">
-              <a:defRPr sz="1200" b="0">
-                <a:solidFill>
-                  <a:srgbClr val="E0E0E0"/>
-                </a:solidFill>
-                <a:latin typeface="Calibri"/>
-              </a:defRPr>
-            </a:pPr>
-            <a:r>
-              <a:t>JSONs to ATS LaTeX</a:t>
-            </a:r>
-          </a:p>
-        </p:txBody>
-      </p:sp>
-      <p:sp>
-        <p:nvSpPr>
-          <p:cNvPr id="46" name="TextBox 45"/>
-          <p:cNvSpPr txBox="1"/>
-          <p:nvPr/>
-        </p:nvSpPr>
-        <p:spPr>
-          <a:xfrm>
-            <a:off x="6583680" y="4800600"/>
-            <a:ext cx="2286000" cy="274320"/>
-          </a:xfrm>
-          <a:prstGeom prst="rect">
-            <a:avLst/>
-          </a:prstGeom>
-          <a:noFill/>
-        </p:spPr>
-        <p:txBody>
-          <a:bodyPr wrap="square">
-            <a:spAutoFit/>
-          </a:bodyPr>
-          <a:lstStyle/>
-          <a:p>
-            <a:pPr algn="l">
-              <a:defRPr sz="1200" b="1">
-                <a:solidFill>
-                  <a:srgbClr val="667EEA"/>
-                </a:solidFill>
-                <a:latin typeface="Calibri"/>
-              </a:defRPr>
-            </a:pPr>
-            <a:r>
-              <a:t>6. ATS Score + Cover Letter</a:t>
-            </a:r>
-          </a:p>
-        </p:txBody>
-      </p:sp>
-      <p:sp>
-        <p:nvSpPr>
-          <p:cNvPr id="47" name="TextBox 46"/>
-          <p:cNvSpPr txBox="1"/>
-          <p:nvPr/>
-        </p:nvSpPr>
-        <p:spPr>
-          <a:xfrm>
-            <a:off x="8961120" y="4800600"/>
-            <a:ext cx="2468880" cy="274320"/>
-          </a:xfrm>
-          <a:prstGeom prst="rect">
-            <a:avLst/>
-          </a:prstGeom>
-          <a:noFill/>
-        </p:spPr>
-        <p:txBody>
-          <a:bodyPr wrap="square">
-            <a:spAutoFit/>
-          </a:bodyPr>
-          <a:lstStyle/>
-          <a:p>
-            <a:pPr algn="l">
-              <a:defRPr sz="1200" b="0">
-                <a:solidFill>
-                  <a:srgbClr val="E0E0E0"/>
-                </a:solidFill>
-                <a:latin typeface="Calibri"/>
-              </a:defRPr>
-            </a:pPr>
-            <a:r>
-              <a:t>Analysis + Writing</a:t>
-            </a:r>
-          </a:p>
-        </p:txBody>
-      </p:sp>
-      <p:sp>
-        <p:nvSpPr>
-          <p:cNvPr id="48" name="TextBox 47"/>
-          <p:cNvSpPr txBox="1"/>
-          <p:nvPr/>
-        </p:nvSpPr>
-        <p:spPr>
-          <a:xfrm>
-            <a:off x="6583680" y="5303520"/>
-            <a:ext cx="2286000" cy="274320"/>
-          </a:xfrm>
-          <a:prstGeom prst="rect">
-            <a:avLst/>
-          </a:prstGeom>
-          <a:noFill/>
-        </p:spPr>
-        <p:txBody>
-          <a:bodyPr wrap="square">
-            <a:spAutoFit/>
-          </a:bodyPr>
-          <a:lstStyle/>
-          <a:p>
-            <a:pPr algn="l">
-              <a:defRPr sz="1200" b="1">
-                <a:solidFill>
-                  <a:srgbClr val="667EEA"/>
-                </a:solidFill>
-                <a:latin typeface="Calibri"/>
-              </a:defRPr>
-            </a:pPr>
-            <a:r>
-              <a:t>7. Compile PDF + Deliver</a:t>
-            </a:r>
-          </a:p>
-        </p:txBody>
-      </p:sp>
-      <p:sp>
-        <p:nvSpPr>
-          <p:cNvPr id="49" name="TextBox 48"/>
-          <p:cNvSpPr txBox="1"/>
-          <p:nvPr/>
-        </p:nvSpPr>
-        <p:spPr>
-          <a:xfrm>
-            <a:off x="8961120" y="5303520"/>
-            <a:ext cx="2468880" cy="274320"/>
-          </a:xfrm>
-          <a:prstGeom prst="rect">
-            <a:avLst/>
-          </a:prstGeom>
-          <a:noFill/>
-        </p:spPr>
-        <p:txBody>
-          <a:bodyPr wrap="square">
-            <a:spAutoFit/>
-          </a:bodyPr>
-          <a:lstStyle/>
-          <a:p>
-            <a:pPr algn="l">
-              <a:defRPr sz="1200" b="0">
-                <a:solidFill>
-                  <a:srgbClr val="E0E0E0"/>
-                </a:solidFill>
-                <a:latin typeface="Calibri"/>
-              </a:defRPr>
-            </a:pPr>
-            <a:r>
-              <a:t>LaTeX to PDF to Telegram</a:t>
+              <a:t>60-90s</a:t>
             </a:r>
           </a:p>
         </p:txBody>
@@ -10205,7 +10603,7 @@
               </a:defRPr>
             </a:pPr>
             <a:r>
-              <a:t>13 nodes working in perfect harmony</a:t>
+              <a:t>13 nodes working in harmony</a:t>
             </a:r>
           </a:p>
         </p:txBody>
@@ -10328,7 +10726,7 @@
               </a:defRPr>
             </a:pPr>
             <a:r>
-              <a:t>1. Resume + JD submitted</a:t>
+              <a:t>1. Resume &amp; JD submitted</a:t>
             </a:r>
           </a:p>
         </p:txBody>
@@ -10400,7 +10798,7 @@
               </a:defRPr>
             </a:pPr>
             <a:r>
-              <a:t>Web form: file upload + JD textarea</a:t>
+              <a:t>Web form: file + JD</a:t>
             </a:r>
           </a:p>
         </p:txBody>
@@ -10552,7 +10950,7 @@
               </a:defRPr>
             </a:pPr>
             <a:r>
-              <a:t>Reads PDF/DOCX to plain text</a:t>
+              <a:t>PDF/DOCX to text</a:t>
             </a:r>
           </a:p>
         </p:txBody>
@@ -10668,7 +11066,7 @@
               </a:defRPr>
             </a:pPr>
             <a:r>
-              <a:t>AI Agent (Gemini/GPT)</a:t>
+              <a:t>AI Agent</a:t>
             </a:r>
           </a:p>
         </p:txBody>
@@ -10704,7 +11102,7 @@
               </a:defRPr>
             </a:pPr>
             <a:r>
-              <a:t>Text to Structured JSON</a:t>
+              <a:t>Text to JSON</a:t>
             </a:r>
           </a:p>
         </p:txBody>
@@ -10820,7 +11218,7 @@
               </a:defRPr>
             </a:pPr>
             <a:r>
-              <a:t>AI Agent (Gemini/GPT)</a:t>
+              <a:t>AI Agent</a:t>
             </a:r>
           </a:p>
         </p:txBody>
@@ -10856,7 +11254,7 @@
               </a:defRPr>
             </a:pPr>
             <a:r>
-              <a:t>JD to Keywords + Priority</a:t>
+              <a:t>JD to keywords</a:t>
             </a:r>
           </a:p>
         </p:txBody>
@@ -10972,7 +11370,7 @@
               </a:defRPr>
             </a:pPr>
             <a:r>
-              <a:t>AI Agent (Gemini/GPT)</a:t>
+              <a:t>AI Agent</a:t>
             </a:r>
           </a:p>
         </p:txBody>
@@ -11008,7 +11406,7 @@
               </a:defRPr>
             </a:pPr>
             <a:r>
-              <a:t>Fills LaTeX skeleton with ATS content</a:t>
+              <a:t>LaTeX ATS content</a:t>
             </a:r>
           </a:p>
         </p:txBody>
@@ -11124,7 +11522,7 @@
               </a:defRPr>
             </a:pPr>
             <a:r>
-              <a:t>Code (JavaScript)</a:t>
+              <a:t>Code (JS)</a:t>
             </a:r>
           </a:p>
         </p:txBody>
@@ -11160,7 +11558,7 @@
               </a:defRPr>
             </a:pPr>
             <a:r>
-              <a:t>Cleans LaTeX, extracts name</a:t>
+              <a:t>Clean LaTeX</a:t>
             </a:r>
           </a:p>
         </p:txBody>
@@ -11312,7 +11710,7 @@
               </a:defRPr>
             </a:pPr>
             <a:r>
-              <a:t>Sends LaTeX to ytotech API</a:t>
+              <a:t>PDF via ytotech</a:t>
             </a:r>
           </a:p>
         </p:txBody>
@@ -11392,7 +11790,7 @@
               </a:defRPr>
             </a:pPr>
             <a:r>
-              <a:t>8. Convert to pdf file</a:t>
+              <a:t>8. Convert to pdf</a:t>
             </a:r>
           </a:p>
         </p:txBody>
@@ -11428,7 +11826,7 @@
               </a:defRPr>
             </a:pPr>
             <a:r>
-              <a:t>Code (JavaScript)</a:t>
+              <a:t>Code (JS)</a:t>
             </a:r>
           </a:p>
         </p:txBody>
@@ -11464,7 +11862,7 @@
               </a:defRPr>
             </a:pPr>
             <a:r>
-              <a:t>Attaches filename metadata</a:t>
+              <a:t>Add filename</a:t>
             </a:r>
           </a:p>
         </p:txBody>
@@ -11580,7 +11978,7 @@
               </a:defRPr>
             </a:pPr>
             <a:r>
-              <a:t>AI Agent (Gemini/GPT)</a:t>
+              <a:t>AI Agent</a:t>
             </a:r>
           </a:p>
         </p:txBody>
@@ -11616,7 +12014,7 @@
               </a:defRPr>
             </a:pPr>
             <a:r>
-              <a:t>0-100 match score + gaps</a:t>
+              <a:t>0-100 score</a:t>
             </a:r>
           </a:p>
         </p:txBody>
@@ -11732,7 +12130,7 @@
               </a:defRPr>
             </a:pPr>
             <a:r>
-              <a:t>AI Agent (Gemini/GPT)</a:t>
+              <a:t>AI Agent</a:t>
             </a:r>
           </a:p>
         </p:txBody>
@@ -11768,7 +12166,7 @@
               </a:defRPr>
             </a:pPr>
             <a:r>
-              <a:t>Personalized HTML cover letter</a:t>
+              <a:t>HTML letter</a:t>
             </a:r>
           </a:p>
         </p:txBody>
@@ -11884,7 +12282,7 @@
               </a:defRPr>
             </a:pPr>
             <a:r>
-              <a:t>Code (JavaScript)</a:t>
+              <a:t>Code (JS)</a:t>
             </a:r>
           </a:p>
         </p:txBody>
@@ -11920,7 +12318,7 @@
               </a:defRPr>
             </a:pPr>
             <a:r>
-              <a:t>Score bar + cover letter HTML</a:t>
+              <a:t>Caption + HTML</a:t>
             </a:r>
           </a:p>
         </p:txBody>
@@ -12000,7 +12398,7 @@
               </a:defRPr>
             </a:pPr>
             <a:r>
-              <a:t>12. Send via Telegram</a:t>
+              <a:t>12. Send resume</a:t>
             </a:r>
           </a:p>
         </p:txBody>
@@ -12072,7 +12470,7 @@
               </a:defRPr>
             </a:pPr>
             <a:r>
-              <a:t>Sends PDF with ATS caption</a:t>
+              <a:t>PDF delivery</a:t>
             </a:r>
           </a:p>
         </p:txBody>
@@ -12224,7 +12622,7 @@
               </a:defRPr>
             </a:pPr>
             <a:r>
-              <a:t>Sends HTML cover letter</a:t>
+              <a:t>HTML delivery</a:t>
             </a:r>
           </a:p>
         </p:txBody>
@@ -12418,7 +12816,7 @@
               </a:defRPr>
             </a:pPr>
             <a:r>
-              <a:t>Multi-provider architecture with fallback</a:t>
+              <a:t>Multi-provider with fallback</a:t>
             </a:r>
           </a:p>
         </p:txBody>
@@ -12541,7 +12939,7 @@
               </a:defRPr>
             </a:pPr>
             <a:r>
-              <a:t>Google Gemini Family</a:t>
+              <a:t>Google Gemini</a:t>
             </a:r>
           </a:p>
         </p:txBody>
@@ -12577,7 +12975,7 @@
               </a:defRPr>
             </a:pPr>
             <a:r>
-              <a:t>models/gemini-2.0-flash-lite-001</a:t>
+              <a:t>gemini-2.0-flash-lite-001</a:t>
             </a:r>
           </a:p>
         </p:txBody>
@@ -12649,7 +13047,7 @@
               </a:defRPr>
             </a:pPr>
             <a:r>
-              <a:t>Parsing</a:t>
+              <a:t>Good</a:t>
             </a:r>
           </a:p>
         </p:txBody>
@@ -12685,7 +13083,7 @@
               </a:defRPr>
             </a:pPr>
             <a:r>
-              <a:t>Resume/JD Parsing</a:t>
+              <a:t>Parsing</a:t>
             </a:r>
           </a:p>
         </p:txBody>
@@ -12721,7 +13119,7 @@
               </a:defRPr>
             </a:pPr>
             <a:r>
-              <a:t>models/gemini-2.5-flash-image</a:t>
+              <a:t>gemini-2.5-flash-image</a:t>
             </a:r>
           </a:p>
         </p:txBody>
@@ -12829,7 +13227,7 @@
               </a:defRPr>
             </a:pPr>
             <a:r>
-              <a:t>Parsing + Reasoning</a:t>
+              <a:t>Parsing + Reason</a:t>
             </a:r>
           </a:p>
         </p:txBody>
@@ -12865,7 +13263,7 @@
               </a:defRPr>
             </a:pPr>
             <a:r>
-              <a:t>models/gemini-3.1-flash-image-preview</a:t>
+              <a:t>gemini-3.1-flash-image-preview</a:t>
             </a:r>
           </a:p>
         </p:txBody>
@@ -12901,7 +13299,7 @@
               </a:defRPr>
             </a:pPr>
             <a:r>
-              <a:t>Medium</a:t>
+              <a:t>Med</a:t>
             </a:r>
           </a:p>
         </p:txBody>
@@ -12973,7 +13371,7 @@
               </a:defRPr>
             </a:pPr>
             <a:r>
-              <a:t>LaTeX Generation</a:t>
+              <a:t>LaTeX Gen</a:t>
             </a:r>
           </a:p>
         </p:txBody>
@@ -13009,7 +13407,7 @@
               </a:defRPr>
             </a:pPr>
             <a:r>
-              <a:t>models/gemini-3-pro-image-preview</a:t>
+              <a:t>gemini-3-pro-image-preview</a:t>
             </a:r>
           </a:p>
         </p:txBody>
@@ -13117,7 +13515,7 @@
               </a:defRPr>
             </a:pPr>
             <a:r>
-              <a:t>ATS Scoring, Cover Letter</a:t>
+              <a:t>ATS + Cover</a:t>
             </a:r>
           </a:p>
         </p:txBody>
@@ -13131,7 +13529,7 @@
         <p:spPr>
           <a:xfrm>
             <a:off x="6217920" y="1371600"/>
-            <a:ext cx="5486400" cy="2743200"/>
+            <a:ext cx="5486400" cy="2286000"/>
           </a:xfrm>
           <a:prstGeom prst="roundRect">
             <a:avLst/>
@@ -13197,7 +13595,7 @@
               </a:defRPr>
             </a:pPr>
             <a:r>
-              <a:t>OpenAI Family</a:t>
+              <a:t>OpenAI</a:t>
             </a:r>
           </a:p>
         </p:txBody>
@@ -13341,7 +13739,7 @@
               </a:defRPr>
             </a:pPr>
             <a:r>
-              <a:t>Fast parsing tasks</a:t>
+              <a:t>Parsing</a:t>
             </a:r>
           </a:p>
         </p:txBody>
@@ -13413,7 +13811,7 @@
               </a:defRPr>
             </a:pPr>
             <a:r>
-              <a:t>Medium</a:t>
+              <a:t>Med</a:t>
             </a:r>
           </a:p>
         </p:txBody>
@@ -13485,7 +13883,7 @@
               </a:defRPr>
             </a:pPr>
             <a:r>
-              <a:t>Advanced generation</a:t>
+              <a:t>Advanced</a:t>
             </a:r>
           </a:p>
         </p:txBody>
@@ -13498,8 +13896,8 @@
         </p:nvSpPr>
         <p:spPr>
           <a:xfrm>
-            <a:off x="6217920" y="4389120"/>
-            <a:ext cx="5486400" cy="2011680"/>
+            <a:off x="6217920" y="3931920"/>
+            <a:ext cx="5486400" cy="2468880"/>
           </a:xfrm>
           <a:prstGeom prst="roundRect">
             <a:avLst/>
@@ -13542,43 +13940,43 @@
         </p:nvSpPr>
         <p:spPr>
           <a:xfrm>
+            <a:off x="6400800" y="4023360"/>
+            <a:ext cx="5029200" cy="365760"/>
+          </a:xfrm>
+          <a:prstGeom prst="rect">
+            <a:avLst/>
+          </a:prstGeom>
+          <a:noFill/>
+        </p:spPr>
+        <p:txBody>
+          <a:bodyPr wrap="square">
+            <a:spAutoFit/>
+          </a:bodyPr>
+          <a:lstStyle/>
+          <a:p>
+            <a:pPr algn="l">
+              <a:defRPr sz="2200" b="1">
+                <a:solidFill>
+                  <a:srgbClr val="FFFFFF"/>
+                </a:solidFill>
+                <a:latin typeface="Calibri"/>
+              </a:defRPr>
+            </a:pPr>
+            <a:r>
+              <a:t>OpenRouter</a:t>
+            </a:r>
+          </a:p>
+        </p:txBody>
+      </p:sp>
+      <p:sp>
+        <p:nvSpPr>
+          <p:cNvPr id="37" name="TextBox 36"/>
+          <p:cNvSpPr txBox="1"/>
+          <p:nvPr/>
+        </p:nvSpPr>
+        <p:spPr>
+          <a:xfrm>
             <a:off x="6400800" y="4480560"/>
-            <a:ext cx="5029200" cy="365760"/>
-          </a:xfrm>
-          <a:prstGeom prst="rect">
-            <a:avLst/>
-          </a:prstGeom>
-          <a:noFill/>
-        </p:spPr>
-        <p:txBody>
-          <a:bodyPr wrap="square">
-            <a:spAutoFit/>
-          </a:bodyPr>
-          <a:lstStyle/>
-          <a:p>
-            <a:pPr algn="l">
-              <a:defRPr sz="2200" b="1">
-                <a:solidFill>
-                  <a:srgbClr val="FFFFFF"/>
-                </a:solidFill>
-                <a:latin typeface="Calibri"/>
-              </a:defRPr>
-            </a:pPr>
-            <a:r>
-              <a:t>OpenRouter</a:t>
-            </a:r>
-          </a:p>
-        </p:txBody>
-      </p:sp>
-      <p:sp>
-        <p:nvSpPr>
-          <p:cNvPr id="37" name="TextBox 36"/>
-          <p:cNvSpPr txBox="1"/>
-          <p:nvPr/>
-        </p:nvSpPr>
-        <p:spPr>
-          <a:xfrm>
-            <a:off x="6400800" y="4937760"/>
             <a:ext cx="5029200" cy="1097280"/>
           </a:xfrm>
           <a:prstGeom prst="rect">
@@ -13602,6 +14000,11 @@
             </a:pPr>
             <a:r>
               <a:t>Auto-routes to best available model. Seamless fallback across providers.</a:t>
+            </a:r>
+            <a:br/>
+            <a:br/>
+            <a:r>
+              <a:t>Models listed in config.json. Update node parameters to switch.</a:t>
             </a:r>
           </a:p>
         </p:txBody>
@@ -13932,7 +14335,7 @@
         <p:spPr>
           <a:xfrm>
             <a:off x="640080" y="2011680"/>
-            <a:ext cx="2743200" cy="274320"/>
+            <a:ext cx="2286000" cy="274320"/>
           </a:xfrm>
           <a:prstGeom prst="rect">
             <a:avLst/>
@@ -13967,7 +14370,7 @@
         </p:nvSpPr>
         <p:spPr>
           <a:xfrm>
-            <a:off x="3474720" y="2011680"/>
+            <a:off x="3017520" y="2011680"/>
             <a:ext cx="914400" cy="274320"/>
           </a:xfrm>
           <a:prstGeom prst="rect">
@@ -14026,7 +14429,7 @@
               </a:defRPr>
             </a:pPr>
             <a:r>
-              <a:t>High-priority JD keywords found in resume</a:t>
+              <a:t>High-priority keywords found</a:t>
             </a:r>
           </a:p>
         </p:txBody>
@@ -14040,7 +14443,7 @@
         <p:spPr>
           <a:xfrm>
             <a:off x="640080" y="3017520"/>
-            <a:ext cx="2743200" cy="274320"/>
+            <a:ext cx="2286000" cy="274320"/>
           </a:xfrm>
           <a:prstGeom prst="rect">
             <a:avLst/>
@@ -14075,7 +14478,7 @@
         </p:nvSpPr>
         <p:spPr>
           <a:xfrm>
-            <a:off x="3474720" y="3017520"/>
+            <a:off x="3017520" y="3017520"/>
             <a:ext cx="914400" cy="274320"/>
           </a:xfrm>
           <a:prstGeom prst="rect">
@@ -14134,7 +14537,7 @@
               </a:defRPr>
             </a:pPr>
             <a:r>
-              <a:t>Must-have skills present in resume</a:t>
+              <a:t>Must-have skills present</a:t>
             </a:r>
           </a:p>
         </p:txBody>
@@ -14148,7 +14551,7 @@
         <p:spPr>
           <a:xfrm>
             <a:off x="640080" y="4023360"/>
-            <a:ext cx="2743200" cy="274320"/>
+            <a:ext cx="2286000" cy="274320"/>
           </a:xfrm>
           <a:prstGeom prst="rect">
             <a:avLst/>
@@ -14183,7 +14586,7 @@
         </p:nvSpPr>
         <p:spPr>
           <a:xfrm>
-            <a:off x="3474720" y="4023360"/>
+            <a:off x="3017520" y="4023360"/>
             <a:ext cx="914400" cy="274320"/>
           </a:xfrm>
           <a:prstGeom prst="rect">
@@ -14242,7 +14645,7 @@
               </a:defRPr>
             </a:pPr>
             <a:r>
-              <a:t>Years of experience + domain match</a:t>
+              <a:t>Years + domain match</a:t>
             </a:r>
           </a:p>
         </p:txBody>
@@ -14256,7 +14659,7 @@
         <p:spPr>
           <a:xfrm>
             <a:off x="640080" y="5029200"/>
-            <a:ext cx="2743200" cy="274320"/>
+            <a:ext cx="2286000" cy="274320"/>
           </a:xfrm>
           <a:prstGeom prst="rect">
             <a:avLst/>
@@ -14278,7 +14681,7 @@
               </a:defRPr>
             </a:pPr>
             <a:r>
-              <a:t>Role Title Alignment</a:t>
+              <a:t>Role Title Match</a:t>
             </a:r>
           </a:p>
         </p:txBody>
@@ -14291,7 +14694,7 @@
         </p:nvSpPr>
         <p:spPr>
           <a:xfrm>
-            <a:off x="3474720" y="5029200"/>
+            <a:off x="3017520" y="5029200"/>
             <a:ext cx="914400" cy="274320"/>
           </a:xfrm>
           <a:prstGeom prst="rect">
@@ -14350,7 +14753,7 @@
               </a:defRPr>
             </a:pPr>
             <a:r>
-              <a:t>Seniority and role type match</a:t>
+              <a:t>Seniority alignment</a:t>
             </a:r>
           </a:p>
         </p:txBody>
@@ -14538,7 +14941,7 @@
               </a:defRPr>
             </a:pPr>
             <a:r>
-              <a:t>Recruiter-ready resume</a:t>
+              <a:t>Recruiter-ready</a:t>
             </a:r>
           </a:p>
         </p:txBody>
@@ -14646,7 +15049,7 @@
               </a:defRPr>
             </a:pPr>
             <a:r>
-              <a:t>Minor adjustments needed</a:t>
+              <a:t>Minor fixes</a:t>
             </a:r>
           </a:p>
         </p:txBody>
@@ -14718,7 +15121,7 @@
               </a:defRPr>
             </a:pPr>
             <a:r>
-              <a:t>Moderate Match</a:t>
+              <a:t>Moderate</a:t>
             </a:r>
           </a:p>
         </p:txBody>
@@ -14754,7 +15157,7 @@
               </a:defRPr>
             </a:pPr>
             <a:r>
-              <a:t>Significant improvements needed</a:t>
+              <a:t>Improve needed</a:t>
             </a:r>
           </a:p>
         </p:txBody>
@@ -14826,7 +15229,7 @@
               </a:defRPr>
             </a:pPr>
             <a:r>
-              <a:t>Weak Match</a:t>
+              <a:t>Weak</a:t>
             </a:r>
           </a:p>
         </p:txBody>
@@ -14862,7 +15265,7 @@
               </a:defRPr>
             </a:pPr>
             <a:r>
-              <a:t>Major overhaul recommended</a:t>
+              <a:t>Overhaul needed</a:t>
             </a:r>
           </a:p>
         </p:txBody>
@@ -15056,7 +15459,7 @@
               </a:defRPr>
             </a:pPr>
             <a:r>
-              <a:t>5-paragraph HTML cover letters - Gmail-ready</a:t>
+              <a:t>5-paragraph HTML cover letters — Gmail-ready</a:t>
             </a:r>
           </a:p>
         </p:txBody>
@@ -15251,7 +15654,7 @@
               </a:defRPr>
             </a:pPr>
             <a:r>
-              <a:t>Grab attention with company/role reference</a:t>
+              <a:t>Company/role reference</a:t>
             </a:r>
           </a:p>
         </p:txBody>
@@ -15367,7 +15770,7 @@
               </a:defRPr>
             </a:pPr>
             <a:r>
-              <a:t>Show research using JD intelligence</a:t>
+              <a:t>Show research</a:t>
             </a:r>
           </a:p>
         </p:txBody>
@@ -15447,7 +15850,7 @@
               </a:defRPr>
             </a:pPr>
             <a:r>
-              <a:t>3. Key Achievements</a:t>
+              <a:t>3. Achievements</a:t>
             </a:r>
           </a:p>
         </p:txBody>
@@ -15483,7 +15886,7 @@
               </a:defRPr>
             </a:pPr>
             <a:r>
-              <a:t>2-3 quantified wins from resume</a:t>
+              <a:t>2-3 quantified wins</a:t>
             </a:r>
           </a:p>
         </p:txBody>
@@ -15563,7 +15966,7 @@
               </a:defRPr>
             </a:pPr>
             <a:r>
-              <a:t>4. Addressing Gaps</a:t>
+              <a:t>4. Address Gaps</a:t>
             </a:r>
           </a:p>
         </p:txBody>
@@ -15599,7 +16002,7 @@
               </a:defRPr>
             </a:pPr>
             <a:r>
-              <a:t>Skill gap as learning narrative</a:t>
+              <a:t>Learning narrative</a:t>
             </a:r>
           </a:p>
         </p:txBody>
@@ -15715,7 +16118,7 @@
               </a:defRPr>
             </a:pPr>
             <a:r>
-              <a:t>Confident, action-oriented closing</a:t>
+              <a:t>Action-oriented</a:t>
             </a:r>
           </a:p>
         </p:txBody>
@@ -15751,7 +16154,7 @@
               </a:defRPr>
             </a:pPr>
             <a:r>
-              <a:t>Strict Rules</a:t>
+              <a:t>Rules</a:t>
             </a:r>
           </a:p>
         </p:txBody>
@@ -15787,7 +16190,7 @@
               </a:defRPr>
             </a:pPr>
             <a:r>
-              <a:t>Use ONLY real data from Resume JSON -- never hallucinate</a:t>
+              <a:t>Real data only — never hallucinate</a:t>
             </a:r>
           </a:p>
         </p:txBody>
@@ -15823,7 +16226,7 @@
               </a:defRPr>
             </a:pPr>
             <a:r>
-              <a:t>Keep total length to 300-380 words</a:t>
+              <a:t>300-380 words, no cliches</a:t>
             </a:r>
           </a:p>
         </p:txBody>
@@ -15859,7 +16262,7 @@
               </a:defRPr>
             </a:pPr>
             <a:r>
-              <a:t>No cliches: I am writing to apply, passion for, team player, go-getter</a:t>
+              <a:t>Georgia serif, 700px, inline CSS</a:t>
             </a:r>
           </a:p>
         </p:txBody>
@@ -15895,43 +16298,7 @@
               </a:defRPr>
             </a:pPr>
             <a:r>
-              <a:t>Professional font: Georgia, serif - Max width: 700px - Centered layout</a:t>
-            </a:r>
-          </a:p>
-        </p:txBody>
-      </p:sp>
-      <p:sp>
-        <p:nvSpPr>
-          <p:cNvPr id="28" name="TextBox 27"/>
-          <p:cNvSpPr txBox="1"/>
-          <p:nvPr/>
-        </p:nvSpPr>
-        <p:spPr>
-          <a:xfrm>
-            <a:off x="640080" y="6126480"/>
-            <a:ext cx="10058400" cy="365760"/>
-          </a:xfrm>
-          <a:prstGeom prst="rect">
-            <a:avLst/>
-          </a:prstGeom>
-          <a:noFill/>
-        </p:spPr>
-        <p:txBody>
-          <a:bodyPr wrap="square">
-            <a:spAutoFit/>
-          </a:bodyPr>
-          <a:lstStyle/>
-          <a:p>
-            <a:pPr algn="l">
-              <a:defRPr sz="1400" b="0">
-                <a:solidFill>
-                  <a:srgbClr val="E0E0E0"/>
-                </a:solidFill>
-                <a:latin typeface="Calibri"/>
-              </a:defRPr>
-            </a:pPr>
-            <a:r>
-              <a:t>Self-contained HTML with inline CSS -- works in Gmail and all email clients</a:t>
+              <a:t>Gmail-compatible HTML</a:t>
             </a:r>
           </a:p>
         </p:txBody>
@@ -16089,7 +16456,7 @@
               </a:defRPr>
             </a:pPr>
             <a:r>
-              <a:t>How the AI Optimization Works</a:t>
+              <a:t>AI Optimization Pipeline</a:t>
             </a:r>
           </a:p>
         </p:txBody>
@@ -16125,7 +16492,7 @@
               </a:defRPr>
             </a:pPr>
             <a:r>
-              <a:t>Three-stage intelligence pipeline</a:t>
+              <a:t>Three-stage intelligence</a:t>
             </a:r>
           </a:p>
         </p:txBody>
@@ -16248,7 +16615,7 @@
               </a:defRPr>
             </a:pPr>
             <a:r>
-              <a:t>Stage 1 - Resume Intelligence</a:t>
+              <a:t>Stage 1 — Resume Intelligence</a:t>
             </a:r>
           </a:p>
         </p:txBody>
@@ -16284,7 +16651,7 @@
               </a:defRPr>
             </a:pPr>
             <a:r>
-              <a:t>Consolidates multi-role employment histories</a:t>
+              <a:t>Multi-role consolidation</a:t>
             </a:r>
           </a:p>
         </p:txBody>
@@ -16320,7 +16687,7 @@
               </a:defRPr>
             </a:pPr>
             <a:r>
-              <a:t>Maps projects to employers by date alignment</a:t>
+              <a:t>Project mapping by date</a:t>
             </a:r>
           </a:p>
         </p:txBody>
@@ -16356,7 +16723,7 @@
               </a:defRPr>
             </a:pPr>
             <a:r>
-              <a:t>Reassembles fragmented two-column layouts</a:t>
+              <a:t>Two-column reassembly</a:t>
             </a:r>
           </a:p>
         </p:txBody>
@@ -16392,7 +16759,7 @@
               </a:defRPr>
             </a:pPr>
             <a:r>
-              <a:t>Standardizes date formats</a:t>
+              <a:t>Date standardization</a:t>
             </a:r>
           </a:p>
         </p:txBody>
@@ -16428,7 +16795,7 @@
               </a:defRPr>
             </a:pPr>
             <a:r>
-              <a:t>Strict anti-hallucination rules</a:t>
+              <a:t>Anti-hallucination</a:t>
             </a:r>
           </a:p>
         </p:txBody>
@@ -16508,7 +16875,7 @@
               </a:defRPr>
             </a:pPr>
             <a:r>
-              <a:t>Stage 2 - JD Intelligence</a:t>
+              <a:t>Stage 2 — JD Intelligence</a:t>
             </a:r>
           </a:p>
         </p:txBody>
@@ -16544,7 +16911,7 @@
               </a:defRPr>
             </a:pPr>
             <a:r>
-              <a:t>Detect-only analysis - no inference or bias</a:t>
+              <a:t>Detect-only analysis</a:t>
             </a:r>
           </a:p>
         </p:txBody>
@@ -16580,7 +16947,7 @@
               </a:defRPr>
             </a:pPr>
             <a:r>
-              <a:t>Classifies domain into 15 categories</a:t>
+              <a:t>15 domain categories</a:t>
             </a:r>
           </a:p>
         </p:txBody>
@@ -16616,7 +16983,7 @@
               </a:defRPr>
             </a:pPr>
             <a:r>
-              <a:t>Identifies must-have vs. good-to-have skills</a:t>
+              <a:t>Must vs good-to-have</a:t>
             </a:r>
           </a:p>
         </p:txBody>
@@ -16652,7 +17019,7 @@
               </a:defRPr>
             </a:pPr>
             <a:r>
-              <a:t>Maps responsibility types</a:t>
+              <a:t>Responsibility mapping</a:t>
             </a:r>
           </a:p>
         </p:txBody>
@@ -16688,7 +17055,7 @@
               </a:defRPr>
             </a:pPr>
             <a:r>
-              <a:t>Generates placement strategy</a:t>
+              <a:t>Placement strategy</a:t>
             </a:r>
           </a:p>
         </p:txBody>
@@ -16768,7 +17135,7 @@
               </a:defRPr>
             </a:pPr>
             <a:r>
-              <a:t>Stage 3 - ATS-Optimized Generation</a:t>
+              <a:t>Stage 3 — ATS Generation</a:t>
             </a:r>
           </a:p>
         </p:txBody>
@@ -16804,7 +17171,7 @@
               </a:defRPr>
             </a:pPr>
             <a:r>
-              <a:t>Rewrites bullets with strong action verbs</a:t>
+              <a:t>Action verb rewriting</a:t>
             </a:r>
           </a:p>
         </p:txBody>
@@ -16840,7 +17207,7 @@
               </a:defRPr>
             </a:pPr>
             <a:r>
-              <a:t>Injects JD keywords naturally</a:t>
+              <a:t>Natural keyword injection</a:t>
             </a:r>
           </a:p>
         </p:txBody>
@@ -16876,7 +17243,7 @@
               </a:defRPr>
             </a:pPr>
             <a:r>
-              <a:t>Reorders skills by JD priority</a:t>
+              <a:t>Priority skill ordering</a:t>
             </a:r>
           </a:p>
         </p:txBody>
@@ -16912,7 +17279,7 @@
               </a:defRPr>
             </a:pPr>
             <a:r>
-              <a:t>Outputs clean, compilable LaTeX</a:t>
+              <a:t>Clean LaTeX output</a:t>
             </a:r>
           </a:p>
         </p:txBody>
@@ -16948,7 +17315,7 @@
               </a:defRPr>
             </a:pPr>
             <a:r>
-              <a:t>All brackets properly balanced</a:t>
+              <a:t>Balanced brackets</a:t>
             </a:r>
           </a:p>
         </p:txBody>
@@ -17106,7 +17473,7 @@
               </a:defRPr>
             </a:pPr>
             <a:r>
-              <a:t>Setup and Configuration</a:t>
+              <a:t>Setup &amp; Configuration</a:t>
             </a:r>
           </a:p>
         </p:txBody>
@@ -17142,7 +17509,7 @@
               </a:defRPr>
             </a:pPr>
             <a:r>
-              <a:t>5 steps from zero to generating resumes</a:t>
+              <a:t>5 steps to get started</a:t>
             </a:r>
           </a:p>
         </p:txBody>
@@ -17301,11 +17668,11 @@
               </a:defRPr>
             </a:pPr>
             <a:r>
-              <a:t>Workflows -&gt; Import</a:t>
+              <a:t>Workflows &gt; Import</a:t>
             </a:r>
             <a:br/>
             <a:r>
-              <a:t>Upload the .json file</a:t>
+              <a:t>Upload .json</a:t>
             </a:r>
           </a:p>
         </p:txBody>
@@ -17341,7 +17708,7 @@
               </a:defRPr>
             </a:pPr>
             <a:r>
-              <a:t>All nodes pre-configured</a:t>
+              <a:t>Pre-configured</a:t>
             </a:r>
           </a:p>
         </p:txBody>
@@ -17457,11 +17824,11 @@
               </a:defRPr>
             </a:pPr>
             <a:r>
-              <a:t>Add Google PaLM API (Gemini)</a:t>
+              <a:t>Add Gemini + OpenAI</a:t>
             </a:r>
             <a:br/>
             <a:r>
-              <a:t>+ OpenAI API key</a:t>
+              <a:t>API keys</a:t>
             </a:r>
           </a:p>
         </p:txBody>
@@ -17497,7 +17864,7 @@
               </a:defRPr>
             </a:pPr>
             <a:r>
-              <a:t>Link to AI model nodes</a:t>
+              <a:t>Link to nodes</a:t>
             </a:r>
           </a:p>
         </p:txBody>
@@ -17613,11 +17980,11 @@
               </a:defRPr>
             </a:pPr>
             <a:r>
-              <a:t>Use @BotFather -&gt; /newbot</a:t>
+              <a:t>@BotFather &gt; /newbot</a:t>
             </a:r>
             <a:br/>
             <a:r>
-              <a:t>Copy bot token</a:t>
+              <a:t>Copy token</a:t>
             </a:r>
           </a:p>
         </p:txBody>
@@ -17653,7 +18020,7 @@
               </a:defRPr>
             </a:pPr>
             <a:r>
-              <a:t>Add Telegram credential</a:t>
+              <a:t>Add credential</a:t>
             </a:r>
           </a:p>
         </p:txBody>
@@ -17769,11 +18136,11 @@
               </a:defRPr>
             </a:pPr>
             <a:r>
-              <a:t>Message bot -&gt; api.telegram.org</a:t>
+              <a:t>Message bot &gt; getUpdates</a:t>
             </a:r>
             <a:br/>
             <a:r>
-              <a:t>/bot&lt;TOKEN&gt;/getUpdates</a:t>
+              <a:t>Find chat.id</a:t>
             </a:r>
           </a:p>
         </p:txBody>
@@ -17809,7 +18176,7 @@
               </a:defRPr>
             </a:pPr>
             <a:r>
-              <a:t>Find chat.id value</a:t>
+              <a:t>Set in nodes</a:t>
             </a:r>
           </a:p>
         </p:txBody>
@@ -17925,11 +18292,11 @@
               </a:defRPr>
             </a:pPr>
             <a:r>
-              <a:t>Toggle Active -&gt; Copy</a:t>
+              <a:t>Toggle Active</a:t>
             </a:r>
             <a:br/>
             <a:r>
-              <a:t>Production URL</a:t>
+              <a:t>Copy form URL</a:t>
             </a:r>
           </a:p>
         </p:txBody>
@@ -17965,7 +18332,7 @@
               </a:defRPr>
             </a:pPr>
             <a:r>
-              <a:t>Share with anyone!</a:t>
+              <a:t>Share!</a:t>
             </a:r>
           </a:p>
         </p:txBody>
@@ -18037,7 +18404,7 @@
               </a:defRPr>
             </a:pPr>
             <a:r>
-              <a:t>n8n v2.14+  |  Google Gemini API key (free)  |  OpenAI API key (optional)  |  Telegram Bot  |  Internet access to latex.ytotech.com</a:t>
+              <a:t>n8n v2.14+  |  Gemini API (free)  |  OpenAI API (optional)  |  Telegram Bot  |  Internet</a:t>
             </a:r>
           </a:p>
         </p:txBody>

--- a/AI_Resume_Optimizer_Presentation.pptx
+++ b/AI_Resume_Optimizer_Presentation.pptx
@@ -3912,7 +3912,7 @@
               </a:defRPr>
             </a:pPr>
             <a:r>
-              <a:t>Deployment Guide</a:t>
+              <a:t>Deployment (Cloudflare Tunnel)</a:t>
             </a:r>
           </a:p>
         </p:txBody>
@@ -3948,7 +3948,7 @@
               </a:defRPr>
             </a:pPr>
             <a:r>
-              <a:t>Run it anywhere — local, cloud, or managed</a:t>
+              <a:t>Local deployment -- no Docker, no ngrok, no cloud subs</a:t>
             </a:r>
           </a:p>
         </p:txBody>
@@ -4005,7 +4005,7 @@
         <p:spPr>
           <a:xfrm>
             <a:off x="457200" y="1371600"/>
-            <a:ext cx="3657600" cy="2286000"/>
+            <a:ext cx="11247120" cy="1645920"/>
           </a:xfrm>
           <a:prstGeom prst="roundRect">
             <a:avLst/>
@@ -4049,21 +4049,57 @@
         <p:spPr>
           <a:xfrm>
             <a:off x="640080" y="1463040"/>
-            <a:ext cx="3291840" cy="365760"/>
-          </a:xfrm>
-          <a:prstGeom prst="rect">
-            <a:avLst/>
-          </a:prstGeom>
-          <a:noFill/>
-        </p:spPr>
-        <p:txBody>
-          <a:bodyPr wrap="square">
-            <a:spAutoFit/>
-          </a:bodyPr>
-          <a:lstStyle/>
-          <a:p>
-            <a:pPr algn="l">
-              <a:defRPr sz="1800" b="1">
+            <a:ext cx="5029200" cy="365760"/>
+          </a:xfrm>
+          <a:prstGeom prst="rect">
+            <a:avLst/>
+          </a:prstGeom>
+          <a:noFill/>
+        </p:spPr>
+        <p:txBody>
+          <a:bodyPr wrap="square">
+            <a:spAutoFit/>
+          </a:bodyPr>
+          <a:lstStyle/>
+          <a:p>
+            <a:pPr algn="l">
+              <a:defRPr sz="2000" b="1">
+                <a:solidFill>
+                  <a:srgbClr val="FFFFFF"/>
+                </a:solidFill>
+                <a:latin typeface="Calibri"/>
+              </a:defRPr>
+            </a:pPr>
+            <a:r>
+              <a:t>Why Cloudflare Tunnel?</a:t>
+            </a:r>
+          </a:p>
+        </p:txBody>
+      </p:sp>
+      <p:sp>
+        <p:nvSpPr>
+          <p:cNvPr id="9" name="TextBox 8"/>
+          <p:cNvSpPr txBox="1"/>
+          <p:nvPr/>
+        </p:nvSpPr>
+        <p:spPr>
+          <a:xfrm>
+            <a:off x="640080" y="1920240"/>
+            <a:ext cx="2560320" cy="274320"/>
+          </a:xfrm>
+          <a:prstGeom prst="rect">
+            <a:avLst/>
+          </a:prstGeom>
+          <a:noFill/>
+        </p:spPr>
+        <p:txBody>
+          <a:bodyPr wrap="square">
+            <a:spAutoFit/>
+          </a:bodyPr>
+          <a:lstStyle/>
+          <a:p>
+            <a:pPr algn="l">
+              <a:defRPr sz="1400" b="1">
                 <a:solidFill>
                   <a:srgbClr val="A78BFA"/>
                 </a:solidFill>
@@ -4071,21 +4107,21 @@
               </a:defRPr>
             </a:pPr>
             <a:r>
-              <a:t>Local Docker</a:t>
-            </a:r>
-          </a:p>
-        </p:txBody>
-      </p:sp>
-      <p:sp>
-        <p:nvSpPr>
-          <p:cNvPr id="9" name="TextBox 8"/>
-          <p:cNvSpPr txBox="1"/>
-          <p:nvPr/>
-        </p:nvSpPr>
-        <p:spPr>
-          <a:xfrm>
-            <a:off x="640080" y="2011680"/>
-            <a:ext cx="3291840" cy="731520"/>
+              <a:t>Free HTTPS</a:t>
+            </a:r>
+          </a:p>
+        </p:txBody>
+      </p:sp>
+      <p:sp>
+        <p:nvSpPr>
+          <p:cNvPr id="10" name="TextBox 9"/>
+          <p:cNvSpPr txBox="1"/>
+          <p:nvPr/>
+        </p:nvSpPr>
+        <p:spPr>
+          <a:xfrm>
+            <a:off x="640080" y="2194560"/>
+            <a:ext cx="2560320" cy="274320"/>
           </a:xfrm>
           <a:prstGeom prst="rect">
             <a:avLst/>
@@ -4101,27 +4137,63 @@
             <a:pPr algn="l">
               <a:defRPr sz="1200" b="0">
                 <a:solidFill>
-                  <a:srgbClr val="FBBF24"/>
-                </a:solidFill>
-                <a:latin typeface="Calibri"/>
-              </a:defRPr>
-            </a:pPr>
-            <a:r>
-              <a:t>docker run -it --rm -p 5678:5678 docker.n8n.io/n8nio/n8n</a:t>
-            </a:r>
-          </a:p>
-        </p:txBody>
-      </p:sp>
-      <p:sp>
-        <p:nvSpPr>
-          <p:cNvPr id="10" name="TextBox 9"/>
-          <p:cNvSpPr txBox="1"/>
-          <p:nvPr/>
-        </p:nvSpPr>
-        <p:spPr>
-          <a:xfrm>
-            <a:off x="640080" y="2926080"/>
-            <a:ext cx="3291840" cy="365760"/>
+                  <a:srgbClr val="E0E0E0"/>
+                </a:solidFill>
+                <a:latin typeface="Calibri"/>
+              </a:defRPr>
+            </a:pPr>
+            <a:r>
+              <a:t>No URL changes drama</a:t>
+            </a:r>
+          </a:p>
+        </p:txBody>
+      </p:sp>
+      <p:sp>
+        <p:nvSpPr>
+          <p:cNvPr id="11" name="TextBox 10"/>
+          <p:cNvSpPr txBox="1"/>
+          <p:nvPr/>
+        </p:nvSpPr>
+        <p:spPr>
+          <a:xfrm>
+            <a:off x="3383280" y="1920240"/>
+            <a:ext cx="2560320" cy="274320"/>
+          </a:xfrm>
+          <a:prstGeom prst="rect">
+            <a:avLst/>
+          </a:prstGeom>
+          <a:noFill/>
+        </p:spPr>
+        <p:txBody>
+          <a:bodyPr wrap="square">
+            <a:spAutoFit/>
+          </a:bodyPr>
+          <a:lstStyle/>
+          <a:p>
+            <a:pPr algn="l">
+              <a:defRPr sz="1400" b="1">
+                <a:solidFill>
+                  <a:srgbClr val="A78BFA"/>
+                </a:solidFill>
+                <a:latin typeface="Calibri"/>
+              </a:defRPr>
+            </a:pPr>
+            <a:r>
+              <a:t>Stable</a:t>
+            </a:r>
+          </a:p>
+        </p:txBody>
+      </p:sp>
+      <p:sp>
+        <p:nvSpPr>
+          <p:cNvPr id="12" name="TextBox 11"/>
+          <p:cNvSpPr txBox="1"/>
+          <p:nvPr/>
+        </p:nvSpPr>
+        <p:spPr>
+          <a:xfrm>
+            <a:off x="3383280" y="2194560"/>
+            <a:ext cx="2560320" cy="274320"/>
           </a:xfrm>
           <a:prstGeom prst="rect">
             <a:avLst/>
@@ -4137,27 +4209,171 @@
             <a:pPr algn="l">
               <a:defRPr sz="1200" b="0">
                 <a:solidFill>
-                  <a:srgbClr val="34D399"/>
-                </a:solidFill>
-                <a:latin typeface="Calibri"/>
-              </a:defRPr>
-            </a:pPr>
-            <a:r>
-              <a:t>Self-hosted, full control, free</a:t>
-            </a:r>
-          </a:p>
-        </p:txBody>
-      </p:sp>
-      <p:sp>
-        <p:nvSpPr>
-          <p:cNvPr id="11" name="Rounded Rectangle 10"/>
+                  <a:srgbClr val="E0E0E0"/>
+                </a:solidFill>
+                <a:latin typeface="Calibri"/>
+              </a:defRPr>
+            </a:pPr>
+            <a:r>
+              <a:t>Long-running tunnel for bots</a:t>
+            </a:r>
+          </a:p>
+        </p:txBody>
+      </p:sp>
+      <p:sp>
+        <p:nvSpPr>
+          <p:cNvPr id="13" name="TextBox 12"/>
+          <p:cNvSpPr txBox="1"/>
+          <p:nvPr/>
+        </p:nvSpPr>
+        <p:spPr>
+          <a:xfrm>
+            <a:off x="6126480" y="1920240"/>
+            <a:ext cx="2560320" cy="274320"/>
+          </a:xfrm>
+          <a:prstGeom prst="rect">
+            <a:avLst/>
+          </a:prstGeom>
+          <a:noFill/>
+        </p:spPr>
+        <p:txBody>
+          <a:bodyPr wrap="square">
+            <a:spAutoFit/>
+          </a:bodyPr>
+          <a:lstStyle/>
+          <a:p>
+            <a:pPr algn="l">
+              <a:defRPr sz="1400" b="1">
+                <a:solidFill>
+                  <a:srgbClr val="A78BFA"/>
+                </a:solidFill>
+                <a:latin typeface="Calibri"/>
+              </a:defRPr>
+            </a:pPr>
+            <a:r>
+              <a:t>Auto</a:t>
+            </a:r>
+          </a:p>
+        </p:txBody>
+      </p:sp>
+      <p:sp>
+        <p:nvSpPr>
+          <p:cNvPr id="14" name="TextBox 13"/>
+          <p:cNvSpPr txBox="1"/>
+          <p:nvPr/>
+        </p:nvSpPr>
+        <p:spPr>
+          <a:xfrm>
+            <a:off x="6126480" y="2194560"/>
+            <a:ext cx="2560320" cy="274320"/>
+          </a:xfrm>
+          <a:prstGeom prst="rect">
+            <a:avLst/>
+          </a:prstGeom>
+          <a:noFill/>
+        </p:spPr>
+        <p:txBody>
+          <a:bodyPr wrap="square">
+            <a:spAutoFit/>
+          </a:bodyPr>
+          <a:lstStyle/>
+          <a:p>
+            <a:pPr algn="l">
+              <a:defRPr sz="1200" b="0">
+                <a:solidFill>
+                  <a:srgbClr val="E0E0E0"/>
+                </a:solidFill>
+                <a:latin typeface="Calibri"/>
+              </a:defRPr>
+            </a:pPr>
+            <a:r>
+              <a:t>Script reads URL + sets env vars</a:t>
+            </a:r>
+          </a:p>
+        </p:txBody>
+      </p:sp>
+      <p:sp>
+        <p:nvSpPr>
+          <p:cNvPr id="15" name="TextBox 14"/>
+          <p:cNvSpPr txBox="1"/>
+          <p:nvPr/>
+        </p:nvSpPr>
+        <p:spPr>
+          <a:xfrm>
+            <a:off x="8869680" y="1920240"/>
+            <a:ext cx="2560320" cy="274320"/>
+          </a:xfrm>
+          <a:prstGeom prst="rect">
+            <a:avLst/>
+          </a:prstGeom>
+          <a:noFill/>
+        </p:spPr>
+        <p:txBody>
+          <a:bodyPr wrap="square">
+            <a:spAutoFit/>
+          </a:bodyPr>
+          <a:lstStyle/>
+          <a:p>
+            <a:pPr algn="l">
+              <a:defRPr sz="1400" b="1">
+                <a:solidFill>
+                  <a:srgbClr val="A78BFA"/>
+                </a:solidFill>
+                <a:latin typeface="Calibri"/>
+              </a:defRPr>
+            </a:pPr>
+            <a:r>
+              <a:t>Set &amp; Forget</a:t>
+            </a:r>
+          </a:p>
+        </p:txBody>
+      </p:sp>
+      <p:sp>
+        <p:nvSpPr>
+          <p:cNvPr id="16" name="TextBox 15"/>
+          <p:cNvSpPr txBox="1"/>
+          <p:nvPr/>
+        </p:nvSpPr>
+        <p:spPr>
+          <a:xfrm>
+            <a:off x="8869680" y="2194560"/>
+            <a:ext cx="2560320" cy="274320"/>
+          </a:xfrm>
+          <a:prstGeom prst="rect">
+            <a:avLst/>
+          </a:prstGeom>
+          <a:noFill/>
+        </p:spPr>
+        <p:txBody>
+          <a:bodyPr wrap="square">
+            <a:spAutoFit/>
+          </a:bodyPr>
+          <a:lstStyle/>
+          <a:p>
+            <a:pPr algn="l">
+              <a:defRPr sz="1200" b="0">
+                <a:solidFill>
+                  <a:srgbClr val="E0E0E0"/>
+                </a:solidFill>
+                <a:latin typeface="Calibri"/>
+              </a:defRPr>
+            </a:pPr>
+            <a:r>
+              <a:t>Less overhead than ngrok</a:t>
+            </a:r>
+          </a:p>
+        </p:txBody>
+      </p:sp>
+      <p:sp>
+        <p:nvSpPr>
+          <p:cNvPr id="17" name="Rounded Rectangle 16"/>
           <p:cNvSpPr/>
           <p:nvPr/>
         </p:nvSpPr>
         <p:spPr>
           <a:xfrm>
-            <a:off x="4389120" y="1371600"/>
-            <a:ext cx="3657600" cy="2286000"/>
+            <a:off x="457200" y="3200400"/>
+            <a:ext cx="11247120" cy="1645920"/>
           </a:xfrm>
           <a:prstGeom prst="roundRect">
             <a:avLst/>
@@ -4194,122 +4410,194 @@
       </p:sp>
       <p:sp>
         <p:nvSpPr>
-          <p:cNvPr id="12" name="TextBox 11"/>
-          <p:cNvSpPr txBox="1"/>
-          <p:nvPr/>
-        </p:nvSpPr>
-        <p:spPr>
-          <a:xfrm>
-            <a:off x="4572000" y="1463040"/>
-            <a:ext cx="3291840" cy="365760"/>
-          </a:xfrm>
-          <a:prstGeom prst="rect">
-            <a:avLst/>
-          </a:prstGeom>
-          <a:noFill/>
-        </p:spPr>
-        <p:txBody>
-          <a:bodyPr wrap="square">
-            <a:spAutoFit/>
-          </a:bodyPr>
-          <a:lstStyle/>
-          <a:p>
-            <a:pPr algn="l">
-              <a:defRPr sz="1800" b="1">
-                <a:solidFill>
-                  <a:srgbClr val="A78BFA"/>
-                </a:solidFill>
-                <a:latin typeface="Calibri"/>
-              </a:defRPr>
-            </a:pPr>
-            <a:r>
-              <a:t>n8n.cloud</a:t>
-            </a:r>
-          </a:p>
-        </p:txBody>
-      </p:sp>
-      <p:sp>
-        <p:nvSpPr>
-          <p:cNvPr id="13" name="TextBox 12"/>
-          <p:cNvSpPr txBox="1"/>
-          <p:nvPr/>
-        </p:nvSpPr>
-        <p:spPr>
-          <a:xfrm>
-            <a:off x="4572000" y="2011680"/>
-            <a:ext cx="3291840" cy="731520"/>
-          </a:xfrm>
-          <a:prstGeom prst="rect">
-            <a:avLst/>
-          </a:prstGeom>
-          <a:noFill/>
-        </p:spPr>
-        <p:txBody>
-          <a:bodyPr wrap="square">
-            <a:spAutoFit/>
-          </a:bodyPr>
-          <a:lstStyle/>
-          <a:p>
-            <a:pPr algn="l">
-              <a:defRPr sz="1200" b="0">
-                <a:solidFill>
-                  <a:srgbClr val="FBBF24"/>
-                </a:solidFill>
-                <a:latin typeface="Calibri"/>
-              </a:defRPr>
-            </a:pPr>
-            <a:r>
-              <a:t>Managed SaaS at n8n.cloud</a:t>
-            </a:r>
-          </a:p>
-        </p:txBody>
-      </p:sp>
-      <p:sp>
-        <p:nvSpPr>
-          <p:cNvPr id="14" name="TextBox 13"/>
-          <p:cNvSpPr txBox="1"/>
-          <p:nvPr/>
-        </p:nvSpPr>
-        <p:spPr>
-          <a:xfrm>
-            <a:off x="4572000" y="2926080"/>
-            <a:ext cx="3291840" cy="365760"/>
-          </a:xfrm>
-          <a:prstGeom prst="rect">
-            <a:avLst/>
-          </a:prstGeom>
-          <a:noFill/>
-        </p:spPr>
-        <p:txBody>
-          <a:bodyPr wrap="square">
-            <a:spAutoFit/>
-          </a:bodyPr>
-          <a:lstStyle/>
-          <a:p>
-            <a:pPr algn="l">
-              <a:defRPr sz="1200" b="0">
-                <a:solidFill>
-                  <a:srgbClr val="34D399"/>
-                </a:solidFill>
-                <a:latin typeface="Calibri"/>
-              </a:defRPr>
-            </a:pPr>
-            <a:r>
-              <a:t>Zero maintenance, free tier available</a:t>
-            </a:r>
-          </a:p>
-        </p:txBody>
-      </p:sp>
-      <p:sp>
-        <p:nvSpPr>
-          <p:cNvPr id="15" name="Rounded Rectangle 14"/>
+          <p:cNvPr id="18" name="TextBox 17"/>
+          <p:cNvSpPr txBox="1"/>
+          <p:nvPr/>
+        </p:nvSpPr>
+        <p:spPr>
+          <a:xfrm>
+            <a:off x="640080" y="3291840"/>
+            <a:ext cx="5029200" cy="365760"/>
+          </a:xfrm>
+          <a:prstGeom prst="rect">
+            <a:avLst/>
+          </a:prstGeom>
+          <a:noFill/>
+        </p:spPr>
+        <p:txBody>
+          <a:bodyPr wrap="square">
+            <a:spAutoFit/>
+          </a:bodyPr>
+          <a:lstStyle/>
+          <a:p>
+            <a:pPr algn="l">
+              <a:defRPr sz="2000" b="1">
+                <a:solidFill>
+                  <a:srgbClr val="FFFFFF"/>
+                </a:solidFill>
+                <a:latin typeface="Calibri"/>
+              </a:defRPr>
+            </a:pPr>
+            <a:r>
+              <a:t>How to Deploy</a:t>
+            </a:r>
+          </a:p>
+        </p:txBody>
+      </p:sp>
+      <p:sp>
+        <p:nvSpPr>
+          <p:cNvPr id="19" name="TextBox 18"/>
+          <p:cNvSpPr txBox="1"/>
+          <p:nvPr/>
+        </p:nvSpPr>
+        <p:spPr>
+          <a:xfrm>
+            <a:off x="640080" y="3749039"/>
+            <a:ext cx="10058400" cy="320040"/>
+          </a:xfrm>
+          <a:prstGeom prst="rect">
+            <a:avLst/>
+          </a:prstGeom>
+          <a:noFill/>
+        </p:spPr>
+        <p:txBody>
+          <a:bodyPr wrap="square">
+            <a:spAutoFit/>
+          </a:bodyPr>
+          <a:lstStyle/>
+          <a:p>
+            <a:pPr algn="l">
+              <a:defRPr sz="1400" b="0">
+                <a:solidFill>
+                  <a:srgbClr val="E0E0E0"/>
+                </a:solidFill>
+                <a:latin typeface="Calibri"/>
+              </a:defRPr>
+            </a:pPr>
+            <a:r>
+              <a:t>1. Install cloudflared from Cloudflare's download page</a:t>
+            </a:r>
+          </a:p>
+        </p:txBody>
+      </p:sp>
+      <p:sp>
+        <p:nvSpPr>
+          <p:cNvPr id="20" name="TextBox 19"/>
+          <p:cNvSpPr txBox="1"/>
+          <p:nvPr/>
+        </p:nvSpPr>
+        <p:spPr>
+          <a:xfrm>
+            <a:off x="640080" y="4114800"/>
+            <a:ext cx="10058400" cy="320040"/>
+          </a:xfrm>
+          <a:prstGeom prst="rect">
+            <a:avLst/>
+          </a:prstGeom>
+          <a:noFill/>
+        </p:spPr>
+        <p:txBody>
+          <a:bodyPr wrap="square">
+            <a:spAutoFit/>
+          </a:bodyPr>
+          <a:lstStyle/>
+          <a:p>
+            <a:pPr algn="l">
+              <a:defRPr sz="1400" b="0">
+                <a:solidFill>
+                  <a:srgbClr val="E0E0E0"/>
+                </a:solidFill>
+                <a:latin typeface="Calibri"/>
+              </a:defRPr>
+            </a:pPr>
+            <a:r>
+              <a:t>2. Create start_n8n.py (auto-starts tunnel, sets env vars, launches n8n)</a:t>
+            </a:r>
+          </a:p>
+        </p:txBody>
+      </p:sp>
+      <p:sp>
+        <p:nvSpPr>
+          <p:cNvPr id="21" name="TextBox 20"/>
+          <p:cNvSpPr txBox="1"/>
+          <p:nvPr/>
+        </p:nvSpPr>
+        <p:spPr>
+          <a:xfrm>
+            <a:off x="640080" y="4480559"/>
+            <a:ext cx="10058400" cy="320040"/>
+          </a:xfrm>
+          <a:prstGeom prst="rect">
+            <a:avLst/>
+          </a:prstGeom>
+          <a:noFill/>
+        </p:spPr>
+        <p:txBody>
+          <a:bodyPr wrap="square">
+            <a:spAutoFit/>
+          </a:bodyPr>
+          <a:lstStyle/>
+          <a:p>
+            <a:pPr algn="l">
+              <a:defRPr sz="1400" b="0">
+                <a:solidFill>
+                  <a:srgbClr val="E0E0E0"/>
+                </a:solidFill>
+                <a:latin typeface="Calibri"/>
+              </a:defRPr>
+            </a:pPr>
+            <a:r>
+              <a:t>3. Run: python start_n8n.py</a:t>
+            </a:r>
+          </a:p>
+        </p:txBody>
+      </p:sp>
+      <p:sp>
+        <p:nvSpPr>
+          <p:cNvPr id="22" name="TextBox 21"/>
+          <p:cNvSpPr txBox="1"/>
+          <p:nvPr/>
+        </p:nvSpPr>
+        <p:spPr>
+          <a:xfrm>
+            <a:off x="640080" y="4846320"/>
+            <a:ext cx="10058400" cy="320040"/>
+          </a:xfrm>
+          <a:prstGeom prst="rect">
+            <a:avLst/>
+          </a:prstGeom>
+          <a:noFill/>
+        </p:spPr>
+        <p:txBody>
+          <a:bodyPr wrap="square">
+            <a:spAutoFit/>
+          </a:bodyPr>
+          <a:lstStyle/>
+          <a:p>
+            <a:pPr algn="l">
+              <a:defRPr sz="1400" b="0">
+                <a:solidFill>
+                  <a:srgbClr val="E0E0E0"/>
+                </a:solidFill>
+                <a:latin typeface="Calibri"/>
+              </a:defRPr>
+            </a:pPr>
+            <a:r>
+              <a:t>4. Script auto-extracts URL, sets WEBHOOK_URL/N8N_HOST, starts n8n</a:t>
+            </a:r>
+          </a:p>
+        </p:txBody>
+      </p:sp>
+      <p:sp>
+        <p:nvSpPr>
+          <p:cNvPr id="23" name="Rounded Rectangle 22"/>
           <p:cNvSpPr/>
           <p:nvPr/>
         </p:nvSpPr>
         <p:spPr>
           <a:xfrm>
-            <a:off x="8321040" y="1371600"/>
-            <a:ext cx="3657600" cy="2286000"/>
+            <a:off x="457200" y="5029200"/>
+            <a:ext cx="11247120" cy="1554480"/>
           </a:xfrm>
           <a:prstGeom prst="roundRect">
             <a:avLst/>
@@ -4346,122 +4634,14 @@
       </p:sp>
       <p:sp>
         <p:nvSpPr>
-          <p:cNvPr id="16" name="TextBox 15"/>
-          <p:cNvSpPr txBox="1"/>
-          <p:nvPr/>
-        </p:nvSpPr>
-        <p:spPr>
-          <a:xfrm>
-            <a:off x="8503920" y="1463040"/>
-            <a:ext cx="3291840" cy="365760"/>
-          </a:xfrm>
-          <a:prstGeom prst="rect">
-            <a:avLst/>
-          </a:prstGeom>
-          <a:noFill/>
-        </p:spPr>
-        <p:txBody>
-          <a:bodyPr wrap="square">
-            <a:spAutoFit/>
-          </a:bodyPr>
-          <a:lstStyle/>
-          <a:p>
-            <a:pPr algn="l">
-              <a:defRPr sz="1800" b="1">
-                <a:solidFill>
-                  <a:srgbClr val="A78BFA"/>
-                </a:solidFill>
-                <a:latin typeface="Calibri"/>
-              </a:defRPr>
-            </a:pPr>
-            <a:r>
-              <a:t>Railway/Render</a:t>
-            </a:r>
-          </a:p>
-        </p:txBody>
-      </p:sp>
-      <p:sp>
-        <p:nvSpPr>
-          <p:cNvPr id="17" name="TextBox 16"/>
-          <p:cNvSpPr txBox="1"/>
-          <p:nvPr/>
-        </p:nvSpPr>
-        <p:spPr>
-          <a:xfrm>
-            <a:off x="8503920" y="2011680"/>
-            <a:ext cx="3291840" cy="731520"/>
-          </a:xfrm>
-          <a:prstGeom prst="rect">
-            <a:avLst/>
-          </a:prstGeom>
-          <a:noFill/>
-        </p:spPr>
-        <p:txBody>
-          <a:bodyPr wrap="square">
-            <a:spAutoFit/>
-          </a:bodyPr>
-          <a:lstStyle/>
-          <a:p>
-            <a:pPr algn="l">
-              <a:defRPr sz="1200" b="0">
-                <a:solidFill>
-                  <a:srgbClr val="FBBF24"/>
-                </a:solidFill>
-                <a:latin typeface="Calibri"/>
-              </a:defRPr>
-            </a:pPr>
-            <a:r>
-              <a:t>One-click deploy from GitHub</a:t>
-            </a:r>
-          </a:p>
-        </p:txBody>
-      </p:sp>
-      <p:sp>
-        <p:nvSpPr>
-          <p:cNvPr id="18" name="TextBox 17"/>
-          <p:cNvSpPr txBox="1"/>
-          <p:nvPr/>
-        </p:nvSpPr>
-        <p:spPr>
-          <a:xfrm>
-            <a:off x="8503920" y="2926080"/>
-            <a:ext cx="3291840" cy="365760"/>
-          </a:xfrm>
-          <a:prstGeom prst="rect">
-            <a:avLst/>
-          </a:prstGeom>
-          <a:noFill/>
-        </p:spPr>
-        <p:txBody>
-          <a:bodyPr wrap="square">
-            <a:spAutoFit/>
-          </a:bodyPr>
-          <a:lstStyle/>
-          <a:p>
-            <a:pPr algn="l">
-              <a:defRPr sz="1200" b="0">
-                <a:solidFill>
-                  <a:srgbClr val="34D399"/>
-                </a:solidFill>
-                <a:latin typeface="Calibri"/>
-              </a:defRPr>
-            </a:pPr>
-            <a:r>
-              <a:t>Auto-scaling, simple setup</a:t>
-            </a:r>
-          </a:p>
-        </p:txBody>
-      </p:sp>
-      <p:sp>
-        <p:nvSpPr>
-          <p:cNvPr id="19" name="TextBox 18"/>
-          <p:cNvSpPr txBox="1"/>
-          <p:nvPr/>
-        </p:nvSpPr>
-        <p:spPr>
-          <a:xfrm>
-            <a:off x="457200" y="3931920"/>
-            <a:ext cx="10972800" cy="365760"/>
+          <p:cNvPr id="24" name="TextBox 23"/>
+          <p:cNvSpPr txBox="1"/>
+          <p:nvPr/>
+        </p:nvSpPr>
+        <p:spPr>
+          <a:xfrm>
+            <a:off x="640080" y="5120640"/>
+            <a:ext cx="10058400" cy="365760"/>
           </a:xfrm>
           <a:prstGeom prst="rect">
             <a:avLst/>
@@ -4490,14 +4670,14 @@
       </p:sp>
       <p:sp>
         <p:nvSpPr>
-          <p:cNvPr id="20" name="TextBox 19"/>
-          <p:cNvSpPr txBox="1"/>
-          <p:nvPr/>
-        </p:nvSpPr>
-        <p:spPr>
-          <a:xfrm>
-            <a:off x="640080" y="4389120"/>
-            <a:ext cx="10058400" cy="320040"/>
+          <p:cNvPr id="25" name="TextBox 24"/>
+          <p:cNvSpPr txBox="1"/>
+          <p:nvPr/>
+        </p:nvSpPr>
+        <p:spPr>
+          <a:xfrm>
+            <a:off x="640080" y="5486400"/>
+            <a:ext cx="10058400" cy="274320"/>
           </a:xfrm>
           <a:prstGeom prst="rect">
             <a:avLst/>
@@ -4519,21 +4699,21 @@
               </a:defRPr>
             </a:pPr>
             <a:r>
-              <a:t>Add Google PaLM API credential in n8n Settings &gt; Credentials</a:t>
-            </a:r>
-          </a:p>
-        </p:txBody>
-      </p:sp>
-      <p:sp>
-        <p:nvSpPr>
-          <p:cNvPr id="21" name="TextBox 20"/>
-          <p:cNvSpPr txBox="1"/>
-          <p:nvPr/>
-        </p:nvSpPr>
-        <p:spPr>
-          <a:xfrm>
-            <a:off x="640080" y="4800600"/>
-            <a:ext cx="10058400" cy="320040"/>
+              <a:t>Add Google PaLM API credential</a:t>
+            </a:r>
+          </a:p>
+        </p:txBody>
+      </p:sp>
+      <p:sp>
+        <p:nvSpPr>
+          <p:cNvPr id="26" name="TextBox 25"/>
+          <p:cNvSpPr txBox="1"/>
+          <p:nvPr/>
+        </p:nvSpPr>
+        <p:spPr>
+          <a:xfrm>
+            <a:off x="640080" y="5806440"/>
+            <a:ext cx="10058400" cy="274320"/>
           </a:xfrm>
           <a:prstGeom prst="rect">
             <a:avLst/>
@@ -4555,21 +4735,21 @@
               </a:defRPr>
             </a:pPr>
             <a:r>
-              <a:t>Add Telegram Bot credential (token from @BotFather)</a:t>
-            </a:r>
-          </a:p>
-        </p:txBody>
-      </p:sp>
-      <p:sp>
-        <p:nvSpPr>
-          <p:cNvPr id="22" name="TextBox 21"/>
-          <p:cNvSpPr txBox="1"/>
-          <p:nvPr/>
-        </p:nvSpPr>
-        <p:spPr>
-          <a:xfrm>
-            <a:off x="640080" y="5212080"/>
-            <a:ext cx="10058400" cy="320040"/>
+              <a:t>Add Telegram Bot credential</a:t>
+            </a:r>
+          </a:p>
+        </p:txBody>
+      </p:sp>
+      <p:sp>
+        <p:nvSpPr>
+          <p:cNvPr id="27" name="TextBox 26"/>
+          <p:cNvSpPr txBox="1"/>
+          <p:nvPr/>
+        </p:nvSpPr>
+        <p:spPr>
+          <a:xfrm>
+            <a:off x="640080" y="6126480"/>
+            <a:ext cx="10058400" cy="274320"/>
           </a:xfrm>
           <a:prstGeom prst="rect">
             <a:avLst/>
@@ -4591,21 +4771,21 @@
               </a:defRPr>
             </a:pPr>
             <a:r>
-              <a:t>Set Chat ID in both Telegram nodes (Send resume + Send Cover Letter)</a:t>
-            </a:r>
-          </a:p>
-        </p:txBody>
-      </p:sp>
-      <p:sp>
-        <p:nvSpPr>
-          <p:cNvPr id="23" name="TextBox 22"/>
-          <p:cNvSpPr txBox="1"/>
-          <p:nvPr/>
-        </p:nvSpPr>
-        <p:spPr>
-          <a:xfrm>
-            <a:off x="640080" y="5623560"/>
-            <a:ext cx="10058400" cy="320040"/>
+              <a:t>Set Chat ID in Telegram nodes</a:t>
+            </a:r>
+          </a:p>
+        </p:txBody>
+      </p:sp>
+      <p:sp>
+        <p:nvSpPr>
+          <p:cNvPr id="28" name="TextBox 27"/>
+          <p:cNvSpPr txBox="1"/>
+          <p:nvPr/>
+        </p:nvSpPr>
+        <p:spPr>
+          <a:xfrm>
+            <a:off x="640080" y="6446520"/>
+            <a:ext cx="10058400" cy="274320"/>
           </a:xfrm>
           <a:prstGeom prst="rect">
             <a:avLst/>
@@ -4627,21 +4807,21 @@
               </a:defRPr>
             </a:pPr>
             <a:r>
-              <a:t>Copy Production URL from Form Trigger node</a:t>
-            </a:r>
-          </a:p>
-        </p:txBody>
-      </p:sp>
-      <p:sp>
-        <p:nvSpPr>
-          <p:cNvPr id="24" name="TextBox 23"/>
-          <p:cNvSpPr txBox="1"/>
-          <p:nvPr/>
-        </p:nvSpPr>
-        <p:spPr>
-          <a:xfrm>
-            <a:off x="640080" y="6035040"/>
-            <a:ext cx="10058400" cy="320040"/>
+              <a:t>Copy Production URL from Form Trigger</a:t>
+            </a:r>
+          </a:p>
+        </p:txBody>
+      </p:sp>
+      <p:sp>
+        <p:nvSpPr>
+          <p:cNvPr id="29" name="TextBox 28"/>
+          <p:cNvSpPr txBox="1"/>
+          <p:nvPr/>
+        </p:nvSpPr>
+        <p:spPr>
+          <a:xfrm>
+            <a:off x="640080" y="6766560"/>
+            <a:ext cx="10058400" cy="274320"/>
           </a:xfrm>
           <a:prstGeom prst="rect">
             <a:avLst/>
@@ -4663,7 +4843,7 @@
               </a:defRPr>
             </a:pPr>
             <a:r>
-              <a:t>Toggle workflow from Inactive to Active</a:t>
+              <a:t>Toggle workflow to Active</a:t>
             </a:r>
           </a:p>
         </p:txBody>
@@ -7711,7 +7891,7 @@
               </a:defRPr>
             </a:pPr>
             <a:r>
-              <a:t>AI Resume Optimizer — your resume should work as hard as you do.</a:t>
+              <a:t>AI Resume Optimizer -- your resume should work as hard as you do.</a:t>
             </a:r>
           </a:p>
         </p:txBody>
@@ -7747,7 +7927,7 @@
               </a:defRPr>
             </a:pPr>
             <a:r>
-              <a:t>License: MIT — Free to use, modify, share</a:t>
+              <a:t>License: MIT -- Free to use, modify, share</a:t>
             </a:r>
           </a:p>
         </p:txBody>
@@ -8085,7 +8265,7 @@
               </a:defRPr>
             </a:pPr>
             <a:r>
-              <a:t>What does it do? Everything — fully automatically.</a:t>
+              <a:t>What does it do? Everything -- fully automatically.</a:t>
             </a:r>
           </a:p>
         </p:txBody>
@@ -14001,11 +14181,6 @@
             <a:r>
               <a:t>Auto-routes to best available model. Seamless fallback across providers.</a:t>
             </a:r>
-            <a:br/>
-            <a:br/>
-            <a:r>
-              <a:t>Models listed in config.json. Update node parameters to switch.</a:t>
-            </a:r>
           </a:p>
         </p:txBody>
       </p:sp>
@@ -15459,7 +15634,7 @@
               </a:defRPr>
             </a:pPr>
             <a:r>
-              <a:t>5-paragraph HTML cover letters — Gmail-ready</a:t>
+              <a:t>5-paragraph HTML cover letters -- Gmail-ready</a:t>
             </a:r>
           </a:p>
         </p:txBody>
@@ -16190,7 +16365,7 @@
               </a:defRPr>
             </a:pPr>
             <a:r>
-              <a:t>Real data only — never hallucinate</a:t>
+              <a:t>Real data only -- never hallucinate</a:t>
             </a:r>
           </a:p>
         </p:txBody>
@@ -16615,7 +16790,7 @@
               </a:defRPr>
             </a:pPr>
             <a:r>
-              <a:t>Stage 1 — Resume Intelligence</a:t>
+              <a:t>Stage 1 -- Resume Intelligence</a:t>
             </a:r>
           </a:p>
         </p:txBody>
@@ -16875,7 +17050,7 @@
               </a:defRPr>
             </a:pPr>
             <a:r>
-              <a:t>Stage 2 — JD Intelligence</a:t>
+              <a:t>Stage 2 -- JD Intelligence</a:t>
             </a:r>
           </a:p>
         </p:txBody>
@@ -17135,7 +17310,7 @@
               </a:defRPr>
             </a:pPr>
             <a:r>
-              <a:t>Stage 3 — ATS Generation</a:t>
+              <a:t>Stage 3 -- ATS Generation</a:t>
             </a:r>
           </a:p>
         </p:txBody>
